--- a/workshop/materials/day_3/Day 3 - Slides.pptx
+++ b/workshop/materials/day_3/Day 3 - Slides.pptx
@@ -5,98 +5,99 @@
     <p:sldMasterId id="2147483681" r:id="rId1"/>
   </p:sldMasterIdLst>
   <p:notesMasterIdLst>
-    <p:notesMasterId r:id="rId38"/>
+    <p:notesMasterId r:id="rId39"/>
   </p:notesMasterIdLst>
   <p:sldIdLst>
     <p:sldId id="400" r:id="rId2"/>
     <p:sldId id="401" r:id="rId3"/>
-    <p:sldId id="402" r:id="rId4"/>
-    <p:sldId id="483" r:id="rId5"/>
-    <p:sldId id="485" r:id="rId6"/>
-    <p:sldId id="486" r:id="rId7"/>
-    <p:sldId id="487" r:id="rId8"/>
-    <p:sldId id="488" r:id="rId9"/>
-    <p:sldId id="489" r:id="rId10"/>
-    <p:sldId id="490" r:id="rId11"/>
-    <p:sldId id="491" r:id="rId12"/>
-    <p:sldId id="492" r:id="rId13"/>
-    <p:sldId id="493" r:id="rId14"/>
-    <p:sldId id="494" r:id="rId15"/>
-    <p:sldId id="495" r:id="rId16"/>
-    <p:sldId id="496" r:id="rId17"/>
-    <p:sldId id="497" r:id="rId18"/>
-    <p:sldId id="498" r:id="rId19"/>
-    <p:sldId id="499" r:id="rId20"/>
-    <p:sldId id="500" r:id="rId21"/>
-    <p:sldId id="501" r:id="rId22"/>
-    <p:sldId id="502" r:id="rId23"/>
-    <p:sldId id="503" r:id="rId24"/>
-    <p:sldId id="504" r:id="rId25"/>
-    <p:sldId id="505" r:id="rId26"/>
-    <p:sldId id="506" r:id="rId27"/>
-    <p:sldId id="507" r:id="rId28"/>
-    <p:sldId id="508" r:id="rId29"/>
-    <p:sldId id="509" r:id="rId30"/>
-    <p:sldId id="510" r:id="rId31"/>
-    <p:sldId id="511" r:id="rId32"/>
-    <p:sldId id="512" r:id="rId33"/>
-    <p:sldId id="484" r:id="rId34"/>
-    <p:sldId id="405" r:id="rId35"/>
-    <p:sldId id="418" r:id="rId36"/>
-    <p:sldId id="454" r:id="rId37"/>
+    <p:sldId id="485" r:id="rId4"/>
+    <p:sldId id="402" r:id="rId5"/>
+    <p:sldId id="483" r:id="rId6"/>
+    <p:sldId id="513" r:id="rId7"/>
+    <p:sldId id="486" r:id="rId8"/>
+    <p:sldId id="487" r:id="rId9"/>
+    <p:sldId id="488" r:id="rId10"/>
+    <p:sldId id="489" r:id="rId11"/>
+    <p:sldId id="490" r:id="rId12"/>
+    <p:sldId id="491" r:id="rId13"/>
+    <p:sldId id="492" r:id="rId14"/>
+    <p:sldId id="493" r:id="rId15"/>
+    <p:sldId id="494" r:id="rId16"/>
+    <p:sldId id="495" r:id="rId17"/>
+    <p:sldId id="496" r:id="rId18"/>
+    <p:sldId id="497" r:id="rId19"/>
+    <p:sldId id="498" r:id="rId20"/>
+    <p:sldId id="499" r:id="rId21"/>
+    <p:sldId id="500" r:id="rId22"/>
+    <p:sldId id="501" r:id="rId23"/>
+    <p:sldId id="502" r:id="rId24"/>
+    <p:sldId id="503" r:id="rId25"/>
+    <p:sldId id="504" r:id="rId26"/>
+    <p:sldId id="505" r:id="rId27"/>
+    <p:sldId id="506" r:id="rId28"/>
+    <p:sldId id="507" r:id="rId29"/>
+    <p:sldId id="508" r:id="rId30"/>
+    <p:sldId id="509" r:id="rId31"/>
+    <p:sldId id="510" r:id="rId32"/>
+    <p:sldId id="511" r:id="rId33"/>
+    <p:sldId id="512" r:id="rId34"/>
+    <p:sldId id="484" r:id="rId35"/>
+    <p:sldId id="405" r:id="rId36"/>
+    <p:sldId id="418" r:id="rId37"/>
+    <p:sldId id="454" r:id="rId38"/>
   </p:sldIdLst>
   <p:sldSz cx="9144000" cy="5143500" type="screen16x9"/>
   <p:notesSz cx="6858000" cy="9144000"/>
   <p:embeddedFontLst>
     <p:embeddedFont>
       <p:font typeface="Barlow Semi Condensed" pitchFamily="2" charset="77"/>
-      <p:regular r:id="rId39"/>
-      <p:bold r:id="rId40"/>
-      <p:italic r:id="rId41"/>
-      <p:boldItalic r:id="rId42"/>
+      <p:regular r:id="rId40"/>
+      <p:bold r:id="rId41"/>
+      <p:italic r:id="rId42"/>
+      <p:boldItalic r:id="rId43"/>
     </p:embeddedFont>
     <p:embeddedFont>
       <p:font typeface="Barlow Semi Condensed Medium" pitchFamily="2" charset="77"/>
-      <p:regular r:id="rId43"/>
-      <p:bold r:id="rId44"/>
-      <p:italic r:id="rId45"/>
-      <p:boldItalic r:id="rId46"/>
+      <p:regular r:id="rId44"/>
+      <p:bold r:id="rId45"/>
+      <p:italic r:id="rId46"/>
+      <p:boldItalic r:id="rId47"/>
     </p:embeddedFont>
     <p:embeddedFont>
       <p:font typeface="Consolas" panose="020B0609020204030204" pitchFamily="49" charset="0"/>
-      <p:regular r:id="rId47"/>
-      <p:bold r:id="rId48"/>
-      <p:italic r:id="rId49"/>
-      <p:boldItalic r:id="rId50"/>
+      <p:regular r:id="rId48"/>
+      <p:bold r:id="rId49"/>
+      <p:italic r:id="rId50"/>
+      <p:boldItalic r:id="rId51"/>
     </p:embeddedFont>
     <p:embeddedFont>
       <p:font typeface="Montserrat" pitchFamily="2" charset="77"/>
-      <p:regular r:id="rId51"/>
-      <p:bold r:id="rId52"/>
-      <p:italic r:id="rId53"/>
-      <p:boldItalic r:id="rId54"/>
+      <p:regular r:id="rId52"/>
+      <p:bold r:id="rId53"/>
+      <p:italic r:id="rId54"/>
+      <p:boldItalic r:id="rId55"/>
     </p:embeddedFont>
     <p:embeddedFont>
       <p:font typeface="Montserrat Light" panose="00000400000000000000" pitchFamily="2" charset="77"/>
-      <p:regular r:id="rId55"/>
-      <p:italic r:id="rId56"/>
+      <p:regular r:id="rId56"/>
+      <p:italic r:id="rId57"/>
     </p:embeddedFont>
     <p:embeddedFont>
       <p:font typeface="Montserrat Medium" panose="00000600000000000000" pitchFamily="2" charset="77"/>
-      <p:regular r:id="rId57"/>
-      <p:italic r:id="rId58"/>
+      <p:regular r:id="rId58"/>
+      <p:italic r:id="rId59"/>
     </p:embeddedFont>
     <p:embeddedFont>
       <p:font typeface="Montserrat SemiBold" panose="00000700000000000000" pitchFamily="2" charset="77"/>
-      <p:regular r:id="rId59"/>
-      <p:bold r:id="rId60"/>
-      <p:italic r:id="rId61"/>
-      <p:boldItalic r:id="rId62"/>
+      <p:regular r:id="rId60"/>
+      <p:bold r:id="rId61"/>
+      <p:italic r:id="rId62"/>
+      <p:boldItalic r:id="rId63"/>
     </p:embeddedFont>
     <p:embeddedFont>
       <p:font typeface="Roboto Slab" pitchFamily="2" charset="0"/>
-      <p:regular r:id="rId63"/>
-      <p:bold r:id="rId64"/>
+      <p:regular r:id="rId64"/>
+      <p:bold r:id="rId65"/>
     </p:embeddedFont>
   </p:embeddedFontLst>
   <p:defaultTextStyle>
@@ -908,7 +909,12 @@
             <p:ph type="sldImg"/>
           </p:nvPr>
         </p:nvSpPr>
-        <p:spPr/>
+        <p:spPr>
+          <a:xfrm>
+            <a:off x="381000" y="685800"/>
+            <a:ext cx="6096000" cy="3429000"/>
+          </a:xfrm>
+        </p:spPr>
       </p:sp>
       <p:sp>
         <p:nvSpPr>
@@ -927,7 +933,21 @@
           <a:p>
             <a:r>
               <a:rPr lang="en-US" dirty="0"/>
-              <a:t>This is the central idea of the section. An LLM with no context invents plausible nonsense; the same LLM *pointed at your files* produces code that fits your project. A clean, well-named repo is essentially pre-written context. We'll make this literal later with "Copy Relative Path" — handing the model the exact file to read. The better your Day 1 structure, the better every prompt you ever write.</a:t>
+              <a:t>The software and code you saw for a *</a:t>
+            </a:r>
+            <a:r>
+              <a:rPr lang="en-US" dirty="0" err="1"/>
+              <a:t>reproducibe</a:t>
+            </a:r>
+            <a:r>
+              <a:rPr lang="en-US" dirty="0"/>
+              <a:t>* (structure, version control, plain-text scripts) turn out to be the same habits that make AI assistance *safe and effective*. </a:t>
+            </a:r>
+          </a:p>
+          <a:p>
+            <a:r>
+              <a:rPr lang="en-US" dirty="0"/>
+              <a:t>Walk through the four points one slide at a time.</a:t>
             </a:r>
           </a:p>
         </p:txBody>
@@ -949,7 +969,7 @@
           <a:p>
             <a:fld id="{F7021451-1387-4CA6-816F-3879F97B5CBC}" type="slidenum">
               <a:rPr lang="en-US"/>
-              <a:t>12</a:t>
+              <a:t>11</a:t>
             </a:fld>
             <a:endParaRPr lang="en-US"/>
           </a:p>
@@ -995,7 +1015,12 @@
             <p:ph type="sldImg"/>
           </p:nvPr>
         </p:nvSpPr>
-        <p:spPr/>
+        <p:spPr>
+          <a:xfrm>
+            <a:off x="381000" y="685800"/>
+            <a:ext cx="6096000" cy="3429000"/>
+          </a:xfrm>
+        </p:spPr>
       </p:sp>
       <p:sp>
         <p:nvSpPr>
@@ -1014,7 +1039,7 @@
           <a:p>
             <a:r>
               <a:rPr lang="en-US" dirty="0"/>
-              <a:t>This is the safety mechanism that makes AI assistance acceptable in research. The nightmare scenario — "the AI silently changed something and now my results are different" — is exactly what Git prevents. Every AI edit shows up as a diff you can read, accept, or throw away. Reviewing an AI's diff is the same skill as reviewing a collaborator's pull request from Day 2. The VS Code Source Control panel shows these diffs visually; we'll see it shortly.</a:t>
+              <a:t>Tie back to the Day 1 argument for open tooling. A hidden benefit of building on R, tidyverse, Quarto and Git: these are some of the most-documented, most-discussed tools on the internet, so the model has seen every common pattern and error. Ask an LLM about a `ggplot` layer or a Quarto YAML key and it answers well; ask about a bespoke internal macro and it guesses. Open-source choices pay off twice.</a:t>
             </a:r>
           </a:p>
         </p:txBody>
@@ -1036,7 +1061,7 @@
           <a:p>
             <a:fld id="{F7021451-1387-4CA6-816F-3879F97B5CBC}" type="slidenum">
               <a:rPr lang="en-US"/>
-              <a:t>13</a:t>
+              <a:t>12</a:t>
             </a:fld>
             <a:endParaRPr lang="en-US"/>
           </a:p>
@@ -1101,7 +1126,7 @@
           <a:p>
             <a:r>
               <a:rPr lang="en-US" dirty="0"/>
-              <a:t>Close the section by combining the previous two ideas. Branches (Day 2) turn the AI from a risk into a free experiment: spin up a branch, let it attempt something ambitious, and you have a guaranteed escape hatch. Worst case you `git switch main` and the branch is gone. This is why people who know Git are comfortable handing an agent real work — the blast radius is contained.</a:t>
+              <a:t>This is the central idea of the section. An LLM with no context invents plausible nonsense; the same LLM *pointed at your files* produces code that fits your project. A clean, well-named repo is essentially pre-written context. We'll make this literal later with "Copy Relative Path" — handing the model the exact file to read. The better your Day 1 structure, the better every prompt you ever write.</a:t>
             </a:r>
           </a:p>
         </p:txBody>
@@ -1123,7 +1148,7 @@
           <a:p>
             <a:fld id="{F7021451-1387-4CA6-816F-3879F97B5CBC}" type="slidenum">
               <a:rPr lang="en-US"/>
-              <a:t>14</a:t>
+              <a:t>13</a:t>
             </a:fld>
             <a:endParaRPr lang="en-US"/>
           </a:p>
@@ -1188,7 +1213,7 @@
           <a:p>
             <a:r>
               <a:rPr lang="en-US" dirty="0"/>
-              <a:t>Set expectations: we are not abandoning RStudio. RStudio remains the friendliest place to learn R and to use the Console/Environment panes. VS Code earns its place today for one reason — it is where the AI ecosystem lives. Almost every assistant ships as a VS Code extension first. Reassure nervous participants: the project, the files, and Git are identical; only the window around them changes.</a:t>
+              <a:t>This is the safety mechanism that makes AI assistance acceptable in research. The nightmare scenario — "the AI silently changed something and now my results are different" — is exactly what Git prevents. Every AI edit shows up as a diff you can read, accept, or throw away. Reviewing an AI's diff is the same skill as reviewing a collaborator's pull request from Day 2. The VS Code Source Control panel shows these diffs visually; we'll see it shortly.</a:t>
             </a:r>
           </a:p>
         </p:txBody>
@@ -1210,7 +1235,7 @@
           <a:p>
             <a:fld id="{F7021451-1387-4CA6-816F-3879F97B5CBC}" type="slidenum">
               <a:rPr lang="en-US"/>
-              <a:t>15</a:t>
+              <a:t>14</a:t>
             </a:fld>
             <a:endParaRPr lang="en-US"/>
           </a:p>
@@ -1275,7 +1300,7 @@
           <a:p>
             <a:r>
               <a:rPr lang="en-US" dirty="0"/>
-              <a:t>This is the slide that lowers the fear. Go pane by pane and name the VS Code equivalent. The two biggest mental shifts: (1) you open a *folder* (or the `.code-workspace` file), not an `.Rproj`; and (2) there's no always-on Environment pane — you lean on the Console and the data viewer from the R extension instead. The Explorer (file tree), the editor, and Source Control will feel familiar within minutes. Demo it live with this exact repo open in both editors side by side.</a:t>
+              <a:t>Close the section by combining the previous two ideas. Branches (Day 2) turn the AI from a risk into a free experiment: spin up a branch, let it attempt something ambitious, and you have a guaranteed escape hatch. Worst case you `git switch main` and the branch is gone. This is why people who know Git are comfortable handing an agent real work — the blast radius is contained.</a:t>
             </a:r>
           </a:p>
         </p:txBody>
@@ -1297,7 +1322,7 @@
           <a:p>
             <a:fld id="{F7021451-1387-4CA6-816F-3879F97B5CBC}" type="slidenum">
               <a:rPr lang="en-US"/>
-              <a:t>16</a:t>
+              <a:t>15</a:t>
             </a:fld>
             <a:endParaRPr lang="en-US"/>
           </a:p>
@@ -1362,7 +1387,7 @@
           <a:p>
             <a:r>
               <a:rPr lang="en-US" dirty="0"/>
-              <a:t>Keep this slow and browser-then-install, mirroring Day 1's install discipline. The single most common stumble is opening a *file* instead of the *folder* — if the Explorer looks empty or Git doesn't show up, that's almost always the cause. Walk the room. This is a low-risk install (no admin tricks, no PATH issues like Git had on Day 1), so it should go quickly and build confidence before the model installs.</a:t>
+              <a:t>Set expectations: we are not abandoning RStudio. RStudio remains the friendliest place to learn R and to use the Console/Environment panes. VS Code earns its place today for one reason — it is where the AI ecosystem lives. Almost every assistant ships as a VS Code extension first. Reassure nervous participants: the project, the files, and Git are identical; only the window around them changes.</a:t>
             </a:r>
           </a:p>
         </p:txBody>
@@ -1384,7 +1409,7 @@
           <a:p>
             <a:fld id="{F7021451-1387-4CA6-816F-3879F97B5CBC}" type="slidenum">
               <a:rPr lang="en-US"/>
-              <a:t>17</a:t>
+              <a:t>16</a:t>
             </a:fld>
             <a:endParaRPr lang="en-US"/>
           </a:p>
@@ -1449,7 +1474,7 @@
           <a:p>
             <a:r>
               <a:rPr lang="en-US" dirty="0"/>
-              <a:t>Four extensions, two jobs. The R and Quarto extensions rebuild the parts of RStudio you'd miss (running code, rendering reports). Continue and Copilot are the AI layer — Continue because it can point at a *local, private* model (the next section), Copilot because its free tier lets everyone try a real assistant with no credit card. Mention that the R extension also wants the `languageserver` R package installed (`install.packages("languageserver")`) for full features — flag it so it's not a surprise.</a:t>
+              <a:t>This is the slide that lowers the fear. Go pane by pane and name the VS Code equivalent. The two biggest mental shifts: (1) you open a *folder* (or the `.code-workspace` file), not an `.Rproj`; and (2) there's no always-on Environment pane — you lean on the Console and the data viewer from the R extension instead. The Explorer (file tree), the editor, and Source Control will feel familiar within minutes. Demo it live with this exact repo open in both editors side by side.</a:t>
             </a:r>
           </a:p>
         </p:txBody>
@@ -1471,7 +1496,7 @@
           <a:p>
             <a:fld id="{F7021451-1387-4CA6-816F-3879F97B5CBC}" type="slidenum">
               <a:rPr lang="en-US"/>
-              <a:t>18</a:t>
+              <a:t>17</a:t>
             </a:fld>
             <a:endParaRPr lang="en-US"/>
           </a:p>
@@ -1536,7 +1561,7 @@
           <a:p>
             <a:r>
               <a:rPr lang="en-US" dirty="0"/>
-              <a:t>This is the Day 3 data-protection checkpoint, now aimed squarely at AI. The mental model: the assistant is another place data can leak to, alongside Git, email, and Overleaf. Cloud assistants (ChatGPT, Claude, Copilot) send what you show them to a server. The good news, on the next two slides: this repo is *configured* to keep your raw data out of the assistant's reach by default — you don't have to remember to be careful, the project remembers for you.</a:t>
+              <a:t>Keep this slow and browser-then-install, mirroring Day 1's install discipline. The single most common stumble is opening a *file* instead of the *folder* — if the Explorer looks empty or Git doesn't show up, that's almost always the cause. Walk the room. This is a low-risk install (no admin tricks, no PATH issues like Git had on Day 1), so it should go quickly and build confidence before the model installs.</a:t>
             </a:r>
           </a:p>
         </p:txBody>
@@ -1558,7 +1583,7 @@
           <a:p>
             <a:fld id="{F7021451-1387-4CA6-816F-3879F97B5CBC}" type="slidenum">
               <a:rPr lang="en-US"/>
-              <a:t>19</a:t>
+              <a:t>18</a:t>
             </a:fld>
             <a:endParaRPr lang="en-US"/>
           </a:p>
@@ -1623,7 +1648,7 @@
           <a:p>
             <a:r>
               <a:rPr lang="en-US" dirty="0"/>
-              <a:t>Open the `.llm.code-workspace` file live and show `data/raw/` literally vanishing from the Explorer. The point: this is the *first* line of defense and it's ergonomic — you can't accidentally drag a raw-data file into a prompt if you can't even see it. Stress that `data/mock/` (synthetic) remains visible on purpose, so the workshop exercises still work. When working with AI, open the `.llm` workspace; that's the habit.</a:t>
+              <a:t>Four extensions, two jobs. The R and Quarto extensions rebuild the parts of RStudio you'd miss (running code, rendering reports). Continue and Copilot are the AI layer — Continue because it can point at a *local, private* model (the next section), Copilot because its free tier lets everyone try a real assistant with no credit card. Mention that the R extension also wants the `languageserver` R package installed (`install.packages("languageserver")`) for full features — flag it so it's not a surprise.</a:t>
             </a:r>
           </a:p>
         </p:txBody>
@@ -1645,7 +1670,7 @@
           <a:p>
             <a:fld id="{F7021451-1387-4CA6-816F-3879F97B5CBC}" type="slidenum">
               <a:rPr lang="en-US"/>
-              <a:t>20</a:t>
+              <a:t>19</a:t>
             </a:fld>
             <a:endParaRPr lang="en-US"/>
           </a:p>
@@ -1710,7 +1735,7 @@
           <a:p>
             <a:r>
               <a:rPr lang="en-US" dirty="0"/>
-              <a:t>This is belt *and* suspenders. The workspace *hides* the data; `.claude/settings.json` *forbids* reading it even if something tries. Great live demo (it actually happened while building these slides): ask the assistant to read a file under `data/raw/` and watch it get denied with a message naming the rule. If a task genuinely needs real data, you edit the rule for that session and revert — a deliberate, logged choice, not an accident. The honest caveat is on the next slide.</a:t>
+              <a:t>This is the Day 3 data-protection checkpoint, now aimed squarely at AI. The mental model: the assistant is another place data can leak to, alongside Git, email, and Overleaf. Cloud assistants (ChatGPT, Claude, Copilot) send what you show them to a server. The good news, on the next two slides: this repo is *configured* to keep your raw data out of the assistant's reach by default — you don't have to remember to be careful, the project remembers for you.</a:t>
             </a:r>
           </a:p>
         </p:txBody>
@@ -1732,7 +1757,7 @@
           <a:p>
             <a:fld id="{F7021451-1387-4CA6-816F-3879F97B5CBC}" type="slidenum">
               <a:rPr lang="en-US"/>
-              <a:t>21</a:t>
+              <a:t>20</a:t>
             </a:fld>
             <a:endParaRPr lang="en-US"/>
           </a:p>
@@ -1995,7 +2020,7 @@
           <a:p>
             <a:r>
               <a:rPr lang="en-US" dirty="0"/>
-              <a:t>End the security block honestly. The repo protects the *integrated* path — the assistant working inside your project. It cannot protect a browser tab where you paste a spreadsheet into a chat box. That last gap is a human decision, which loops back to the checkpoint rule: scripts yes, raw data no, outputs only if non-identifiable. Optionally mention the manuscript's AI-use statement here as the place you *disclose* what you did.</a:t>
+              <a:t>Open the `.llm.code-workspace` file live and show `data/raw/` literally vanishing from the Explorer. The point: this is the *first* line of defense and it's ergonomic — you can't accidentally drag a raw-data file into a prompt if you can't even see it. Stress that `data/mock/` (synthetic) remains visible on purpose, so the workshop exercises still work. When working with AI, open the `.llm` workspace; that's the habit.</a:t>
             </a:r>
           </a:p>
         </p:txBody>
@@ -2017,7 +2042,7 @@
           <a:p>
             <a:fld id="{F7021451-1387-4CA6-816F-3879F97B5CBC}" type="slidenum">
               <a:rPr lang="en-US"/>
-              <a:t>22</a:t>
+              <a:t>21</a:t>
             </a:fld>
             <a:endParaRPr lang="en-US"/>
           </a:p>
@@ -2082,7 +2107,7 @@
           <a:p>
             <a:r>
               <a:rPr lang="en-US" dirty="0"/>
-              <a:t>Give the three-tool map so names stop being confusing. Hugging Face is the catalog (you'll see it referenced everywhere). LM Studio is the easiest on-ramp — a normal app with a search box and a chat window, no terminal. Continue is the bridge into VS Code we installed earlier. The headline selling point of all three: the model runs *on your laptop*, so it's the privacy-preserving option for sensitive data — nothing is sent to a server.</a:t>
+              <a:t>This is belt *and* suspenders. The workspace *hides* the data; `.claude/settings.json` *forbids* reading it even if something tries. Great live demo (it actually happened while building these slides): ask the assistant to read a file under `data/raw/` and watch it get denied with a message naming the rule. If a task genuinely needs real data, you edit the rule for that session and revert — a deliberate, logged choice, not an accident. The honest caveat is on the next slide.</a:t>
             </a:r>
           </a:p>
         </p:txBody>
@@ -2104,7 +2129,7 @@
           <a:p>
             <a:fld id="{F7021451-1387-4CA6-816F-3879F97B5CBC}" type="slidenum">
               <a:rPr lang="en-US"/>
-              <a:t>23</a:t>
+              <a:t>22</a:t>
             </a:fld>
             <a:endParaRPr lang="en-US"/>
           </a:p>
@@ -2169,7 +2194,7 @@
           <a:p>
             <a:r>
               <a:rPr lang="en-US" dirty="0"/>
-              <a:t>Manage expectations hard. Many people in the room have laptops that will struggle — say so up front so a slow or dumb local model feels like a *successful demo of the concept*, not a personal failure. Qwen2.5-0.5B is the "runs on a potato" choice; it's not smart, but it proves the pipeline end to end. "Quantisation" in one line: a compressed version of the model — smaller and faster, slightly less precise; Q4 is the sweet spot. Bigger models are better but need RAM; don't let anyone download an 8B model onto a 4 GB machine and conclude AI is broken.</a:t>
+              <a:t>End the security block honestly. The repo protects the *integrated* path — the assistant working inside your project. It cannot protect a browser tab where you paste a spreadsheet into a chat box. That last gap is a human decision, which loops back to the checkpoint rule: scripts yes, raw data no, outputs only if non-identifiable. Optionally mention the manuscript's AI-use statement here as the place you *disclose* what you did.</a:t>
             </a:r>
           </a:p>
         </p:txBody>
@@ -2191,7 +2216,7 @@
           <a:p>
             <a:fld id="{F7021451-1387-4CA6-816F-3879F97B5CBC}" type="slidenum">
               <a:rPr lang="en-US"/>
-              <a:t>24</a:t>
+              <a:t>23</a:t>
             </a:fld>
             <a:endParaRPr lang="en-US"/>
           </a:p>
@@ -2256,7 +2281,7 @@
           <a:p>
             <a:r>
               <a:rPr lang="en-US" dirty="0"/>
-              <a:t>This is the confidence-builder. The win condition is low on purpose: any coherent sentence = success. Tie the streaming output back to Slide E3 — they are literally watching "predict the next token" happen. Have a fallback ready (a neighbour's machine, or your own screen) so people on weak hardware still see it work. Optional stretch goal for the fast finishers: open Continue in VS Code and point it at the LM Studio model so the assistant lives next to their code.</a:t>
+              <a:t>Give the three-tool map so names stop being confusing. Hugging Face is the catalog (you'll see it referenced everywhere). LM Studio is the easiest on-ramp — a normal app with a search box and a chat window, no terminal. Continue is the bridge into VS Code we installed earlier. The headline selling point of all three: the model runs *on your laptop*, so it's the privacy-preserving option for sensitive data — nothing is sent to a server.</a:t>
             </a:r>
           </a:p>
         </p:txBody>
@@ -2278,7 +2303,7 @@
           <a:p>
             <a:fld id="{F7021451-1387-4CA6-816F-3879F97B5CBC}" type="slidenum">
               <a:rPr lang="en-US"/>
-              <a:t>25</a:t>
+              <a:t>24</a:t>
             </a:fld>
             <a:endParaRPr lang="en-US"/>
           </a:p>
@@ -2343,7 +2368,7 @@
           <a:p>
             <a:r>
               <a:rPr lang="en-US" dirty="0"/>
-              <a:t>Resolve the local-model section by positioning it honestly against what's next. The local model's superpower is privacy; its weakness is capability. Frontier models flip both. The decision rule is about the *data*, not the task: if it's sensitive, keep it local (or don't send it at all); if it's the public/mock project, the frontier model's power is worth it. This sets up the final, most impressive section.</a:t>
+              <a:t>Manage expectations hard. Many people in the room have laptops that will struggle — say so up front so a slow or dumb local model feels like a *successful demo of the concept*, not a personal failure. Qwen2.5-0.5B is the "runs on a potato" choice; it's not smart, but it proves the pipeline end to end. "Quantisation" in one line: a compressed version of the model — smaller and faster, slightly less precise; Q4 is the sweet spot. Bigger models are better but need RAM; don't let anyone download an 8B model onto a 4 GB machine and conclude AI is broken.</a:t>
             </a:r>
           </a:p>
         </p:txBody>
@@ -2365,7 +2390,7 @@
           <a:p>
             <a:fld id="{F7021451-1387-4CA6-816F-3879F97B5CBC}" type="slidenum">
               <a:rPr lang="en-US"/>
-              <a:t>26</a:t>
+              <a:t>25</a:t>
             </a:fld>
             <a:endParaRPr lang="en-US"/>
           </a:p>
@@ -2430,7 +2455,7 @@
           <a:p>
             <a:r>
               <a:rPr lang="en-US" dirty="0"/>
-              <a:t>Introduce the heavyweights briefly and without brand wars — both are excellent; the point is the *class* of tool. The key reframing for the room: with frontier models, your leverage comes from how well you *describe and contextualise* the task, not from how well you write R by hand. A mediocre prompt wastes a brilliant model. The rest of the section teaches the prompting craft and then proves it with a demo.</a:t>
+              <a:t>This is the confidence-builder. The win condition is low on purpose: any coherent sentence = success. Tie the streaming output back to Slide E3 — they are literally watching "predict the next token" happen. Have a fallback ready (a neighbour's machine, or your own screen) so people on weak hardware still see it work. Optional stretch goal for the fast finishers: open Continue in VS Code and point it at the LM Studio model so the assistant lives next to their code.</a:t>
             </a:r>
           </a:p>
         </p:txBody>
@@ -2452,7 +2477,7 @@
           <a:p>
             <a:fld id="{F7021451-1387-4CA6-816F-3879F97B5CBC}" type="slidenum">
               <a:rPr lang="en-US"/>
-              <a:t>27</a:t>
+              <a:t>26</a:t>
             </a:fld>
             <a:endParaRPr lang="en-US"/>
           </a:p>
@@ -2472,6 +2497,180 @@
 </file>
 
 <file path=ppt/notesSlides/notesSlide26.xml><?xml version="1.0" encoding="utf-8"?>
+<p:notes xmlns:a="http://schemas.openxmlformats.org/drawingml/2006/main" xmlns:r="http://schemas.openxmlformats.org/officeDocument/2006/relationships" xmlns:p="http://schemas.openxmlformats.org/presentationml/2006/main">
+  <p:cSld>
+    <p:spTree>
+      <p:nvGrpSpPr>
+        <p:cNvPr id="1" name=""/>
+        <p:cNvGrpSpPr/>
+        <p:nvPr/>
+      </p:nvGrpSpPr>
+      <p:grpSpPr>
+        <a:xfrm>
+          <a:off x="0" y="0"/>
+          <a:ext cx="0" cy="0"/>
+          <a:chOff x="0" y="0"/>
+          <a:chExt cx="0" cy="0"/>
+        </a:xfrm>
+      </p:grpSpPr>
+      <p:sp>
+        <p:nvSpPr>
+          <p:cNvPr id="2" name="Slide Image Placeholder 1"/>
+          <p:cNvSpPr>
+            <a:spLocks noGrp="1" noRot="1" noChangeAspect="1"/>
+          </p:cNvSpPr>
+          <p:nvPr>
+            <p:ph type="sldImg"/>
+          </p:nvPr>
+        </p:nvSpPr>
+        <p:spPr/>
+      </p:sp>
+      <p:sp>
+        <p:nvSpPr>
+          <p:cNvPr id="3" name="Notes Placeholder 2"/>
+          <p:cNvSpPr>
+            <a:spLocks noGrp="1"/>
+          </p:cNvSpPr>
+          <p:nvPr>
+            <p:ph type="body" idx="1"/>
+          </p:nvPr>
+        </p:nvSpPr>
+        <p:spPr/>
+        <p:txBody>
+          <a:bodyPr/>
+          <a:lstStyle/>
+          <a:p>
+            <a:r>
+              <a:rPr lang="en-US" dirty="0"/>
+              <a:t>Resolve the local-model section by positioning it honestly against what's next. The local model's superpower is privacy; its weakness is capability. Frontier models flip both. The decision rule is about the *data*, not the task: if it's sensitive, keep it local (or don't send it at all); if it's the public/mock project, the frontier model's power is worth it. This sets up the final, most impressive section.</a:t>
+            </a:r>
+          </a:p>
+        </p:txBody>
+      </p:sp>
+      <p:sp>
+        <p:nvSpPr>
+          <p:cNvPr id="4" name="Slide Number Placeholder 3"/>
+          <p:cNvSpPr>
+            <a:spLocks noGrp="1"/>
+          </p:cNvSpPr>
+          <p:nvPr>
+            <p:ph type="sldNum" sz="quarter" idx="10"/>
+          </p:nvPr>
+        </p:nvSpPr>
+        <p:spPr/>
+        <p:txBody>
+          <a:bodyPr/>
+          <a:lstStyle/>
+          <a:p>
+            <a:fld id="{F7021451-1387-4CA6-816F-3879F97B5CBC}" type="slidenum">
+              <a:rPr lang="en-US"/>
+              <a:t>27</a:t>
+            </a:fld>
+            <a:endParaRPr lang="en-US"/>
+          </a:p>
+        </p:txBody>
+      </p:sp>
+    </p:spTree>
+    <p:extLst>
+      <p:ext uri="{BB962C8B-B14F-4D97-AF65-F5344CB8AC3E}">
+        <p14:creationId xmlns:p14="http://schemas.microsoft.com/office/powerpoint/2010/main" val="1024086991"/>
+      </p:ext>
+    </p:extLst>
+  </p:cSld>
+  <p:clrMapOvr>
+    <a:masterClrMapping/>
+  </p:clrMapOvr>
+</p:notes>
+</file>
+
+<file path=ppt/notesSlides/notesSlide27.xml><?xml version="1.0" encoding="utf-8"?>
+<p:notes xmlns:a="http://schemas.openxmlformats.org/drawingml/2006/main" xmlns:r="http://schemas.openxmlformats.org/officeDocument/2006/relationships" xmlns:p="http://schemas.openxmlformats.org/presentationml/2006/main">
+  <p:cSld>
+    <p:spTree>
+      <p:nvGrpSpPr>
+        <p:cNvPr id="1" name=""/>
+        <p:cNvGrpSpPr/>
+        <p:nvPr/>
+      </p:nvGrpSpPr>
+      <p:grpSpPr>
+        <a:xfrm>
+          <a:off x="0" y="0"/>
+          <a:ext cx="0" cy="0"/>
+          <a:chOff x="0" y="0"/>
+          <a:chExt cx="0" cy="0"/>
+        </a:xfrm>
+      </p:grpSpPr>
+      <p:sp>
+        <p:nvSpPr>
+          <p:cNvPr id="2" name="Slide Image Placeholder 1"/>
+          <p:cNvSpPr>
+            <a:spLocks noGrp="1" noRot="1" noChangeAspect="1"/>
+          </p:cNvSpPr>
+          <p:nvPr>
+            <p:ph type="sldImg"/>
+          </p:nvPr>
+        </p:nvSpPr>
+        <p:spPr/>
+      </p:sp>
+      <p:sp>
+        <p:nvSpPr>
+          <p:cNvPr id="3" name="Notes Placeholder 2"/>
+          <p:cNvSpPr>
+            <a:spLocks noGrp="1"/>
+          </p:cNvSpPr>
+          <p:nvPr>
+            <p:ph type="body" idx="1"/>
+          </p:nvPr>
+        </p:nvSpPr>
+        <p:spPr/>
+        <p:txBody>
+          <a:bodyPr/>
+          <a:lstStyle/>
+          <a:p>
+            <a:r>
+              <a:rPr lang="en-US" dirty="0"/>
+              <a:t>Introduce the heavyweights briefly and without brand wars — both are excellent; the point is the *class* of tool. The key reframing for the room: with frontier models, your leverage comes from how well you *describe and contextualise* the task, not from how well you write R by hand. A mediocre prompt wastes a brilliant model. The rest of the section teaches the prompting craft and then proves it with a demo.</a:t>
+            </a:r>
+          </a:p>
+        </p:txBody>
+      </p:sp>
+      <p:sp>
+        <p:nvSpPr>
+          <p:cNvPr id="4" name="Slide Number Placeholder 3"/>
+          <p:cNvSpPr>
+            <a:spLocks noGrp="1"/>
+          </p:cNvSpPr>
+          <p:nvPr>
+            <p:ph type="sldNum" sz="quarter" idx="10"/>
+          </p:nvPr>
+        </p:nvSpPr>
+        <p:spPr/>
+        <p:txBody>
+          <a:bodyPr/>
+          <a:lstStyle/>
+          <a:p>
+            <a:fld id="{F7021451-1387-4CA6-816F-3879F97B5CBC}" type="slidenum">
+              <a:rPr lang="en-US"/>
+              <a:t>28</a:t>
+            </a:fld>
+            <a:endParaRPr lang="en-US"/>
+          </a:p>
+        </p:txBody>
+      </p:sp>
+    </p:spTree>
+    <p:extLst>
+      <p:ext uri="{BB962C8B-B14F-4D97-AF65-F5344CB8AC3E}">
+        <p14:creationId xmlns:p14="http://schemas.microsoft.com/office/powerpoint/2010/main" val="1024086991"/>
+      </p:ext>
+    </p:extLst>
+  </p:cSld>
+  <p:clrMapOvr>
+    <a:masterClrMapping/>
+  </p:clrMapOvr>
+</p:notes>
+</file>
+
+<file path=ppt/notesSlides/notesSlide28.xml><?xml version="1.0" encoding="utf-8"?>
 <p:notes xmlns:a="http://schemas.openxmlformats.org/drawingml/2006/main" xmlns:r="http://schemas.openxmlformats.org/officeDocument/2006/relationships" xmlns:p="http://schemas.openxmlformats.org/presentationml/2006/main">
   <p:cSld>
     <p:spTree>
@@ -2544,186 +2743,7 @@
           <a:p>
             <a:fld id="{F7021451-1387-4CA6-816F-3879F97B5CBC}" type="slidenum">
               <a:rPr lang="en-US"/>
-              <a:t>28</a:t>
-            </a:fld>
-            <a:endParaRPr lang="en-US"/>
-          </a:p>
-        </p:txBody>
-      </p:sp>
-    </p:spTree>
-    <p:extLst>
-      <p:ext uri="{BB962C8B-B14F-4D97-AF65-F5344CB8AC3E}">
-        <p14:creationId xmlns:p14="http://schemas.microsoft.com/office/powerpoint/2010/main" val="1024086991"/>
-      </p:ext>
-    </p:extLst>
-  </p:cSld>
-  <p:clrMapOvr>
-    <a:masterClrMapping/>
-  </p:clrMapOvr>
-</p:notes>
-</file>
-
-<file path=ppt/notesSlides/notesSlide27.xml><?xml version="1.0" encoding="utf-8"?>
-<p:notes xmlns:a="http://schemas.openxmlformats.org/drawingml/2006/main" xmlns:r="http://schemas.openxmlformats.org/officeDocument/2006/relationships" xmlns:p="http://schemas.openxmlformats.org/presentationml/2006/main">
-  <p:cSld>
-    <p:spTree>
-      <p:nvGrpSpPr>
-        <p:cNvPr id="1" name=""/>
-        <p:cNvGrpSpPr/>
-        <p:nvPr/>
-      </p:nvGrpSpPr>
-      <p:grpSpPr>
-        <a:xfrm>
-          <a:off x="0" y="0"/>
-          <a:ext cx="0" cy="0"/>
-          <a:chOff x="0" y="0"/>
-          <a:chExt cx="0" cy="0"/>
-        </a:xfrm>
-      </p:grpSpPr>
-      <p:sp>
-        <p:nvSpPr>
-          <p:cNvPr id="2" name="Slide Image Placeholder 1"/>
-          <p:cNvSpPr>
-            <a:spLocks noGrp="1" noRot="1" noChangeAspect="1"/>
-          </p:cNvSpPr>
-          <p:nvPr>
-            <p:ph type="sldImg"/>
-          </p:nvPr>
-        </p:nvSpPr>
-        <p:spPr>
-          <a:xfrm>
-            <a:off x="381000" y="685800"/>
-            <a:ext cx="6096000" cy="3429000"/>
-          </a:xfrm>
-        </p:spPr>
-      </p:sp>
-      <p:sp>
-        <p:nvSpPr>
-          <p:cNvPr id="3" name="Notes Placeholder 2"/>
-          <p:cNvSpPr>
-            <a:spLocks noGrp="1"/>
-          </p:cNvSpPr>
-          <p:nvPr>
-            <p:ph type="body" idx="1"/>
-          </p:nvPr>
-        </p:nvSpPr>
-        <p:spPr/>
-        <p:txBody>
-          <a:bodyPr/>
-          <a:lstStyle/>
-          <a:p>
-            <a:r>
-              <a:rPr lang="en-US" dirty="0"/>
-              <a:t>Give them a portable checklist they'll remember: Context, Task, Constraints, Review. The "new research assistant" analogy is the one that sticks — you wouldn't tell a new RA "do the stats," you'd point them at the existing scripts, list the steps, say what's off-limits, and ask to see a draft. Same here. The difference between a frustrating AI experience and a magical one is almost always the prompt, not the model.</a:t>
-            </a:r>
-          </a:p>
-        </p:txBody>
-      </p:sp>
-      <p:sp>
-        <p:nvSpPr>
-          <p:cNvPr id="4" name="Slide Number Placeholder 3"/>
-          <p:cNvSpPr>
-            <a:spLocks noGrp="1"/>
-          </p:cNvSpPr>
-          <p:nvPr>
-            <p:ph type="sldNum" sz="quarter" idx="10"/>
-          </p:nvPr>
-        </p:nvSpPr>
-        <p:spPr/>
-        <p:txBody>
-          <a:bodyPr/>
-          <a:lstStyle/>
-          <a:p>
-            <a:fld id="{F7021451-1387-4CA6-816F-3879F97B5CBC}" type="slidenum">
-              <a:rPr lang="en-US"/>
               <a:t>29</a:t>
-            </a:fld>
-            <a:endParaRPr lang="en-US"/>
-          </a:p>
-        </p:txBody>
-      </p:sp>
-    </p:spTree>
-    <p:extLst>
-      <p:ext uri="{BB962C8B-B14F-4D97-AF65-F5344CB8AC3E}">
-        <p14:creationId xmlns:p14="http://schemas.microsoft.com/office/powerpoint/2010/main" val="1024086991"/>
-      </p:ext>
-    </p:extLst>
-  </p:cSld>
-  <p:clrMapOvr>
-    <a:masterClrMapping/>
-  </p:clrMapOvr>
-</p:notes>
-</file>
-
-<file path=ppt/notesSlides/notesSlide28.xml><?xml version="1.0" encoding="utf-8"?>
-<p:notes xmlns:a="http://schemas.openxmlformats.org/drawingml/2006/main" xmlns:r="http://schemas.openxmlformats.org/officeDocument/2006/relationships" xmlns:p="http://schemas.openxmlformats.org/presentationml/2006/main">
-  <p:cSld>
-    <p:spTree>
-      <p:nvGrpSpPr>
-        <p:cNvPr id="1" name=""/>
-        <p:cNvGrpSpPr/>
-        <p:nvPr/>
-      </p:nvGrpSpPr>
-      <p:grpSpPr>
-        <a:xfrm>
-          <a:off x="0" y="0"/>
-          <a:ext cx="0" cy="0"/>
-          <a:chOff x="0" y="0"/>
-          <a:chExt cx="0" cy="0"/>
-        </a:xfrm>
-      </p:grpSpPr>
-      <p:sp>
-        <p:nvSpPr>
-          <p:cNvPr id="2" name="Slide Image Placeholder 1"/>
-          <p:cNvSpPr>
-            <a:spLocks noGrp="1" noRot="1" noChangeAspect="1"/>
-          </p:cNvSpPr>
-          <p:nvPr>
-            <p:ph type="sldImg"/>
-          </p:nvPr>
-        </p:nvSpPr>
-        <p:spPr/>
-      </p:sp>
-      <p:sp>
-        <p:nvSpPr>
-          <p:cNvPr id="3" name="Notes Placeholder 2"/>
-          <p:cNvSpPr>
-            <a:spLocks noGrp="1"/>
-          </p:cNvSpPr>
-          <p:nvPr>
-            <p:ph type="body" idx="1"/>
-          </p:nvPr>
-        </p:nvSpPr>
-        <p:spPr/>
-        <p:txBody>
-          <a:bodyPr/>
-          <a:lstStyle/>
-          <a:p>
-            <a:r>
-              <a:rPr lang="en-US" dirty="0"/>
-              <a:t>This is the concrete bridge between "the repo is context" (E7) and actually using it. Demonstrate the right-click: a relative path like `R/functions/analysis.R` is exactly what you drop into a prompt so the model knows precisely what to read — and relative (not absolute) paths keep it portable and don't leak your home directory. Show the `@`-mention too, since that's the smoothest workflow inside the assistants. Tiny skill, enormous payoff in answer quality.</a:t>
-            </a:r>
-          </a:p>
-        </p:txBody>
-      </p:sp>
-      <p:sp>
-        <p:nvSpPr>
-          <p:cNvPr id="4" name="Slide Number Placeholder 3"/>
-          <p:cNvSpPr>
-            <a:spLocks noGrp="1"/>
-          </p:cNvSpPr>
-          <p:nvPr>
-            <p:ph type="sldNum" sz="quarter" idx="10"/>
-          </p:nvPr>
-        </p:nvSpPr>
-        <p:spPr/>
-        <p:txBody>
-          <a:bodyPr/>
-          <a:lstStyle/>
-          <a:p>
-            <a:fld id="{F7021451-1387-4CA6-816F-3879F97B5CBC}" type="slidenum">
-              <a:rPr lang="en-US"/>
-              <a:t>30</a:t>
             </a:fld>
             <a:endParaRPr lang="en-US"/>
           </a:p>
@@ -2793,7 +2813,7 @@
           <a:p>
             <a:r>
               <a:rPr lang="en-US" dirty="0"/>
-              <a:t>This is the "graduate" technique — flag it as optional/advanced and keep it light. The insight: agreeing the plan *before* any code is written prevents the model from charging off in the wrong direction, and writing it as `prd.md`/`tasks.md` in the repo means the plan is both context for the model and a decision log for you (echoes Day 1's decision log). The "Wiggum loop" is the informal name for running the agent repeatedly against the same task list until it's complete — persistence over cleverness. Don't over-teach it; plant the seed for the optional support sessions.</a:t>
+              <a:t>Give them a portable checklist they'll remember: Context, Task, Constraints, Review. The "new research assistant" analogy is the one that sticks — you wouldn't tell a new RA "do the stats," you'd point them at the existing scripts, list the steps, say what's off-limits, and ask to see a draft. Same here. The difference between a frustrating AI experience and a magical one is almost always the prompt, not the model.</a:t>
             </a:r>
           </a:p>
         </p:txBody>
@@ -2815,7 +2835,7 @@
           <a:p>
             <a:fld id="{F7021451-1387-4CA6-816F-3879F97B5CBC}" type="slidenum">
               <a:rPr lang="en-US"/>
-              <a:t>31</a:t>
+              <a:t>30</a:t>
             </a:fld>
             <a:endParaRPr lang="en-US"/>
           </a:p>
@@ -3149,7 +3169,7 @@
           <a:p>
             <a:r>
               <a:rPr lang="en-US" dirty="0"/>
-              <a:t>Final exercise of the day and the synthesis of everything: a real assistant (Copilot's free tier removes the cost barrier), grounded in a real file (Copy Relative Path), driven by a structured prompt (Context/Task/Constraints/Review), inside the safe `.llm` workspace. The reflection questions matter more than the code: context visibly improves answers, and *their* Day 1–2 judgement is what decides if the output is trustworthy. End on that empowerment note — the AI is the assistant, they are still the researcher.</a:t>
+              <a:t>This is the concrete bridge between "the repo is context" (E7) and actually using it. Demonstrate the right-click: a relative path like `R/functions/analysis.R` is exactly what you drop into a prompt so the model knows precisely what to read — and relative (not absolute) paths keep it portable and don't leak your home directory. Show the `@`-mention too, since that's the smoothest workflow inside the assistants. Tiny skill, enormous payoff in answer quality.</a:t>
             </a:r>
           </a:p>
         </p:txBody>
@@ -3171,7 +3191,7 @@
           <a:p>
             <a:fld id="{F7021451-1387-4CA6-816F-3879F97B5CBC}" type="slidenum">
               <a:rPr lang="en-US"/>
-              <a:t>32</a:t>
+              <a:t>31</a:t>
             </a:fld>
             <a:endParaRPr lang="en-US"/>
           </a:p>
@@ -3239,166 +3259,40 @@
           <a:bodyPr/>
           <a:lstStyle/>
           <a:p>
-            <a:pPr marL="171450" indent="-171450" algn="l">
-              <a:lnSpc>
-                <a:spcPct val="110000"/>
-              </a:lnSpc>
-              <a:buFontTx/>
-              <a:buChar char="-"/>
-            </a:pPr>
-            <a:r>
-              <a:rPr lang="en-US" sz="1100" dirty="0">
-                <a:solidFill>
-                  <a:srgbClr val="163C44"/>
-                </a:solidFill>
-                <a:latin typeface="Consolas" pitchFamily="34" charset="0"/>
-                <a:ea typeface="Consolas" pitchFamily="34" charset="-122"/>
-                <a:cs typeface="Consolas" pitchFamily="34" charset="-120"/>
-              </a:rPr>
-              <a:t>GitHub        the photo-log of every version  →  and how you share with other cooks</a:t>
-            </a:r>
-          </a:p>
-          <a:p>
-            <a:pPr marL="171450" marR="0" lvl="0" indent="-171450" algn="l" defTabSz="914400" rtl="0" eaLnBrk="1" fontAlgn="auto" latinLnBrk="0" hangingPunct="1">
-              <a:lnSpc>
-                <a:spcPct val="110000"/>
-              </a:lnSpc>
-              <a:spcBef>
-                <a:spcPts val="0"/>
-              </a:spcBef>
-              <a:spcAft>
-                <a:spcPts val="0"/>
-              </a:spcAft>
-              <a:buClr>
-                <a:srgbClr val="000000"/>
-              </a:buClr>
-              <a:buSzPts val="1100"/>
-              <a:buFontTx/>
-              <a:buChar char="-"/>
-              <a:tabLst/>
-              <a:defRPr/>
-            </a:pPr>
-            <a:endParaRPr lang="en-US" sz="1100" dirty="0">
-              <a:solidFill>
-                <a:srgbClr val="163C44"/>
-              </a:solidFill>
-              <a:latin typeface="Consolas" pitchFamily="34" charset="0"/>
-              <a:cs typeface="Consolas" pitchFamily="34" charset="-120"/>
-            </a:endParaRPr>
-          </a:p>
-          <a:p>
-            <a:pPr marL="0" marR="0" lvl="0" indent="0" algn="l" defTabSz="914400" rtl="0" eaLnBrk="1" fontAlgn="auto" latinLnBrk="0" hangingPunct="1">
-              <a:lnSpc>
-                <a:spcPct val="110000"/>
-              </a:lnSpc>
-              <a:spcBef>
-                <a:spcPts val="0"/>
-              </a:spcBef>
-              <a:spcAft>
-                <a:spcPts val="0"/>
-              </a:spcAft>
-              <a:buClr>
-                <a:srgbClr val="000000"/>
-              </a:buClr>
-              <a:buSzPts val="1100"/>
-              <a:buFontTx/>
-              <a:buNone/>
-              <a:tabLst/>
-              <a:defRPr/>
-            </a:pPr>
             <a:r>
               <a:rPr lang="en-US" dirty="0"/>
-              <a:t>- This is the through-line for the day — we will keep coming back to it. The repo is a kitchen. Today we mostly set up our kitchen and make sure all appliances work; we actually properly *cook* on Day 2. The one idea to plant now: you write the recipe once and prepare the appliances and techniques once in the kitchen — then several dishes (website, paper) are plated from that same sauce. Best thing about it, every cook in the whole world can create your dish using this set-up.</a:t>
+              <a:t>This is the "graduate" technique — flag it as optional/advanced and keep it light. The insight: agreeing the plan *before* any code is written prevents the model from charging off in the wrong direction, and writing it as `prd.md`/`tasks.md` in the repo means the plan is both context for the model and a decision log for you (echoes Day 1's decision log). The "Wiggum loop" is the informal name for running the agent repeatedly against the same task list until it's complete — persistence over cleverness. Don't over-teach it; plant the seed for the optional support sessions.</a:t>
             </a:r>
           </a:p>
-          <a:p>
-            <a:pPr marL="0" marR="0" lvl="0" indent="0" algn="l" defTabSz="914400" rtl="0" eaLnBrk="1" fontAlgn="auto" latinLnBrk="0" hangingPunct="1">
-              <a:lnSpc>
-                <a:spcPct val="110000"/>
-              </a:lnSpc>
-              <a:spcBef>
-                <a:spcPts val="0"/>
-              </a:spcBef>
-              <a:spcAft>
-                <a:spcPts val="0"/>
-              </a:spcAft>
-              <a:buClr>
-                <a:srgbClr val="000000"/>
-              </a:buClr>
-              <a:buSzPts val="1100"/>
-              <a:buFontTx/>
-              <a:buNone/>
-              <a:tabLst/>
-              <a:defRPr/>
-            </a:pPr>
-            <a:endParaRPr lang="en-US" dirty="0"/>
-          </a:p>
-          <a:p>
-            <a:pPr marL="0" marR="0" lvl="0" indent="0" algn="l" defTabSz="914400" rtl="0" eaLnBrk="1" fontAlgn="auto" latinLnBrk="0" hangingPunct="1">
-              <a:lnSpc>
-                <a:spcPct val="110000"/>
-              </a:lnSpc>
-              <a:spcBef>
-                <a:spcPts val="0"/>
-              </a:spcBef>
-              <a:spcAft>
-                <a:spcPts val="0"/>
-              </a:spcAft>
-              <a:buClr>
-                <a:srgbClr val="000000"/>
-              </a:buClr>
-              <a:buSzPts val="1100"/>
-              <a:buFontTx/>
-              <a:buNone/>
-              <a:tabLst/>
-              <a:defRPr/>
-            </a:pPr>
-            <a:r>
-              <a:rPr lang="en-US" dirty="0"/>
-              <a:t>- This is the single most important idea of the repo. `R/` is the source of truth for the numbers; `reports/` are just different ways to use and present them; `renders/` are the built products. Change a function in `R/` and both the website and the paper update on the next render. We'll see each folder today.</a:t>
-            </a:r>
-          </a:p>
-          <a:p>
-            <a:pPr marL="0" marR="0" lvl="0" indent="0" algn="l" defTabSz="914400" rtl="0" eaLnBrk="1" fontAlgn="auto" latinLnBrk="0" hangingPunct="1">
-              <a:lnSpc>
-                <a:spcPct val="110000"/>
-              </a:lnSpc>
-              <a:spcBef>
-                <a:spcPts val="0"/>
-              </a:spcBef>
-              <a:spcAft>
-                <a:spcPts val="0"/>
-              </a:spcAft>
-              <a:buClr>
-                <a:srgbClr val="000000"/>
-              </a:buClr>
-              <a:buSzPts val="1100"/>
-              <a:buFontTx/>
-              <a:buNone/>
-              <a:tabLst/>
-              <a:defRPr/>
-            </a:pPr>
-            <a:endParaRPr lang="en-US" dirty="0"/>
-          </a:p>
-          <a:p>
-            <a:pPr marL="171450" indent="-171450" algn="l">
-              <a:lnSpc>
-                <a:spcPct val="110000"/>
-              </a:lnSpc>
-              <a:buFontTx/>
-              <a:buChar char="-"/>
-            </a:pPr>
-            <a:endParaRPr lang="en-US" sz="1100" dirty="0"/>
-          </a:p>
-          <a:p>
-            <a:endParaRPr lang="en-NL" dirty="0"/>
+        </p:txBody>
+      </p:sp>
+      <p:sp>
+        <p:nvSpPr>
+          <p:cNvPr id="4" name="Slide Number Placeholder 3"/>
+          <p:cNvSpPr>
+            <a:spLocks noGrp="1"/>
+          </p:cNvSpPr>
+          <p:nvPr>
+            <p:ph type="sldNum" sz="quarter" idx="10"/>
+          </p:nvPr>
+        </p:nvSpPr>
+        <p:spPr/>
+        <p:txBody>
+          <a:bodyPr/>
+          <a:lstStyle/>
+          <a:p>
+            <a:fld id="{F7021451-1387-4CA6-816F-3879F97B5CBC}" type="slidenum">
+              <a:rPr lang="en-US"/>
+              <a:t>32</a:t>
+            </a:fld>
+            <a:endParaRPr lang="en-US"/>
           </a:p>
         </p:txBody>
       </p:sp>
     </p:spTree>
     <p:extLst>
       <p:ext uri="{BB962C8B-B14F-4D97-AF65-F5344CB8AC3E}">
-        <p14:creationId xmlns:p14="http://schemas.microsoft.com/office/powerpoint/2010/main" val="2057950561"/>
+        <p14:creationId xmlns:p14="http://schemas.microsoft.com/office/powerpoint/2010/main" val="1024086991"/>
       </p:ext>
     </p:extLst>
   </p:cSld>
@@ -3409,6 +3303,93 @@
 </file>
 
 <file path=ppt/notesSlides/notesSlide32.xml><?xml version="1.0" encoding="utf-8"?>
+<p:notes xmlns:a="http://schemas.openxmlformats.org/drawingml/2006/main" xmlns:r="http://schemas.openxmlformats.org/officeDocument/2006/relationships" xmlns:p="http://schemas.openxmlformats.org/presentationml/2006/main">
+  <p:cSld>
+    <p:spTree>
+      <p:nvGrpSpPr>
+        <p:cNvPr id="1" name=""/>
+        <p:cNvGrpSpPr/>
+        <p:nvPr/>
+      </p:nvGrpSpPr>
+      <p:grpSpPr>
+        <a:xfrm>
+          <a:off x="0" y="0"/>
+          <a:ext cx="0" cy="0"/>
+          <a:chOff x="0" y="0"/>
+          <a:chExt cx="0" cy="0"/>
+        </a:xfrm>
+      </p:grpSpPr>
+      <p:sp>
+        <p:nvSpPr>
+          <p:cNvPr id="2" name="Slide Image Placeholder 1"/>
+          <p:cNvSpPr>
+            <a:spLocks noGrp="1" noRot="1" noChangeAspect="1"/>
+          </p:cNvSpPr>
+          <p:nvPr>
+            <p:ph type="sldImg"/>
+          </p:nvPr>
+        </p:nvSpPr>
+        <p:spPr/>
+      </p:sp>
+      <p:sp>
+        <p:nvSpPr>
+          <p:cNvPr id="3" name="Notes Placeholder 2"/>
+          <p:cNvSpPr>
+            <a:spLocks noGrp="1"/>
+          </p:cNvSpPr>
+          <p:nvPr>
+            <p:ph type="body" idx="1"/>
+          </p:nvPr>
+        </p:nvSpPr>
+        <p:spPr/>
+        <p:txBody>
+          <a:bodyPr/>
+          <a:lstStyle/>
+          <a:p>
+            <a:r>
+              <a:rPr lang="en-US" dirty="0"/>
+              <a:t>Final exercise of the day and the synthesis of everything: a real assistant (Copilot's free tier removes the cost barrier), grounded in a real file (Copy Relative Path), driven by a structured prompt (Context/Task/Constraints/Review), inside the safe `.llm` workspace. The reflection questions matter more than the code: context visibly improves answers, and *their* Day 1–2 judgement is what decides if the output is trustworthy. End on that empowerment note — the AI is the assistant, they are still the researcher.</a:t>
+            </a:r>
+          </a:p>
+        </p:txBody>
+      </p:sp>
+      <p:sp>
+        <p:nvSpPr>
+          <p:cNvPr id="4" name="Slide Number Placeholder 3"/>
+          <p:cNvSpPr>
+            <a:spLocks noGrp="1"/>
+          </p:cNvSpPr>
+          <p:nvPr>
+            <p:ph type="sldNum" sz="quarter" idx="10"/>
+          </p:nvPr>
+        </p:nvSpPr>
+        <p:spPr/>
+        <p:txBody>
+          <a:bodyPr/>
+          <a:lstStyle/>
+          <a:p>
+            <a:fld id="{F7021451-1387-4CA6-816F-3879F97B5CBC}" type="slidenum">
+              <a:rPr lang="en-US"/>
+              <a:t>33</a:t>
+            </a:fld>
+            <a:endParaRPr lang="en-US"/>
+          </a:p>
+        </p:txBody>
+      </p:sp>
+    </p:spTree>
+    <p:extLst>
+      <p:ext uri="{BB962C8B-B14F-4D97-AF65-F5344CB8AC3E}">
+        <p14:creationId xmlns:p14="http://schemas.microsoft.com/office/powerpoint/2010/main" val="1024086991"/>
+      </p:ext>
+    </p:extLst>
+  </p:cSld>
+  <p:clrMapOvr>
+    <a:masterClrMapping/>
+  </p:clrMapOvr>
+</p:notes>
+</file>
+
+<file path=ppt/notesSlides/notesSlide33.xml><?xml version="1.0" encoding="utf-8"?>
 <p:notes xmlns:a="http://schemas.openxmlformats.org/drawingml/2006/main" xmlns:r="http://schemas.openxmlformats.org/officeDocument/2006/relationships" xmlns:p="http://schemas.openxmlformats.org/presentationml/2006/main">
   <p:cSld>
     <p:spTree>
@@ -3457,6 +3438,224 @@
           <a:bodyPr/>
           <a:lstStyle/>
           <a:p>
+            <a:pPr marL="171450" indent="-171450" algn="l">
+              <a:lnSpc>
+                <a:spcPct val="110000"/>
+              </a:lnSpc>
+              <a:buFontTx/>
+              <a:buChar char="-"/>
+            </a:pPr>
+            <a:r>
+              <a:rPr lang="en-US" sz="1100" dirty="0">
+                <a:solidFill>
+                  <a:srgbClr val="163C44"/>
+                </a:solidFill>
+                <a:latin typeface="Consolas" pitchFamily="34" charset="0"/>
+                <a:ea typeface="Consolas" pitchFamily="34" charset="-122"/>
+                <a:cs typeface="Consolas" pitchFamily="34" charset="-120"/>
+              </a:rPr>
+              <a:t>GitHub        the photo-log of every version  →  and how you share with other cooks</a:t>
+            </a:r>
+          </a:p>
+          <a:p>
+            <a:pPr marL="171450" marR="0" lvl="0" indent="-171450" algn="l" defTabSz="914400" rtl="0" eaLnBrk="1" fontAlgn="auto" latinLnBrk="0" hangingPunct="1">
+              <a:lnSpc>
+                <a:spcPct val="110000"/>
+              </a:lnSpc>
+              <a:spcBef>
+                <a:spcPts val="0"/>
+              </a:spcBef>
+              <a:spcAft>
+                <a:spcPts val="0"/>
+              </a:spcAft>
+              <a:buClr>
+                <a:srgbClr val="000000"/>
+              </a:buClr>
+              <a:buSzPts val="1100"/>
+              <a:buFontTx/>
+              <a:buChar char="-"/>
+              <a:tabLst/>
+              <a:defRPr/>
+            </a:pPr>
+            <a:endParaRPr lang="en-US" sz="1100" dirty="0">
+              <a:solidFill>
+                <a:srgbClr val="163C44"/>
+              </a:solidFill>
+              <a:latin typeface="Consolas" pitchFamily="34" charset="0"/>
+              <a:cs typeface="Consolas" pitchFamily="34" charset="-120"/>
+            </a:endParaRPr>
+          </a:p>
+          <a:p>
+            <a:pPr marL="0" marR="0" lvl="0" indent="0" algn="l" defTabSz="914400" rtl="0" eaLnBrk="1" fontAlgn="auto" latinLnBrk="0" hangingPunct="1">
+              <a:lnSpc>
+                <a:spcPct val="110000"/>
+              </a:lnSpc>
+              <a:spcBef>
+                <a:spcPts val="0"/>
+              </a:spcBef>
+              <a:spcAft>
+                <a:spcPts val="0"/>
+              </a:spcAft>
+              <a:buClr>
+                <a:srgbClr val="000000"/>
+              </a:buClr>
+              <a:buSzPts val="1100"/>
+              <a:buFontTx/>
+              <a:buNone/>
+              <a:tabLst/>
+              <a:defRPr/>
+            </a:pPr>
+            <a:r>
+              <a:rPr lang="en-US" dirty="0"/>
+              <a:t>- This is the through-line for the day — we will keep coming back to it. The repo is a kitchen. Today we mostly set up our kitchen and make sure all appliances work; we actually properly *cook* on Day 2. The one idea to plant now: you write the recipe once and prepare the appliances and techniques once in the kitchen — then several dishes (website, paper) are plated from that same sauce. Best thing about it, every cook in the whole world can create your dish using this set-up.</a:t>
+            </a:r>
+          </a:p>
+          <a:p>
+            <a:pPr marL="0" marR="0" lvl="0" indent="0" algn="l" defTabSz="914400" rtl="0" eaLnBrk="1" fontAlgn="auto" latinLnBrk="0" hangingPunct="1">
+              <a:lnSpc>
+                <a:spcPct val="110000"/>
+              </a:lnSpc>
+              <a:spcBef>
+                <a:spcPts val="0"/>
+              </a:spcBef>
+              <a:spcAft>
+                <a:spcPts val="0"/>
+              </a:spcAft>
+              <a:buClr>
+                <a:srgbClr val="000000"/>
+              </a:buClr>
+              <a:buSzPts val="1100"/>
+              <a:buFontTx/>
+              <a:buNone/>
+              <a:tabLst/>
+              <a:defRPr/>
+            </a:pPr>
+            <a:endParaRPr lang="en-US" dirty="0"/>
+          </a:p>
+          <a:p>
+            <a:pPr marL="0" marR="0" lvl="0" indent="0" algn="l" defTabSz="914400" rtl="0" eaLnBrk="1" fontAlgn="auto" latinLnBrk="0" hangingPunct="1">
+              <a:lnSpc>
+                <a:spcPct val="110000"/>
+              </a:lnSpc>
+              <a:spcBef>
+                <a:spcPts val="0"/>
+              </a:spcBef>
+              <a:spcAft>
+                <a:spcPts val="0"/>
+              </a:spcAft>
+              <a:buClr>
+                <a:srgbClr val="000000"/>
+              </a:buClr>
+              <a:buSzPts val="1100"/>
+              <a:buFontTx/>
+              <a:buNone/>
+              <a:tabLst/>
+              <a:defRPr/>
+            </a:pPr>
+            <a:r>
+              <a:rPr lang="en-US" dirty="0"/>
+              <a:t>- This is the single most important idea of the repo. `R/` is the source of truth for the numbers; `reports/` are just different ways to use and present them; `renders/` are the built products. Change a function in `R/` and both the website and the paper update on the next render. We'll see each folder today.</a:t>
+            </a:r>
+          </a:p>
+          <a:p>
+            <a:pPr marL="0" marR="0" lvl="0" indent="0" algn="l" defTabSz="914400" rtl="0" eaLnBrk="1" fontAlgn="auto" latinLnBrk="0" hangingPunct="1">
+              <a:lnSpc>
+                <a:spcPct val="110000"/>
+              </a:lnSpc>
+              <a:spcBef>
+                <a:spcPts val="0"/>
+              </a:spcBef>
+              <a:spcAft>
+                <a:spcPts val="0"/>
+              </a:spcAft>
+              <a:buClr>
+                <a:srgbClr val="000000"/>
+              </a:buClr>
+              <a:buSzPts val="1100"/>
+              <a:buFontTx/>
+              <a:buNone/>
+              <a:tabLst/>
+              <a:defRPr/>
+            </a:pPr>
+            <a:endParaRPr lang="en-US" dirty="0"/>
+          </a:p>
+          <a:p>
+            <a:pPr marL="171450" indent="-171450" algn="l">
+              <a:lnSpc>
+                <a:spcPct val="110000"/>
+              </a:lnSpc>
+              <a:buFontTx/>
+              <a:buChar char="-"/>
+            </a:pPr>
+            <a:endParaRPr lang="en-US" sz="1100" dirty="0"/>
+          </a:p>
+          <a:p>
+            <a:endParaRPr lang="en-NL" dirty="0"/>
+          </a:p>
+        </p:txBody>
+      </p:sp>
+    </p:spTree>
+    <p:extLst>
+      <p:ext uri="{BB962C8B-B14F-4D97-AF65-F5344CB8AC3E}">
+        <p14:creationId xmlns:p14="http://schemas.microsoft.com/office/powerpoint/2010/main" val="2057950561"/>
+      </p:ext>
+    </p:extLst>
+  </p:cSld>
+  <p:clrMapOvr>
+    <a:masterClrMapping/>
+  </p:clrMapOvr>
+</p:notes>
+</file>
+
+<file path=ppt/notesSlides/notesSlide34.xml><?xml version="1.0" encoding="utf-8"?>
+<p:notes xmlns:a="http://schemas.openxmlformats.org/drawingml/2006/main" xmlns:r="http://schemas.openxmlformats.org/officeDocument/2006/relationships" xmlns:p="http://schemas.openxmlformats.org/presentationml/2006/main">
+  <p:cSld>
+    <p:spTree>
+      <p:nvGrpSpPr>
+        <p:cNvPr id="1" name=""/>
+        <p:cNvGrpSpPr/>
+        <p:nvPr/>
+      </p:nvGrpSpPr>
+      <p:grpSpPr>
+        <a:xfrm>
+          <a:off x="0" y="0"/>
+          <a:ext cx="0" cy="0"/>
+          <a:chOff x="0" y="0"/>
+          <a:chExt cx="0" cy="0"/>
+        </a:xfrm>
+      </p:grpSpPr>
+      <p:sp>
+        <p:nvSpPr>
+          <p:cNvPr id="2" name="Slide Image Placeholder 1"/>
+          <p:cNvSpPr>
+            <a:spLocks noGrp="1" noRot="1" noChangeAspect="1"/>
+          </p:cNvSpPr>
+          <p:nvPr>
+            <p:ph type="sldImg"/>
+          </p:nvPr>
+        </p:nvSpPr>
+        <p:spPr>
+          <a:xfrm>
+            <a:off x="381000" y="685800"/>
+            <a:ext cx="6096000" cy="3429000"/>
+          </a:xfrm>
+        </p:spPr>
+      </p:sp>
+      <p:sp>
+        <p:nvSpPr>
+          <p:cNvPr id="3" name="Notes Placeholder 2"/>
+          <p:cNvSpPr>
+            <a:spLocks noGrp="1"/>
+          </p:cNvSpPr>
+          <p:nvPr>
+            <p:ph type="body" idx="1"/>
+          </p:nvPr>
+        </p:nvSpPr>
+        <p:spPr/>
+        <p:txBody>
+          <a:bodyPr/>
+          <a:lstStyle/>
+          <a:p>
             <a:r>
               <a:rPr lang="en-US" dirty="0"/>
               <a:t>Remember the words from this morning's vocabulary check? This is the same list, now as done/not-done. Run through it as an exit check. Anyone with unticked boxes should grab the optional support session — it helps for Day 2 if all of this works.</a:t>
@@ -3481,7 +3680,7 @@
           <a:p>
             <a:fld id="{F7021451-1387-4CA6-816F-3879F97B5CBC}" type="slidenum">
               <a:rPr lang="en-US"/>
-              <a:t>36</a:t>
+              <a:t>37</a:t>
             </a:fld>
             <a:endParaRPr lang="en-US"/>
           </a:p>
@@ -3527,7 +3726,12 @@
             <p:ph type="sldImg"/>
           </p:nvPr>
         </p:nvSpPr>
-        <p:spPr/>
+        <p:spPr>
+          <a:xfrm>
+            <a:off x="381000" y="685800"/>
+            <a:ext cx="6096000" cy="3429000"/>
+          </a:xfrm>
+        </p:spPr>
       </p:sp>
       <p:sp>
         <p:nvSpPr>
@@ -3545,39 +3749,16 @@
           <a:lstStyle/>
           <a:p>
             <a:r>
-              <a:rPr lang="en-US" dirty="0"/>
-              <a:t>Set the scene without hype. The honest framing: these tools got good *fast*, and they are now genuinely useful for the exact work this workshop teaches — reading data, writing R, documenting decisions. We are not replacing the skills from Days 1–2; we are adding an assistant that only becomes safe and useful *because* you now understand the workflow underneath. That's the whole reason "Supercharge" comes last, not first.</a:t>
+              <a:rPr lang="en-NL" dirty="0"/>
+              <a:t>Any questions from yesterday?</a:t>
             </a:r>
-          </a:p>
-        </p:txBody>
-      </p:sp>
-      <p:sp>
-        <p:nvSpPr>
-          <p:cNvPr id="4" name="Slide Number Placeholder 3"/>
-          <p:cNvSpPr>
-            <a:spLocks noGrp="1"/>
-          </p:cNvSpPr>
-          <p:nvPr>
-            <p:ph type="sldNum" sz="quarter" idx="10"/>
-          </p:nvPr>
-        </p:nvSpPr>
-        <p:spPr/>
-        <p:txBody>
-          <a:bodyPr/>
-          <a:lstStyle/>
-          <a:p>
-            <a:fld id="{F7021451-1387-4CA6-816F-3879F97B5CBC}" type="slidenum">
-              <a:rPr lang="en-US"/>
-              <a:t>6</a:t>
-            </a:fld>
-            <a:endParaRPr lang="en-US"/>
           </a:p>
         </p:txBody>
       </p:sp>
     </p:spTree>
     <p:extLst>
       <p:ext uri="{BB962C8B-B14F-4D97-AF65-F5344CB8AC3E}">
-        <p14:creationId xmlns:p14="http://schemas.microsoft.com/office/powerpoint/2010/main" val="1024086991"/>
+        <p14:creationId xmlns:p14="http://schemas.microsoft.com/office/powerpoint/2010/main" val="4261401312"/>
       </p:ext>
     </p:extLst>
   </p:cSld>
@@ -3614,7 +3795,12 @@
             <p:ph type="sldImg"/>
           </p:nvPr>
         </p:nvSpPr>
-        <p:spPr/>
+        <p:spPr>
+          <a:xfrm>
+            <a:off x="381000" y="685800"/>
+            <a:ext cx="6096000" cy="3429000"/>
+          </a:xfrm>
+        </p:spPr>
       </p:sp>
       <p:sp>
         <p:nvSpPr>
@@ -3632,39 +3818,25 @@
           <a:lstStyle/>
           <a:p>
             <a:r>
-              <a:rPr lang="en-US" dirty="0"/>
-              <a:t>Demystify it. People imagine a magic oracle or a search engine; it's neither. The single training objective — predict the next token — is worth saying out loud, because it explains both the strengths (fluent, pattern-rich, great at code it has seen a million variations of) and the failure mode we'll hit later: it can predict a *plausible* answer that is simply wrong (a "hallucination"). A token is roughly a word or part of a word — "reproducible" might be `repro` + `ducible`.</a:t>
+              <a:rPr lang="en-NL" dirty="0"/>
+              <a:t>Github Integration needs paid account…</a:t>
             </a:r>
           </a:p>
-        </p:txBody>
-      </p:sp>
-      <p:sp>
-        <p:nvSpPr>
-          <p:cNvPr id="4" name="Slide Number Placeholder 3"/>
-          <p:cNvSpPr>
-            <a:spLocks noGrp="1"/>
-          </p:cNvSpPr>
-          <p:nvPr>
-            <p:ph type="sldNum" sz="quarter" idx="10"/>
-          </p:nvPr>
-        </p:nvSpPr>
-        <p:spPr/>
-        <p:txBody>
-          <a:bodyPr/>
-          <a:lstStyle/>
-          <a:p>
-            <a:fld id="{F7021451-1387-4CA6-816F-3879F97B5CBC}" type="slidenum">
-              <a:rPr lang="en-US"/>
-              <a:t>7</a:t>
-            </a:fld>
-            <a:endParaRPr lang="en-US"/>
+          <a:p>
+            <a:r>
+              <a:rPr lang="en-NL" dirty="0"/>
+              <a:t>Just upload the LATEX folder seems to work?</a:t>
+            </a:r>
+          </a:p>
+          <a:p>
+            <a:endParaRPr lang="en-NL" dirty="0"/>
           </a:p>
         </p:txBody>
       </p:sp>
     </p:spTree>
     <p:extLst>
       <p:ext uri="{BB962C8B-B14F-4D97-AF65-F5344CB8AC3E}">
-        <p14:creationId xmlns:p14="http://schemas.microsoft.com/office/powerpoint/2010/main" val="1024086991"/>
+        <p14:creationId xmlns:p14="http://schemas.microsoft.com/office/powerpoint/2010/main" val="3327206029"/>
       </p:ext>
     </p:extLst>
   </p:cSld>
@@ -3701,7 +3873,12 @@
             <p:ph type="sldImg"/>
           </p:nvPr>
         </p:nvSpPr>
-        <p:spPr/>
+        <p:spPr>
+          <a:xfrm>
+            <a:off x="381000" y="685800"/>
+            <a:ext cx="6096000" cy="3429000"/>
+          </a:xfrm>
+        </p:spPr>
       </p:sp>
       <p:sp>
         <p:nvSpPr>
@@ -3720,7 +3897,19 @@
           <a:p>
             <a:r>
               <a:rPr lang="en-US" dirty="0"/>
-              <a:t>Do this live if you can — type a half-finished line and let the room call out the next word before the model does. The third example is the teaching moment: the model confidently completes the formula with a variable that *sounds* right for a consumer study, but it has no idea what's actually in your dataset unless you show it. That's the bridge to the next section: an LLM is only as good as the context you give it — and your repo is full of context.</a:t>
+              <a:t>Go through list</a:t>
+            </a:r>
+          </a:p>
+          <a:p>
+            <a:r>
+              <a:rPr lang="en-US" dirty="0"/>
+              <a:t>You can suddenly ask all the questions you may have needed tech support, supervisors; no more busy supervisors! </a:t>
+            </a:r>
+          </a:p>
+          <a:p>
+            <a:r>
+              <a:rPr lang="en-US" dirty="0"/>
+              <a:t>These tools got good *fast*, and they are now genuinely useful for the exact work this workshop teaches — reading data, writing R, documenting decisions. We are not replacing the skills from Days 1–2; we are adding an assistant that only becomes safe and useful *because* you now understand the workflow underneath. That's the whole reason "Supercharge" comes last, not first.</a:t>
             </a:r>
           </a:p>
         </p:txBody>
@@ -3742,7 +3931,7 @@
           <a:p>
             <a:fld id="{F7021451-1387-4CA6-816F-3879F97B5CBC}" type="slidenum">
               <a:rPr lang="en-US"/>
-              <a:t>8</a:t>
+              <a:t>7</a:t>
             </a:fld>
             <a:endParaRPr lang="en-US"/>
           </a:p>
@@ -3788,7 +3977,12 @@
             <p:ph type="sldImg"/>
           </p:nvPr>
         </p:nvSpPr>
-        <p:spPr/>
+        <p:spPr>
+          <a:xfrm>
+            <a:off x="381000" y="685800"/>
+            <a:ext cx="6096000" cy="3429000"/>
+          </a:xfrm>
+        </p:spPr>
       </p:sp>
       <p:sp>
         <p:nvSpPr>
@@ -3807,7 +4001,41 @@
           <a:p>
             <a:r>
               <a:rPr lang="en-US" dirty="0"/>
-              <a:t>This slide is the honest contract for the rest of the day. The model is a strong junior collaborator: fast, fluent, tireless, occasionally and confidently wrong. Your Day 1–2 skills are exactly what let you catch the "confidently wrong" cases. Keep returning to two words: **context** and **verify**. The next section shows that a well-structured repo is the best context-delivery machine there is.</a:t>
+              <a:t>LLMs in its </a:t>
+            </a:r>
+            <a:r>
+              <a:rPr lang="en-US" dirty="0" err="1"/>
+              <a:t>basica</a:t>
+            </a:r>
+            <a:r>
+              <a:rPr lang="en-US" dirty="0"/>
+              <a:t> idea are easy to understand. </a:t>
+            </a:r>
+          </a:p>
+          <a:p>
+            <a:r>
+              <a:rPr lang="en-US" dirty="0"/>
+              <a:t>Go through slide</a:t>
+            </a:r>
+          </a:p>
+          <a:p>
+            <a:r>
+              <a:rPr lang="en-US" dirty="0"/>
+              <a:t>A token is roughly a word or part of a word — "reproducible" might be `repro` + `</a:t>
+            </a:r>
+            <a:r>
+              <a:rPr lang="en-US" dirty="0" err="1"/>
+              <a:t>ducible</a:t>
+            </a:r>
+            <a:r>
+              <a:rPr lang="en-US" dirty="0"/>
+              <a:t>`.</a:t>
+            </a:r>
+          </a:p>
+          <a:p>
+            <a:r>
+              <a:rPr lang="en-US" dirty="0"/>
+              <a:t>Sometimes it has the ability to do fancy things (e.g., open google, add tokens it predicted to search bar, open first page, and read that)</a:t>
             </a:r>
           </a:p>
         </p:txBody>
@@ -3829,7 +4057,7 @@
           <a:p>
             <a:fld id="{F7021451-1387-4CA6-816F-3879F97B5CBC}" type="slidenum">
               <a:rPr lang="en-US"/>
-              <a:t>9</a:t>
+              <a:t>8</a:t>
             </a:fld>
             <a:endParaRPr lang="en-US"/>
           </a:p>
@@ -3875,7 +4103,12 @@
             <p:ph type="sldImg"/>
           </p:nvPr>
         </p:nvSpPr>
-        <p:spPr/>
+        <p:spPr>
+          <a:xfrm>
+            <a:off x="381000" y="685800"/>
+            <a:ext cx="6096000" cy="3429000"/>
+          </a:xfrm>
+        </p:spPr>
       </p:sp>
       <p:sp>
         <p:nvSpPr>
@@ -3894,7 +4127,13 @@
           <a:p>
             <a:r>
               <a:rPr lang="en-US" dirty="0"/>
-              <a:t>Frame the whole section: the habits we taught for *reproducibility* (structure, version control, plain-text scripts) turn out to be the same habits that make AI assistance *safe and effective*. This is not a coincidence — both want the same thing: work that is explicit, inspectable, and reversible. Walk through the four points one slide at a time.</a:t>
+              <a:t>Do this live if you can — type a half-finished line and let the room call out the next word before the model does. The third example is the teaching moment: the model confidently completes the formula with a variable that *sounds* right for a consumer study, but it has no idea what's actually in your dataset unless you show it. That's the bridge to the next section: an LLM is only as good as the context you give it — and your repo is full of context.</a:t>
+            </a:r>
+          </a:p>
+          <a:p>
+            <a:r>
+              <a:rPr lang="en-US" dirty="0"/>
+              <a:t>Go through “exercise”</a:t>
             </a:r>
           </a:p>
         </p:txBody>
@@ -3916,7 +4155,7 @@
           <a:p>
             <a:fld id="{F7021451-1387-4CA6-816F-3879F97B5CBC}" type="slidenum">
               <a:rPr lang="en-US"/>
-              <a:t>10</a:t>
+              <a:t>9</a:t>
             </a:fld>
             <a:endParaRPr lang="en-US"/>
           </a:p>
@@ -3986,7 +4225,19 @@
           <a:p>
             <a:r>
               <a:rPr lang="en-US" dirty="0"/>
-              <a:t>Tie back to the Day 1 argument for open tooling. A hidden benefit of building on R, tidyverse, Quarto and Git: these are some of the most-documented, most-discussed tools on the internet, so the model has seen every common pattern and error. Ask an LLM about a `ggplot` layer or a Quarto YAML key and it answers well; ask about a bespoke internal macro and it guesses. Open-source choices pay off twice.</a:t>
+              <a:t>Now what is the “problem” with this approach? Well it can only predict the next word if it has been trained on data that is the same or similar to</a:t>
+            </a:r>
+          </a:p>
+          <a:p>
+            <a:r>
+              <a:rPr lang="en-US" dirty="0"/>
+              <a:t>This is why the Day 1–2 skills are exactly what will allow you to catch the "confidently wrong" cases. </a:t>
+            </a:r>
+          </a:p>
+          <a:p>
+            <a:r>
+              <a:rPr lang="en-US" dirty="0"/>
+              <a:t>And the repository is set up to produce the highest chance of a good result; LLMs need context and a human being that checks what has been produced</a:t>
             </a:r>
           </a:p>
         </p:txBody>
@@ -4008,7 +4259,7 @@
           <a:p>
             <a:fld id="{F7021451-1387-4CA6-816F-3879F97B5CBC}" type="slidenum">
               <a:rPr lang="en-US"/>
-              <a:t>11</a:t>
+              <a:t>10</a:t>
             </a:fld>
             <a:endParaRPr lang="en-US"/>
           </a:p>
@@ -22766,7 +23017,7 @@
           <a:p>
             <a:fld id="{60B41492-8ECA-404E-A995-235085120F84}" type="datetimeFigureOut">
               <a:rPr lang="en-US" smtClean="0"/>
-              <a:t>6/2/26</a:t>
+              <a:t>6/3/26</a:t>
             </a:fld>
             <a:endParaRPr lang="en-US"/>
           </a:p>
@@ -27357,6 +27608,314 @@
 
 <file path=ppt/slides/slide10.xml><?xml version="1.0" encoding="utf-8"?>
 <p:sld xmlns:a="http://schemas.openxmlformats.org/drawingml/2006/main" xmlns:r="http://schemas.openxmlformats.org/officeDocument/2006/relationships" xmlns:p="http://schemas.openxmlformats.org/presentationml/2006/main">
+  <p:cSld name="Slide 4">
+    <p:spTree>
+      <p:nvGrpSpPr>
+        <p:cNvPr id="1" name=""/>
+        <p:cNvGrpSpPr/>
+        <p:nvPr/>
+      </p:nvGrpSpPr>
+      <p:grpSpPr>
+        <a:xfrm>
+          <a:off x="0" y="0"/>
+          <a:ext cx="0" cy="0"/>
+          <a:chOff x="0" y="0"/>
+          <a:chExt cx="0" cy="0"/>
+        </a:xfrm>
+      </p:grpSpPr>
+      <p:sp>
+        <p:nvSpPr>
+          <p:cNvPr id="2" name="Text 0"/>
+          <p:cNvSpPr/>
+          <p:nvPr/>
+        </p:nvSpPr>
+        <p:spPr>
+          <a:xfrm>
+            <a:off x="502920" y="347472"/>
+            <a:ext cx="8138160" cy="749808"/>
+          </a:xfrm>
+          <a:prstGeom prst="rect">
+            <a:avLst/>
+          </a:prstGeom>
+          <a:noFill/>
+          <a:ln/>
+        </p:spPr>
+        <p:txBody>
+          <a:bodyPr wrap="square" rtlCol="0" anchor="t"/>
+          <a:lstStyle/>
+          <a:p>
+            <a:pPr marL="0" indent="0">
+              <a:buNone/>
+            </a:pPr>
+            <a:r>
+              <a:rPr lang="en-US" sz="2300" b="1" dirty="0">
+                <a:solidFill>
+                  <a:srgbClr val="103C46"/>
+                </a:solidFill>
+                <a:latin typeface="Montserrat" pitchFamily="34" charset="0"/>
+                <a:ea typeface="Montserrat" pitchFamily="34" charset="-122"/>
+                <a:cs typeface="Montserrat" pitchFamily="34" charset="-120"/>
+              </a:rPr>
+              <a:t>Strengths and traps, on one slide</a:t>
+            </a:r>
+            <a:endParaRPr lang="en-US" sz="2300" dirty="0"/>
+          </a:p>
+        </p:txBody>
+      </p:sp>
+      <p:sp>
+        <p:nvSpPr>
+          <p:cNvPr id="3" name="Text 1"/>
+          <p:cNvSpPr/>
+          <p:nvPr/>
+        </p:nvSpPr>
+        <p:spPr>
+          <a:xfrm>
+            <a:off x="521208" y="1152144"/>
+            <a:ext cx="8138160" cy="274320"/>
+          </a:xfrm>
+          <a:prstGeom prst="rect">
+            <a:avLst/>
+          </a:prstGeom>
+          <a:noFill/>
+          <a:ln/>
+        </p:spPr>
+        <p:txBody>
+          <a:bodyPr wrap="square" rtlCol="0" anchor="ctr"/>
+          <a:lstStyle/>
+          <a:p>
+            <a:pPr marL="0" indent="0">
+              <a:buNone/>
+            </a:pPr>
+            <a:r>
+              <a:rPr lang="en-US" sz="1250" dirty="0">
+                <a:solidFill>
+                  <a:srgbClr val="258497"/>
+                </a:solidFill>
+                <a:latin typeface="Montserrat" pitchFamily="34" charset="0"/>
+                <a:ea typeface="Montserrat" pitchFamily="34" charset="-122"/>
+                <a:cs typeface="Montserrat" pitchFamily="34" charset="-120"/>
+              </a:rPr>
+              <a:t>Day 3 · The rise of LLMs</a:t>
+            </a:r>
+            <a:endParaRPr lang="en-US" sz="1250" dirty="0"/>
+          </a:p>
+        </p:txBody>
+      </p:sp>
+      <p:sp>
+        <p:nvSpPr>
+          <p:cNvPr id="4" name="Shape 2"/>
+          <p:cNvSpPr/>
+          <p:nvPr/>
+        </p:nvSpPr>
+        <p:spPr>
+          <a:xfrm>
+            <a:off x="502920" y="1481328"/>
+            <a:ext cx="8229600" cy="1606296"/>
+          </a:xfrm>
+          <a:prstGeom prst="rect">
+            <a:avLst/>
+          </a:prstGeom>
+          <a:solidFill>
+            <a:srgbClr val="EAF3F5"/>
+          </a:solidFill>
+          <a:ln/>
+        </p:spPr>
+        <p:txBody>
+          <a:bodyPr/>
+          <a:lstStyle/>
+          <a:p>
+            <a:endParaRPr lang="en-NL"/>
+          </a:p>
+        </p:txBody>
+      </p:sp>
+      <p:sp>
+        <p:nvSpPr>
+          <p:cNvPr id="5" name="Shape 3"/>
+          <p:cNvSpPr/>
+          <p:nvPr/>
+        </p:nvSpPr>
+        <p:spPr>
+          <a:xfrm>
+            <a:off x="502920" y="1481328"/>
+            <a:ext cx="50292" cy="1606296"/>
+          </a:xfrm>
+          <a:prstGeom prst="rect">
+            <a:avLst/>
+          </a:prstGeom>
+          <a:solidFill>
+            <a:srgbClr val="258497"/>
+          </a:solidFill>
+          <a:ln/>
+        </p:spPr>
+        <p:txBody>
+          <a:bodyPr/>
+          <a:lstStyle/>
+          <a:p>
+            <a:endParaRPr lang="en-NL"/>
+          </a:p>
+        </p:txBody>
+      </p:sp>
+      <p:sp>
+        <p:nvSpPr>
+          <p:cNvPr id="6" name="Text 4"/>
+          <p:cNvSpPr/>
+          <p:nvPr/>
+        </p:nvSpPr>
+        <p:spPr>
+          <a:xfrm>
+            <a:off x="685800" y="1591056"/>
+            <a:ext cx="7936992" cy="1386840"/>
+          </a:xfrm>
+          <a:prstGeom prst="rect">
+            <a:avLst/>
+          </a:prstGeom>
+          <a:noFill/>
+          <a:ln/>
+        </p:spPr>
+        <p:txBody>
+          <a:bodyPr wrap="square" rtlCol="0" anchor="t"/>
+          <a:lstStyle/>
+          <a:p>
+            <a:pPr marL="0" indent="0" algn="l">
+              <a:lnSpc>
+                <a:spcPct val="110000"/>
+              </a:lnSpc>
+              <a:buNone/>
+            </a:pPr>
+            <a:r>
+              <a:rPr lang="en-US" sz="1200" dirty="0">
+                <a:solidFill>
+                  <a:srgbClr val="163C44"/>
+                </a:solidFill>
+                <a:latin typeface="Consolas" pitchFamily="34" charset="0"/>
+                <a:ea typeface="Consolas" pitchFamily="34" charset="-122"/>
+                <a:cs typeface="Consolas" pitchFamily="34" charset="-120"/>
+              </a:rPr>
+              <a:t>Genuinely good at:               Will confidently get wrong:</a:t>
+            </a:r>
+            <a:endParaRPr lang="en-US" sz="1200" dirty="0"/>
+          </a:p>
+          <a:p>
+            <a:pPr marL="0" indent="0" algn="l">
+              <a:lnSpc>
+                <a:spcPct val="110000"/>
+              </a:lnSpc>
+              <a:buNone/>
+            </a:pPr>
+            <a:r>
+              <a:rPr lang="en-US" sz="1200" dirty="0">
+                <a:solidFill>
+                  <a:srgbClr val="163C44"/>
+                </a:solidFill>
+                <a:latin typeface="Consolas" pitchFamily="34" charset="0"/>
+                <a:ea typeface="Consolas" pitchFamily="34" charset="-122"/>
+                <a:cs typeface="Consolas" pitchFamily="34" charset="-120"/>
+              </a:rPr>
+              <a:t>  - boilerplate &amp; syntax           - your specific data &amp; column names</a:t>
+            </a:r>
+            <a:endParaRPr lang="en-US" sz="1200" dirty="0"/>
+          </a:p>
+          <a:p>
+            <a:pPr marL="0" indent="0" algn="l">
+              <a:lnSpc>
+                <a:spcPct val="110000"/>
+              </a:lnSpc>
+              <a:buNone/>
+            </a:pPr>
+            <a:r>
+              <a:rPr lang="en-US" sz="1200" dirty="0">
+                <a:solidFill>
+                  <a:srgbClr val="163C44"/>
+                </a:solidFill>
+                <a:latin typeface="Consolas" pitchFamily="34" charset="0"/>
+                <a:ea typeface="Consolas" pitchFamily="34" charset="-122"/>
+                <a:cs typeface="Consolas" pitchFamily="34" charset="-120"/>
+              </a:rPr>
+              <a:t>  - explaining code/errors         - exact statistics it didn't compute</a:t>
+            </a:r>
+            <a:endParaRPr lang="en-US" sz="1200" dirty="0"/>
+          </a:p>
+          <a:p>
+            <a:pPr marL="0" indent="0" algn="l">
+              <a:lnSpc>
+                <a:spcPct val="110000"/>
+              </a:lnSpc>
+              <a:buNone/>
+            </a:pPr>
+            <a:r>
+              <a:rPr lang="en-US" sz="1200" dirty="0">
+                <a:solidFill>
+                  <a:srgbClr val="163C44"/>
+                </a:solidFill>
+                <a:latin typeface="Consolas" pitchFamily="34" charset="0"/>
+                <a:ea typeface="Consolas" pitchFamily="34" charset="-122"/>
+                <a:cs typeface="Consolas" pitchFamily="34" charset="-120"/>
+              </a:rPr>
+              <a:t>  - common R / tidyverse patterns  - citations and package details</a:t>
+            </a:r>
+            <a:endParaRPr lang="en-US" sz="1200" dirty="0"/>
+          </a:p>
+          <a:p>
+            <a:pPr marL="0" indent="0" algn="l">
+              <a:lnSpc>
+                <a:spcPct val="110000"/>
+              </a:lnSpc>
+              <a:buNone/>
+            </a:pPr>
+            <a:r>
+              <a:rPr lang="en-US" sz="1200" dirty="0">
+                <a:solidFill>
+                  <a:srgbClr val="163C44"/>
+                </a:solidFill>
+                <a:latin typeface="Consolas" pitchFamily="34" charset="0"/>
+                <a:ea typeface="Consolas" pitchFamily="34" charset="-122"/>
+                <a:cs typeface="Consolas" pitchFamily="34" charset="-120"/>
+              </a:rPr>
+              <a:t>  - translating ideas → first draft- anything it never saw in training</a:t>
+            </a:r>
+            <a:endParaRPr lang="en-US" sz="1200" dirty="0"/>
+          </a:p>
+          <a:p>
+            <a:pPr marL="0" indent="0" algn="l">
+              <a:lnSpc>
+                <a:spcPct val="110000"/>
+              </a:lnSpc>
+              <a:buNone/>
+            </a:pPr>
+            <a:endParaRPr lang="en-US" sz="1200" dirty="0"/>
+          </a:p>
+          <a:p>
+            <a:pPr marL="0" indent="0" algn="l">
+              <a:lnSpc>
+                <a:spcPct val="110000"/>
+              </a:lnSpc>
+              <a:buNone/>
+            </a:pPr>
+            <a:r>
+              <a:rPr lang="en-US" sz="1200" dirty="0">
+                <a:solidFill>
+                  <a:srgbClr val="163C44"/>
+                </a:solidFill>
+                <a:latin typeface="Consolas" pitchFamily="34" charset="0"/>
+                <a:ea typeface="Consolas" pitchFamily="34" charset="-122"/>
+                <a:cs typeface="Consolas" pitchFamily="34" charset="-120"/>
+              </a:rPr>
+              <a:t>The fix for almost every trap: give it CONTEXT, and VERIFY the output.</a:t>
+            </a:r>
+            <a:endParaRPr lang="en-US" sz="1200" dirty="0"/>
+          </a:p>
+        </p:txBody>
+      </p:sp>
+    </p:spTree>
+  </p:cSld>
+  <p:clrMapOvr>
+    <a:masterClrMapping/>
+  </p:clrMapOvr>
+</p:sld>
+</file>
+
+<file path=ppt/slides/slide11.xml><?xml version="1.0" encoding="utf-8"?>
+<p:sld xmlns:a="http://schemas.openxmlformats.org/drawingml/2006/main" xmlns:r="http://schemas.openxmlformats.org/officeDocument/2006/relationships" xmlns:p="http://schemas.openxmlformats.org/presentationml/2006/main">
   <p:cSld name="Slide 5">
     <p:spTree>
       <p:nvGrpSpPr>
@@ -27405,7 +27964,23 @@
                 <a:ea typeface="Montserrat" pitchFamily="34" charset="-122"/>
                 <a:cs typeface="Montserrat" pitchFamily="34" charset="-120"/>
               </a:rPr>
-              <a:t>Everything that makes a repo reproducible also makes AI safe &amp; useful</a:t>
+              <a:t>Everything that makes a repo reproducible </a:t>
+            </a:r>
+          </a:p>
+          <a:p>
+            <a:pPr marL="0" indent="0">
+              <a:buNone/>
+            </a:pPr>
+            <a:r>
+              <a:rPr lang="en-US" sz="2000" b="1" dirty="0">
+                <a:solidFill>
+                  <a:srgbClr val="103C46"/>
+                </a:solidFill>
+                <a:latin typeface="Montserrat" pitchFamily="34" charset="0"/>
+                <a:ea typeface="Montserrat" pitchFamily="34" charset="-122"/>
+                <a:cs typeface="Montserrat" pitchFamily="34" charset="-120"/>
+              </a:rPr>
+              <a:t>also makes AI safe &amp; useful</a:t>
             </a:r>
             <a:endParaRPr lang="en-US" sz="2000" dirty="0"/>
           </a:p>
@@ -27614,7 +28189,7 @@
 </p:sld>
 </file>
 
-<file path=ppt/slides/slide11.xml><?xml version="1.0" encoding="utf-8"?>
+<file path=ppt/slides/slide12.xml><?xml version="1.0" encoding="utf-8"?>
 <p:sld xmlns:a="http://schemas.openxmlformats.org/drawingml/2006/main" xmlns:r="http://schemas.openxmlformats.org/officeDocument/2006/relationships" xmlns:p="http://schemas.openxmlformats.org/presentationml/2006/main">
   <p:cSld name="Slide 6">
     <p:spTree>
@@ -27979,7 +28554,7 @@
 </p:sld>
 </file>
 
-<file path=ppt/slides/slide12.xml><?xml version="1.0" encoding="utf-8"?>
+<file path=ppt/slides/slide13.xml><?xml version="1.0" encoding="utf-8"?>
 <p:sld xmlns:a="http://schemas.openxmlformats.org/drawingml/2006/main" xmlns:r="http://schemas.openxmlformats.org/officeDocument/2006/relationships" xmlns:p="http://schemas.openxmlformats.org/presentationml/2006/main">
   <p:cSld name="Slide 7">
     <p:spTree>
@@ -28347,7 +28922,7 @@
 </p:sld>
 </file>
 
-<file path=ppt/slides/slide13.xml><?xml version="1.0" encoding="utf-8"?>
+<file path=ppt/slides/slide14.xml><?xml version="1.0" encoding="utf-8"?>
 <p:sld xmlns:a="http://schemas.openxmlformats.org/drawingml/2006/main" xmlns:r="http://schemas.openxmlformats.org/officeDocument/2006/relationships" xmlns:p="http://schemas.openxmlformats.org/presentationml/2006/main">
   <p:cSld name="Slide 8">
     <p:spTree>
@@ -28721,7 +29296,7 @@
 </p:sld>
 </file>
 
-<file path=ppt/slides/slide14.xml><?xml version="1.0" encoding="utf-8"?>
+<file path=ppt/slides/slide15.xml><?xml version="1.0" encoding="utf-8"?>
 <p:sld xmlns:a="http://schemas.openxmlformats.org/drawingml/2006/main" xmlns:r="http://schemas.openxmlformats.org/officeDocument/2006/relationships" xmlns:p="http://schemas.openxmlformats.org/presentationml/2006/main">
   <p:cSld name="Slide 9">
     <p:spTree>
@@ -29145,7 +29720,7 @@
 </p:sld>
 </file>
 
-<file path=ppt/slides/slide15.xml><?xml version="1.0" encoding="utf-8"?>
+<file path=ppt/slides/slide16.xml><?xml version="1.0" encoding="utf-8"?>
 <p:sld xmlns:a="http://schemas.openxmlformats.org/drawingml/2006/main" xmlns:r="http://schemas.openxmlformats.org/officeDocument/2006/relationships" xmlns:p="http://schemas.openxmlformats.org/presentationml/2006/main">
   <p:cSld name="Slide 10">
     <p:spTree>
@@ -29462,7 +30037,7 @@
 </p:sld>
 </file>
 
-<file path=ppt/slides/slide16.xml><?xml version="1.0" encoding="utf-8"?>
+<file path=ppt/slides/slide17.xml><?xml version="1.0" encoding="utf-8"?>
 <p:sld xmlns:a="http://schemas.openxmlformats.org/drawingml/2006/main" xmlns:r="http://schemas.openxmlformats.org/officeDocument/2006/relationships" xmlns:p="http://schemas.openxmlformats.org/presentationml/2006/main">
   <p:cSld name="Slide 11">
     <p:spTree>
@@ -29909,7 +30484,7 @@
 </p:sld>
 </file>
 
-<file path=ppt/slides/slide17.xml><?xml version="1.0" encoding="utf-8"?>
+<file path=ppt/slides/slide18.xml><?xml version="1.0" encoding="utf-8"?>
 <p:sld xmlns:a="http://schemas.openxmlformats.org/drawingml/2006/main" xmlns:r="http://schemas.openxmlformats.org/officeDocument/2006/relationships" xmlns:p="http://schemas.openxmlformats.org/presentationml/2006/main">
   <p:cSld name="Slide 12">
     <p:spTree>
@@ -30403,7 +30978,7 @@
 </p:sld>
 </file>
 
-<file path=ppt/slides/slide18.xml><?xml version="1.0" encoding="utf-8"?>
+<file path=ppt/slides/slide19.xml><?xml version="1.0" encoding="utf-8"?>
 <p:sld xmlns:a="http://schemas.openxmlformats.org/drawingml/2006/main" xmlns:r="http://schemas.openxmlformats.org/officeDocument/2006/relationships" xmlns:p="http://schemas.openxmlformats.org/presentationml/2006/main">
   <p:cSld name="Slide 13">
     <p:spTree>
@@ -30777,363 +31352,6 @@
               <a:t>R + Quarto give you the workflow; Continue + Copilot add the AI.</a:t>
             </a:r>
             <a:endParaRPr lang="en-US" sz="1400" dirty="0"/>
-          </a:p>
-        </p:txBody>
-      </p:sp>
-    </p:spTree>
-  </p:cSld>
-  <p:clrMapOvr>
-    <a:masterClrMapping/>
-  </p:clrMapOvr>
-</p:sld>
-</file>
-
-<file path=ppt/slides/slide19.xml><?xml version="1.0" encoding="utf-8"?>
-<p:sld xmlns:a="http://schemas.openxmlformats.org/drawingml/2006/main" xmlns:r="http://schemas.openxmlformats.org/officeDocument/2006/relationships" xmlns:p="http://schemas.openxmlformats.org/presentationml/2006/main">
-  <p:cSld name="Slide 14">
-    <p:spTree>
-      <p:nvGrpSpPr>
-        <p:cNvPr id="1" name=""/>
-        <p:cNvGrpSpPr/>
-        <p:nvPr/>
-      </p:nvGrpSpPr>
-      <p:grpSpPr>
-        <a:xfrm>
-          <a:off x="0" y="0"/>
-          <a:ext cx="0" cy="0"/>
-          <a:chOff x="0" y="0"/>
-          <a:chExt cx="0" cy="0"/>
-        </a:xfrm>
-      </p:grpSpPr>
-      <p:sp>
-        <p:nvSpPr>
-          <p:cNvPr id="2" name="Text 0"/>
-          <p:cNvSpPr/>
-          <p:nvPr/>
-        </p:nvSpPr>
-        <p:spPr>
-          <a:xfrm>
-            <a:off x="502920" y="347472"/>
-            <a:ext cx="8138160" cy="749808"/>
-          </a:xfrm>
-          <a:prstGeom prst="rect">
-            <a:avLst/>
-          </a:prstGeom>
-          <a:noFill/>
-          <a:ln/>
-        </p:spPr>
-        <p:txBody>
-          <a:bodyPr wrap="square" rtlCol="0" anchor="t"/>
-          <a:lstStyle/>
-          <a:p>
-            <a:pPr marL="0" indent="0">
-              <a:buNone/>
-            </a:pPr>
-            <a:r>
-              <a:rPr lang="en-US" sz="2300" b="1" dirty="0">
-                <a:solidFill>
-                  <a:srgbClr val="103C46"/>
-                </a:solidFill>
-                <a:latin typeface="Montserrat" pitchFamily="34" charset="0"/>
-                <a:ea typeface="Montserrat" pitchFamily="34" charset="-122"/>
-                <a:cs typeface="Montserrat" pitchFamily="34" charset="-120"/>
-              </a:rPr>
-              <a:t>The one rule that makes all of this safe</a:t>
-            </a:r>
-            <a:endParaRPr lang="en-US" sz="2300" dirty="0"/>
-          </a:p>
-        </p:txBody>
-      </p:sp>
-      <p:sp>
-        <p:nvSpPr>
-          <p:cNvPr id="3" name="Text 1"/>
-          <p:cNvSpPr/>
-          <p:nvPr/>
-        </p:nvSpPr>
-        <p:spPr>
-          <a:xfrm>
-            <a:off x="521208" y="1152144"/>
-            <a:ext cx="8138160" cy="274320"/>
-          </a:xfrm>
-          <a:prstGeom prst="rect">
-            <a:avLst/>
-          </a:prstGeom>
-          <a:noFill/>
-          <a:ln/>
-        </p:spPr>
-        <p:txBody>
-          <a:bodyPr wrap="square" rtlCol="0" anchor="ctr"/>
-          <a:lstStyle/>
-          <a:p>
-            <a:pPr marL="0" indent="0">
-              <a:buNone/>
-            </a:pPr>
-            <a:r>
-              <a:rPr lang="en-US" sz="1250" dirty="0">
-                <a:solidFill>
-                  <a:srgbClr val="258497"/>
-                </a:solidFill>
-                <a:latin typeface="Montserrat" pitchFamily="34" charset="0"/>
-                <a:ea typeface="Montserrat" pitchFamily="34" charset="-122"/>
-                <a:cs typeface="Montserrat" pitchFamily="34" charset="-120"/>
-              </a:rPr>
-              <a:t>Day 3 · Security · keep your data yours</a:t>
-            </a:r>
-            <a:endParaRPr lang="en-US" sz="1250" dirty="0"/>
-          </a:p>
-        </p:txBody>
-      </p:sp>
-      <p:sp>
-        <p:nvSpPr>
-          <p:cNvPr id="4" name="Shape 2"/>
-          <p:cNvSpPr/>
-          <p:nvPr/>
-        </p:nvSpPr>
-        <p:spPr>
-          <a:xfrm>
-            <a:off x="502920" y="1481328"/>
-            <a:ext cx="8229600" cy="2200656"/>
-          </a:xfrm>
-          <a:prstGeom prst="rect">
-            <a:avLst/>
-          </a:prstGeom>
-          <a:solidFill>
-            <a:srgbClr val="EAF3F5"/>
-          </a:solidFill>
-          <a:ln/>
-        </p:spPr>
-        <p:txBody>
-          <a:bodyPr/>
-          <a:lstStyle/>
-          <a:p>
-            <a:endParaRPr lang="en-NL"/>
-          </a:p>
-        </p:txBody>
-      </p:sp>
-      <p:sp>
-        <p:nvSpPr>
-          <p:cNvPr id="5" name="Shape 3"/>
-          <p:cNvSpPr/>
-          <p:nvPr/>
-        </p:nvSpPr>
-        <p:spPr>
-          <a:xfrm>
-            <a:off x="502920" y="1481328"/>
-            <a:ext cx="50292" cy="2200656"/>
-          </a:xfrm>
-          <a:prstGeom prst="rect">
-            <a:avLst/>
-          </a:prstGeom>
-          <a:solidFill>
-            <a:srgbClr val="258497"/>
-          </a:solidFill>
-          <a:ln/>
-        </p:spPr>
-        <p:txBody>
-          <a:bodyPr/>
-          <a:lstStyle/>
-          <a:p>
-            <a:endParaRPr lang="en-NL"/>
-          </a:p>
-        </p:txBody>
-      </p:sp>
-      <p:sp>
-        <p:nvSpPr>
-          <p:cNvPr id="6" name="Text 4"/>
-          <p:cNvSpPr/>
-          <p:nvPr/>
-        </p:nvSpPr>
-        <p:spPr>
-          <a:xfrm>
-            <a:off x="685800" y="1591056"/>
-            <a:ext cx="7936992" cy="1981200"/>
-          </a:xfrm>
-          <a:prstGeom prst="rect">
-            <a:avLst/>
-          </a:prstGeom>
-          <a:noFill/>
-          <a:ln/>
-        </p:spPr>
-        <p:txBody>
-          <a:bodyPr wrap="square" rtlCol="0" anchor="t"/>
-          <a:lstStyle/>
-          <a:p>
-            <a:pPr marL="0" indent="0" algn="l">
-              <a:lnSpc>
-                <a:spcPct val="110000"/>
-              </a:lnSpc>
-              <a:buNone/>
-            </a:pPr>
-            <a:r>
-              <a:rPr lang="en-US" sz="1200" dirty="0">
-                <a:solidFill>
-                  <a:srgbClr val="163C44"/>
-                </a:solidFill>
-                <a:latin typeface="Consolas" pitchFamily="34" charset="0"/>
-                <a:ea typeface="Consolas" pitchFamily="34" charset="-122"/>
-                <a:cs typeface="Consolas" pitchFamily="34" charset="-120"/>
-              </a:rPr>
-              <a:t>An AI assistant can only help with what it can SEE.</a:t>
-            </a:r>
-            <a:endParaRPr lang="en-US" sz="1200" dirty="0"/>
-          </a:p>
-          <a:p>
-            <a:pPr marL="0" indent="0" algn="l">
-              <a:lnSpc>
-                <a:spcPct val="110000"/>
-              </a:lnSpc>
-              <a:buNone/>
-            </a:pPr>
-            <a:r>
-              <a:rPr lang="en-US" sz="1200" dirty="0">
-                <a:solidFill>
-                  <a:srgbClr val="163C44"/>
-                </a:solidFill>
-                <a:latin typeface="Consolas" pitchFamily="34" charset="0"/>
-                <a:ea typeface="Consolas" pitchFamily="34" charset="-122"/>
-                <a:cs typeface="Consolas" pitchFamily="34" charset="-120"/>
-              </a:rPr>
-              <a:t>That's also the risk: confidential data must stay out of its view.</a:t>
-            </a:r>
-            <a:endParaRPr lang="en-US" sz="1200" dirty="0"/>
-          </a:p>
-          <a:p>
-            <a:pPr marL="0" indent="0" algn="l">
-              <a:lnSpc>
-                <a:spcPct val="110000"/>
-              </a:lnSpc>
-              <a:buNone/>
-            </a:pPr>
-            <a:endParaRPr lang="en-US" sz="1200" dirty="0"/>
-          </a:p>
-          <a:p>
-            <a:pPr marL="0" indent="0" algn="l">
-              <a:lnSpc>
-                <a:spcPct val="110000"/>
-              </a:lnSpc>
-              <a:buNone/>
-            </a:pPr>
-            <a:r>
-              <a:rPr lang="en-US" sz="1200" dirty="0">
-                <a:solidFill>
-                  <a:srgbClr val="163C44"/>
-                </a:solidFill>
-                <a:latin typeface="Consolas" pitchFamily="34" charset="0"/>
-                <a:ea typeface="Consolas" pitchFamily="34" charset="-122"/>
-                <a:cs typeface="Consolas" pitchFamily="34" charset="-120"/>
-              </a:rPr>
-              <a:t>The recurring question (Day 3 version):</a:t>
-            </a:r>
-            <a:endParaRPr lang="en-US" sz="1200" dirty="0"/>
-          </a:p>
-          <a:p>
-            <a:pPr marL="0" indent="0" algn="l">
-              <a:lnSpc>
-                <a:spcPct val="110000"/>
-              </a:lnSpc>
-              <a:buNone/>
-            </a:pPr>
-            <a:r>
-              <a:rPr lang="en-US" sz="1200" dirty="0">
-                <a:solidFill>
-                  <a:srgbClr val="163C44"/>
-                </a:solidFill>
-                <a:latin typeface="Consolas" pitchFamily="34" charset="0"/>
-                <a:ea typeface="Consolas" pitchFamily="34" charset="-122"/>
-                <a:cs typeface="Consolas" pitchFamily="34" charset="-120"/>
-              </a:rPr>
-              <a:t>  "What is safe to commit, share, upload to Overleaf, or paste into an AI tool?"</a:t>
-            </a:r>
-            <a:endParaRPr lang="en-US" sz="1200" dirty="0"/>
-          </a:p>
-          <a:p>
-            <a:pPr marL="0" indent="0" algn="l">
-              <a:lnSpc>
-                <a:spcPct val="110000"/>
-              </a:lnSpc>
-              <a:buNone/>
-            </a:pPr>
-            <a:endParaRPr lang="en-US" sz="1200" dirty="0"/>
-          </a:p>
-          <a:p>
-            <a:pPr marL="0" indent="0" algn="l">
-              <a:lnSpc>
-                <a:spcPct val="110000"/>
-              </a:lnSpc>
-              <a:buNone/>
-            </a:pPr>
-            <a:r>
-              <a:rPr lang="en-US" sz="1200" dirty="0">
-                <a:solidFill>
-                  <a:srgbClr val="163C44"/>
-                </a:solidFill>
-                <a:latin typeface="Consolas" pitchFamily="34" charset="0"/>
-                <a:ea typeface="Consolas" pitchFamily="34" charset="-122"/>
-                <a:cs typeface="Consolas" pitchFamily="34" charset="-120"/>
-              </a:rPr>
-              <a:t>  Scripts            usually yes</a:t>
-            </a:r>
-            <a:endParaRPr lang="en-US" sz="1200" dirty="0"/>
-          </a:p>
-          <a:p>
-            <a:pPr marL="0" indent="0" algn="l">
-              <a:lnSpc>
-                <a:spcPct val="110000"/>
-              </a:lnSpc>
-              <a:buNone/>
-            </a:pPr>
-            <a:r>
-              <a:rPr lang="en-US" sz="1200" dirty="0">
-                <a:solidFill>
-                  <a:srgbClr val="163C44"/>
-                </a:solidFill>
-                <a:latin typeface="Consolas" pitchFamily="34" charset="0"/>
-                <a:ea typeface="Consolas" pitchFamily="34" charset="-122"/>
-                <a:cs typeface="Consolas" pitchFamily="34" charset="-120"/>
-              </a:rPr>
-              <a:t>  Raw data           no</a:t>
-            </a:r>
-            <a:endParaRPr lang="en-US" sz="1200" dirty="0"/>
-          </a:p>
-          <a:p>
-            <a:pPr marL="0" indent="0" algn="l">
-              <a:lnSpc>
-                <a:spcPct val="110000"/>
-              </a:lnSpc>
-              <a:buNone/>
-            </a:pPr>
-            <a:r>
-              <a:rPr lang="en-US" sz="1200" dirty="0">
-                <a:solidFill>
-                  <a:srgbClr val="163C44"/>
-                </a:solidFill>
-                <a:latin typeface="Consolas" pitchFamily="34" charset="0"/>
-                <a:ea typeface="Consolas" pitchFamily="34" charset="-122"/>
-                <a:cs typeface="Consolas" pitchFamily="34" charset="-120"/>
-              </a:rPr>
-              <a:t>  Outputs            only if no one can be identified</a:t>
-            </a:r>
-            <a:endParaRPr lang="en-US" sz="1200" dirty="0"/>
-          </a:p>
-          <a:p>
-            <a:pPr marL="0" indent="0" algn="l">
-              <a:lnSpc>
-                <a:spcPct val="110000"/>
-              </a:lnSpc>
-              <a:buNone/>
-            </a:pPr>
-            <a:r>
-              <a:rPr lang="en-US" sz="1200" dirty="0">
-                <a:solidFill>
-                  <a:srgbClr val="163C44"/>
-                </a:solidFill>
-                <a:latin typeface="Consolas" pitchFamily="34" charset="0"/>
-                <a:ea typeface="Consolas" pitchFamily="34" charset="-122"/>
-                <a:cs typeface="Consolas" pitchFamily="34" charset="-120"/>
-              </a:rPr>
-              <a:t>  Confidential data  never into external AI tools without approval</a:t>
-            </a:r>
-            <a:endParaRPr lang="en-US" sz="1200" dirty="0"/>
           </a:p>
         </p:txBody>
       </p:sp>
@@ -31420,6 +31638,363 @@
 
 <file path=ppt/slides/slide20.xml><?xml version="1.0" encoding="utf-8"?>
 <p:sld xmlns:a="http://schemas.openxmlformats.org/drawingml/2006/main" xmlns:r="http://schemas.openxmlformats.org/officeDocument/2006/relationships" xmlns:p="http://schemas.openxmlformats.org/presentationml/2006/main">
+  <p:cSld name="Slide 14">
+    <p:spTree>
+      <p:nvGrpSpPr>
+        <p:cNvPr id="1" name=""/>
+        <p:cNvGrpSpPr/>
+        <p:nvPr/>
+      </p:nvGrpSpPr>
+      <p:grpSpPr>
+        <a:xfrm>
+          <a:off x="0" y="0"/>
+          <a:ext cx="0" cy="0"/>
+          <a:chOff x="0" y="0"/>
+          <a:chExt cx="0" cy="0"/>
+        </a:xfrm>
+      </p:grpSpPr>
+      <p:sp>
+        <p:nvSpPr>
+          <p:cNvPr id="2" name="Text 0"/>
+          <p:cNvSpPr/>
+          <p:nvPr/>
+        </p:nvSpPr>
+        <p:spPr>
+          <a:xfrm>
+            <a:off x="502920" y="347472"/>
+            <a:ext cx="8138160" cy="749808"/>
+          </a:xfrm>
+          <a:prstGeom prst="rect">
+            <a:avLst/>
+          </a:prstGeom>
+          <a:noFill/>
+          <a:ln/>
+        </p:spPr>
+        <p:txBody>
+          <a:bodyPr wrap="square" rtlCol="0" anchor="t"/>
+          <a:lstStyle/>
+          <a:p>
+            <a:pPr marL="0" indent="0">
+              <a:buNone/>
+            </a:pPr>
+            <a:r>
+              <a:rPr lang="en-US" sz="2300" b="1" dirty="0">
+                <a:solidFill>
+                  <a:srgbClr val="103C46"/>
+                </a:solidFill>
+                <a:latin typeface="Montserrat" pitchFamily="34" charset="0"/>
+                <a:ea typeface="Montserrat" pitchFamily="34" charset="-122"/>
+                <a:cs typeface="Montserrat" pitchFamily="34" charset="-120"/>
+              </a:rPr>
+              <a:t>The one rule that makes all of this safe</a:t>
+            </a:r>
+            <a:endParaRPr lang="en-US" sz="2300" dirty="0"/>
+          </a:p>
+        </p:txBody>
+      </p:sp>
+      <p:sp>
+        <p:nvSpPr>
+          <p:cNvPr id="3" name="Text 1"/>
+          <p:cNvSpPr/>
+          <p:nvPr/>
+        </p:nvSpPr>
+        <p:spPr>
+          <a:xfrm>
+            <a:off x="521208" y="1152144"/>
+            <a:ext cx="8138160" cy="274320"/>
+          </a:xfrm>
+          <a:prstGeom prst="rect">
+            <a:avLst/>
+          </a:prstGeom>
+          <a:noFill/>
+          <a:ln/>
+        </p:spPr>
+        <p:txBody>
+          <a:bodyPr wrap="square" rtlCol="0" anchor="ctr"/>
+          <a:lstStyle/>
+          <a:p>
+            <a:pPr marL="0" indent="0">
+              <a:buNone/>
+            </a:pPr>
+            <a:r>
+              <a:rPr lang="en-US" sz="1250" dirty="0">
+                <a:solidFill>
+                  <a:srgbClr val="258497"/>
+                </a:solidFill>
+                <a:latin typeface="Montserrat" pitchFamily="34" charset="0"/>
+                <a:ea typeface="Montserrat" pitchFamily="34" charset="-122"/>
+                <a:cs typeface="Montserrat" pitchFamily="34" charset="-120"/>
+              </a:rPr>
+              <a:t>Day 3 · Security · keep your data yours</a:t>
+            </a:r>
+            <a:endParaRPr lang="en-US" sz="1250" dirty="0"/>
+          </a:p>
+        </p:txBody>
+      </p:sp>
+      <p:sp>
+        <p:nvSpPr>
+          <p:cNvPr id="4" name="Shape 2"/>
+          <p:cNvSpPr/>
+          <p:nvPr/>
+        </p:nvSpPr>
+        <p:spPr>
+          <a:xfrm>
+            <a:off x="502920" y="1481328"/>
+            <a:ext cx="8229600" cy="2200656"/>
+          </a:xfrm>
+          <a:prstGeom prst="rect">
+            <a:avLst/>
+          </a:prstGeom>
+          <a:solidFill>
+            <a:srgbClr val="EAF3F5"/>
+          </a:solidFill>
+          <a:ln/>
+        </p:spPr>
+        <p:txBody>
+          <a:bodyPr/>
+          <a:lstStyle/>
+          <a:p>
+            <a:endParaRPr lang="en-NL"/>
+          </a:p>
+        </p:txBody>
+      </p:sp>
+      <p:sp>
+        <p:nvSpPr>
+          <p:cNvPr id="5" name="Shape 3"/>
+          <p:cNvSpPr/>
+          <p:nvPr/>
+        </p:nvSpPr>
+        <p:spPr>
+          <a:xfrm>
+            <a:off x="502920" y="1481328"/>
+            <a:ext cx="50292" cy="2200656"/>
+          </a:xfrm>
+          <a:prstGeom prst="rect">
+            <a:avLst/>
+          </a:prstGeom>
+          <a:solidFill>
+            <a:srgbClr val="258497"/>
+          </a:solidFill>
+          <a:ln/>
+        </p:spPr>
+        <p:txBody>
+          <a:bodyPr/>
+          <a:lstStyle/>
+          <a:p>
+            <a:endParaRPr lang="en-NL"/>
+          </a:p>
+        </p:txBody>
+      </p:sp>
+      <p:sp>
+        <p:nvSpPr>
+          <p:cNvPr id="6" name="Text 4"/>
+          <p:cNvSpPr/>
+          <p:nvPr/>
+        </p:nvSpPr>
+        <p:spPr>
+          <a:xfrm>
+            <a:off x="685800" y="1591056"/>
+            <a:ext cx="7936992" cy="1981200"/>
+          </a:xfrm>
+          <a:prstGeom prst="rect">
+            <a:avLst/>
+          </a:prstGeom>
+          <a:noFill/>
+          <a:ln/>
+        </p:spPr>
+        <p:txBody>
+          <a:bodyPr wrap="square" rtlCol="0" anchor="t"/>
+          <a:lstStyle/>
+          <a:p>
+            <a:pPr marL="0" indent="0" algn="l">
+              <a:lnSpc>
+                <a:spcPct val="110000"/>
+              </a:lnSpc>
+              <a:buNone/>
+            </a:pPr>
+            <a:r>
+              <a:rPr lang="en-US" sz="1200" dirty="0">
+                <a:solidFill>
+                  <a:srgbClr val="163C44"/>
+                </a:solidFill>
+                <a:latin typeface="Consolas" pitchFamily="34" charset="0"/>
+                <a:ea typeface="Consolas" pitchFamily="34" charset="-122"/>
+                <a:cs typeface="Consolas" pitchFamily="34" charset="-120"/>
+              </a:rPr>
+              <a:t>An AI assistant can only help with what it can SEE.</a:t>
+            </a:r>
+            <a:endParaRPr lang="en-US" sz="1200" dirty="0"/>
+          </a:p>
+          <a:p>
+            <a:pPr marL="0" indent="0" algn="l">
+              <a:lnSpc>
+                <a:spcPct val="110000"/>
+              </a:lnSpc>
+              <a:buNone/>
+            </a:pPr>
+            <a:r>
+              <a:rPr lang="en-US" sz="1200" dirty="0">
+                <a:solidFill>
+                  <a:srgbClr val="163C44"/>
+                </a:solidFill>
+                <a:latin typeface="Consolas" pitchFamily="34" charset="0"/>
+                <a:ea typeface="Consolas" pitchFamily="34" charset="-122"/>
+                <a:cs typeface="Consolas" pitchFamily="34" charset="-120"/>
+              </a:rPr>
+              <a:t>That's also the risk: confidential data must stay out of its view.</a:t>
+            </a:r>
+            <a:endParaRPr lang="en-US" sz="1200" dirty="0"/>
+          </a:p>
+          <a:p>
+            <a:pPr marL="0" indent="0" algn="l">
+              <a:lnSpc>
+                <a:spcPct val="110000"/>
+              </a:lnSpc>
+              <a:buNone/>
+            </a:pPr>
+            <a:endParaRPr lang="en-US" sz="1200" dirty="0"/>
+          </a:p>
+          <a:p>
+            <a:pPr marL="0" indent="0" algn="l">
+              <a:lnSpc>
+                <a:spcPct val="110000"/>
+              </a:lnSpc>
+              <a:buNone/>
+            </a:pPr>
+            <a:r>
+              <a:rPr lang="en-US" sz="1200" dirty="0">
+                <a:solidFill>
+                  <a:srgbClr val="163C44"/>
+                </a:solidFill>
+                <a:latin typeface="Consolas" pitchFamily="34" charset="0"/>
+                <a:ea typeface="Consolas" pitchFamily="34" charset="-122"/>
+                <a:cs typeface="Consolas" pitchFamily="34" charset="-120"/>
+              </a:rPr>
+              <a:t>The recurring question (Day 3 version):</a:t>
+            </a:r>
+            <a:endParaRPr lang="en-US" sz="1200" dirty="0"/>
+          </a:p>
+          <a:p>
+            <a:pPr marL="0" indent="0" algn="l">
+              <a:lnSpc>
+                <a:spcPct val="110000"/>
+              </a:lnSpc>
+              <a:buNone/>
+            </a:pPr>
+            <a:r>
+              <a:rPr lang="en-US" sz="1200" dirty="0">
+                <a:solidFill>
+                  <a:srgbClr val="163C44"/>
+                </a:solidFill>
+                <a:latin typeface="Consolas" pitchFamily="34" charset="0"/>
+                <a:ea typeface="Consolas" pitchFamily="34" charset="-122"/>
+                <a:cs typeface="Consolas" pitchFamily="34" charset="-120"/>
+              </a:rPr>
+              <a:t>  "What is safe to commit, share, upload to Overleaf, or paste into an AI tool?"</a:t>
+            </a:r>
+            <a:endParaRPr lang="en-US" sz="1200" dirty="0"/>
+          </a:p>
+          <a:p>
+            <a:pPr marL="0" indent="0" algn="l">
+              <a:lnSpc>
+                <a:spcPct val="110000"/>
+              </a:lnSpc>
+              <a:buNone/>
+            </a:pPr>
+            <a:endParaRPr lang="en-US" sz="1200" dirty="0"/>
+          </a:p>
+          <a:p>
+            <a:pPr marL="0" indent="0" algn="l">
+              <a:lnSpc>
+                <a:spcPct val="110000"/>
+              </a:lnSpc>
+              <a:buNone/>
+            </a:pPr>
+            <a:r>
+              <a:rPr lang="en-US" sz="1200" dirty="0">
+                <a:solidFill>
+                  <a:srgbClr val="163C44"/>
+                </a:solidFill>
+                <a:latin typeface="Consolas" pitchFamily="34" charset="0"/>
+                <a:ea typeface="Consolas" pitchFamily="34" charset="-122"/>
+                <a:cs typeface="Consolas" pitchFamily="34" charset="-120"/>
+              </a:rPr>
+              <a:t>  Scripts            usually yes</a:t>
+            </a:r>
+            <a:endParaRPr lang="en-US" sz="1200" dirty="0"/>
+          </a:p>
+          <a:p>
+            <a:pPr marL="0" indent="0" algn="l">
+              <a:lnSpc>
+                <a:spcPct val="110000"/>
+              </a:lnSpc>
+              <a:buNone/>
+            </a:pPr>
+            <a:r>
+              <a:rPr lang="en-US" sz="1200" dirty="0">
+                <a:solidFill>
+                  <a:srgbClr val="163C44"/>
+                </a:solidFill>
+                <a:latin typeface="Consolas" pitchFamily="34" charset="0"/>
+                <a:ea typeface="Consolas" pitchFamily="34" charset="-122"/>
+                <a:cs typeface="Consolas" pitchFamily="34" charset="-120"/>
+              </a:rPr>
+              <a:t>  Raw data           no</a:t>
+            </a:r>
+            <a:endParaRPr lang="en-US" sz="1200" dirty="0"/>
+          </a:p>
+          <a:p>
+            <a:pPr marL="0" indent="0" algn="l">
+              <a:lnSpc>
+                <a:spcPct val="110000"/>
+              </a:lnSpc>
+              <a:buNone/>
+            </a:pPr>
+            <a:r>
+              <a:rPr lang="en-US" sz="1200" dirty="0">
+                <a:solidFill>
+                  <a:srgbClr val="163C44"/>
+                </a:solidFill>
+                <a:latin typeface="Consolas" pitchFamily="34" charset="0"/>
+                <a:ea typeface="Consolas" pitchFamily="34" charset="-122"/>
+                <a:cs typeface="Consolas" pitchFamily="34" charset="-120"/>
+              </a:rPr>
+              <a:t>  Outputs            only if no one can be identified</a:t>
+            </a:r>
+            <a:endParaRPr lang="en-US" sz="1200" dirty="0"/>
+          </a:p>
+          <a:p>
+            <a:pPr marL="0" indent="0" algn="l">
+              <a:lnSpc>
+                <a:spcPct val="110000"/>
+              </a:lnSpc>
+              <a:buNone/>
+            </a:pPr>
+            <a:r>
+              <a:rPr lang="en-US" sz="1200" dirty="0">
+                <a:solidFill>
+                  <a:srgbClr val="163C44"/>
+                </a:solidFill>
+                <a:latin typeface="Consolas" pitchFamily="34" charset="0"/>
+                <a:ea typeface="Consolas" pitchFamily="34" charset="-122"/>
+                <a:cs typeface="Consolas" pitchFamily="34" charset="-120"/>
+              </a:rPr>
+              <a:t>  Confidential data  never into external AI tools without approval</a:t>
+            </a:r>
+            <a:endParaRPr lang="en-US" sz="1200" dirty="0"/>
+          </a:p>
+        </p:txBody>
+      </p:sp>
+    </p:spTree>
+  </p:cSld>
+  <p:clrMapOvr>
+    <a:masterClrMapping/>
+  </p:clrMapOvr>
+</p:sld>
+</file>
+
+<file path=ppt/slides/slide21.xml><?xml version="1.0" encoding="utf-8"?>
+<p:sld xmlns:a="http://schemas.openxmlformats.org/drawingml/2006/main" xmlns:r="http://schemas.openxmlformats.org/officeDocument/2006/relationships" xmlns:p="http://schemas.openxmlformats.org/presentationml/2006/main">
   <p:cSld name="Slide 15">
     <p:spTree>
       <p:nvGrpSpPr>
@@ -31764,7 +32339,7 @@
 </p:sld>
 </file>
 
-<file path=ppt/slides/slide21.xml><?xml version="1.0" encoding="utf-8"?>
+<file path=ppt/slides/slide22.xml><?xml version="1.0" encoding="utf-8"?>
 <p:sld xmlns:a="http://schemas.openxmlformats.org/drawingml/2006/main" xmlns:r="http://schemas.openxmlformats.org/officeDocument/2006/relationships" xmlns:p="http://schemas.openxmlformats.org/presentationml/2006/main">
   <p:cSld name="Slide 16">
     <p:spTree>
@@ -32209,7 +32784,7 @@
 </p:sld>
 </file>
 
-<file path=ppt/slides/slide22.xml><?xml version="1.0" encoding="utf-8"?>
+<file path=ppt/slides/slide23.xml><?xml version="1.0" encoding="utf-8"?>
 <p:sld xmlns:a="http://schemas.openxmlformats.org/drawingml/2006/main" xmlns:r="http://schemas.openxmlformats.org/officeDocument/2006/relationships" xmlns:p="http://schemas.openxmlformats.org/presentationml/2006/main">
   <p:cSld name="Slide 17">
     <p:spTree>
@@ -32566,7 +33141,7 @@
 </p:sld>
 </file>
 
-<file path=ppt/slides/slide23.xml><?xml version="1.0" encoding="utf-8"?>
+<file path=ppt/slides/slide24.xml><?xml version="1.0" encoding="utf-8"?>
 <p:sld xmlns:a="http://schemas.openxmlformats.org/drawingml/2006/main" xmlns:r="http://schemas.openxmlformats.org/officeDocument/2006/relationships" xmlns:p="http://schemas.openxmlformats.org/presentationml/2006/main">
   <p:cSld name="Slide 18">
     <p:spTree>
@@ -32971,7 +33546,7 @@
 </p:sld>
 </file>
 
-<file path=ppt/slides/slide24.xml><?xml version="1.0" encoding="utf-8"?>
+<file path=ppt/slides/slide25.xml><?xml version="1.0" encoding="utf-8"?>
 <p:sld xmlns:a="http://schemas.openxmlformats.org/drawingml/2006/main" xmlns:r="http://schemas.openxmlformats.org/officeDocument/2006/relationships" xmlns:p="http://schemas.openxmlformats.org/presentationml/2006/main">
   <p:cSld name="Slide 19">
     <p:spTree>
@@ -33404,7 +33979,7 @@
 </p:sld>
 </file>
 
-<file path=ppt/slides/slide25.xml><?xml version="1.0" encoding="utf-8"?>
+<file path=ppt/slides/slide26.xml><?xml version="1.0" encoding="utf-8"?>
 <p:sld xmlns:a="http://schemas.openxmlformats.org/drawingml/2006/main" xmlns:r="http://schemas.openxmlformats.org/officeDocument/2006/relationships" xmlns:p="http://schemas.openxmlformats.org/presentationml/2006/main">
   <p:cSld name="Slide 20">
     <p:spTree>
@@ -33896,7 +34471,7 @@
 </p:sld>
 </file>
 
-<file path=ppt/slides/slide26.xml><?xml version="1.0" encoding="utf-8"?>
+<file path=ppt/slides/slide27.xml><?xml version="1.0" encoding="utf-8"?>
 <p:sld xmlns:a="http://schemas.openxmlformats.org/drawingml/2006/main" xmlns:r="http://schemas.openxmlformats.org/officeDocument/2006/relationships" xmlns:p="http://schemas.openxmlformats.org/presentationml/2006/main">
   <p:cSld name="Slide 21">
     <p:spTree>
@@ -34244,7 +34819,7 @@
 </p:sld>
 </file>
 
-<file path=ppt/slides/slide27.xml><?xml version="1.0" encoding="utf-8"?>
+<file path=ppt/slides/slide28.xml><?xml version="1.0" encoding="utf-8"?>
 <p:sld xmlns:a="http://schemas.openxmlformats.org/drawingml/2006/main" xmlns:r="http://schemas.openxmlformats.org/officeDocument/2006/relationships" xmlns:p="http://schemas.openxmlformats.org/presentationml/2006/main">
   <p:cSld name="Slide 22">
     <p:spTree>
@@ -34581,7 +35156,7 @@
 </p:sld>
 </file>
 
-<file path=ppt/slides/slide28.xml><?xml version="1.0" encoding="utf-8"?>
+<file path=ppt/slides/slide29.xml><?xml version="1.0" encoding="utf-8"?>
 <p:sld xmlns:a="http://schemas.openxmlformats.org/drawingml/2006/main" xmlns:r="http://schemas.openxmlformats.org/officeDocument/2006/relationships" xmlns:p="http://schemas.openxmlformats.org/presentationml/2006/main">
   <p:cSld name="Slide 23">
     <p:spTree>
@@ -34938,7 +35513,115 @@
 </p:sld>
 </file>
 
-<file path=ppt/slides/slide29.xml><?xml version="1.0" encoding="utf-8"?>
+<file path=ppt/slides/slide3.xml><?xml version="1.0" encoding="utf-8"?>
+<p:sld xmlns:a="http://schemas.openxmlformats.org/drawingml/2006/main" xmlns:r="http://schemas.openxmlformats.org/officeDocument/2006/relationships" xmlns:p="http://schemas.openxmlformats.org/presentationml/2006/main">
+  <p:cSld>
+    <p:spTree>
+      <p:nvGrpSpPr>
+        <p:cNvPr id="1" name=""/>
+        <p:cNvGrpSpPr/>
+        <p:nvPr/>
+      </p:nvGrpSpPr>
+      <p:grpSpPr>
+        <a:xfrm>
+          <a:off x="0" y="0"/>
+          <a:ext cx="0" cy="0"/>
+          <a:chOff x="0" y="0"/>
+          <a:chExt cx="0" cy="0"/>
+        </a:xfrm>
+      </p:grpSpPr>
+      <p:sp>
+        <p:nvSpPr>
+          <p:cNvPr id="2" name="Subtitle 1">
+            <a:extLst>
+              <a:ext uri="{FF2B5EF4-FFF2-40B4-BE49-F238E27FC236}">
+                <a16:creationId xmlns:a16="http://schemas.microsoft.com/office/drawing/2014/main" id="{6B2FF288-F7D4-CA51-8950-77085B323A4E}"/>
+              </a:ext>
+            </a:extLst>
+          </p:cNvPr>
+          <p:cNvSpPr>
+            <a:spLocks noGrp="1"/>
+          </p:cNvSpPr>
+          <p:nvPr>
+            <p:ph type="subTitle" idx="1"/>
+          </p:nvPr>
+        </p:nvSpPr>
+        <p:spPr/>
+        <p:txBody>
+          <a:bodyPr/>
+          <a:lstStyle/>
+          <a:p>
+            <a:r>
+              <a:rPr lang="en-NL" dirty="0"/>
+              <a:t>Add day one and three slides</a:t>
+            </a:r>
+          </a:p>
+        </p:txBody>
+      </p:sp>
+      <p:sp>
+        <p:nvSpPr>
+          <p:cNvPr id="3" name="Title 2">
+            <a:extLst>
+              <a:ext uri="{FF2B5EF4-FFF2-40B4-BE49-F238E27FC236}">
+                <a16:creationId xmlns:a16="http://schemas.microsoft.com/office/drawing/2014/main" id="{E32528B3-306F-5178-3CE2-E67F94E49BA6}"/>
+              </a:ext>
+            </a:extLst>
+          </p:cNvPr>
+          <p:cNvSpPr>
+            <a:spLocks noGrp="1"/>
+          </p:cNvSpPr>
+          <p:nvPr>
+            <p:ph type="title"/>
+          </p:nvPr>
+        </p:nvSpPr>
+        <p:spPr/>
+        <p:txBody>
+          <a:bodyPr/>
+          <a:lstStyle/>
+          <a:p>
+            <a:endParaRPr lang="en-NL" dirty="0"/>
+          </a:p>
+        </p:txBody>
+      </p:sp>
+      <p:sp>
+        <p:nvSpPr>
+          <p:cNvPr id="4" name="Subtitle 3">
+            <a:extLst>
+              <a:ext uri="{FF2B5EF4-FFF2-40B4-BE49-F238E27FC236}">
+                <a16:creationId xmlns:a16="http://schemas.microsoft.com/office/drawing/2014/main" id="{37F0F13F-E8D0-3189-15C5-39CC37544571}"/>
+              </a:ext>
+            </a:extLst>
+          </p:cNvPr>
+          <p:cNvSpPr>
+            <a:spLocks noGrp="1"/>
+          </p:cNvSpPr>
+          <p:nvPr>
+            <p:ph type="subTitle" idx="2"/>
+          </p:nvPr>
+        </p:nvSpPr>
+        <p:spPr/>
+        <p:txBody>
+          <a:bodyPr/>
+          <a:lstStyle/>
+          <a:p>
+            <a:endParaRPr lang="en-NL"/>
+          </a:p>
+        </p:txBody>
+      </p:sp>
+    </p:spTree>
+    <p:extLst>
+      <p:ext uri="{BB962C8B-B14F-4D97-AF65-F5344CB8AC3E}">
+        <p14:creationId xmlns:p14="http://schemas.microsoft.com/office/powerpoint/2010/main" val="599254622"/>
+      </p:ext>
+    </p:extLst>
+  </p:cSld>
+  <p:clrMapOvr>
+    <a:masterClrMapping/>
+  </p:clrMapOvr>
+</p:sld>
+</file>
+
+<file path=ppt/slides/slide30.xml><?xml version="1.0" encoding="utf-8"?>
 <p:sld xmlns:a="http://schemas.openxmlformats.org/drawingml/2006/main" xmlns:r="http://schemas.openxmlformats.org/officeDocument/2006/relationships" xmlns:p="http://schemas.openxmlformats.org/presentationml/2006/main">
   <p:cSld name="Slide 24">
     <p:spTree>
@@ -35334,845 +36017,7 @@
 </p:sld>
 </file>
 
-<file path=ppt/slides/slide3.xml><?xml version="1.0" encoding="utf-8"?>
-<p:sld xmlns:a="http://schemas.openxmlformats.org/drawingml/2006/main" xmlns:r="http://schemas.openxmlformats.org/officeDocument/2006/relationships" xmlns:p="http://schemas.openxmlformats.org/presentationml/2006/main">
-  <p:cSld>
-    <p:spTree>
-      <p:nvGrpSpPr>
-        <p:cNvPr id="1" name="Shape 212"/>
-        <p:cNvGrpSpPr/>
-        <p:nvPr/>
-      </p:nvGrpSpPr>
-      <p:grpSpPr>
-        <a:xfrm>
-          <a:off x="0" y="0"/>
-          <a:ext cx="0" cy="0"/>
-          <a:chOff x="0" y="0"/>
-          <a:chExt cx="0" cy="0"/>
-        </a:xfrm>
-      </p:grpSpPr>
-      <p:sp>
-        <p:nvSpPr>
-          <p:cNvPr id="213" name="Google Shape;213;p39"/>
-          <p:cNvSpPr txBox="1">
-            <a:spLocks noGrp="1"/>
-          </p:cNvSpPr>
-          <p:nvPr>
-            <p:ph type="title"/>
-          </p:nvPr>
-        </p:nvSpPr>
-        <p:spPr>
-          <a:xfrm>
-            <a:off x="1718550" y="431118"/>
-            <a:ext cx="5706900" cy="744000"/>
-          </a:xfrm>
-          <a:prstGeom prst="rect">
-            <a:avLst/>
-          </a:prstGeom>
-        </p:spPr>
-        <p:txBody>
-          <a:bodyPr spcFirstLastPara="1" wrap="square" lIns="91425" tIns="91425" rIns="91425" bIns="91425" anchor="t" anchorCtr="0">
-            <a:noAutofit/>
-          </a:bodyPr>
-          <a:lstStyle/>
-          <a:p>
-            <a:pPr marL="0" lvl="0" indent="0" algn="ctr" rtl="0">
-              <a:lnSpc>
-                <a:spcPct val="115000"/>
-              </a:lnSpc>
-              <a:spcBef>
-                <a:spcPts val="1200"/>
-              </a:spcBef>
-              <a:spcAft>
-                <a:spcPts val="1200"/>
-              </a:spcAft>
-              <a:buNone/>
-            </a:pPr>
-            <a:r>
-              <a:rPr lang="en" dirty="0"/>
-              <a:t>The three-day roadmap</a:t>
-            </a:r>
-            <a:endParaRPr dirty="0"/>
-          </a:p>
-        </p:txBody>
-      </p:sp>
-      <p:sp>
-        <p:nvSpPr>
-          <p:cNvPr id="214" name="Google Shape;214;p39"/>
-          <p:cNvSpPr txBox="1">
-            <a:spLocks noGrp="1"/>
-          </p:cNvSpPr>
-          <p:nvPr>
-            <p:ph type="subTitle" idx="3"/>
-          </p:nvPr>
-        </p:nvSpPr>
-        <p:spPr>
-          <a:xfrm>
-            <a:off x="677638" y="1456315"/>
-            <a:ext cx="2613000" cy="461700"/>
-          </a:xfrm>
-          <a:prstGeom prst="rect">
-            <a:avLst/>
-          </a:prstGeom>
-        </p:spPr>
-        <p:txBody>
-          <a:bodyPr spcFirstLastPara="1" wrap="square" lIns="91425" tIns="91425" rIns="91425" bIns="91425" anchor="t" anchorCtr="0">
-            <a:spAutoFit/>
-          </a:bodyPr>
-          <a:lstStyle/>
-          <a:p>
-            <a:pPr marL="0" lvl="0" indent="0" algn="l" rtl="0">
-              <a:lnSpc>
-                <a:spcPct val="115000"/>
-              </a:lnSpc>
-              <a:spcBef>
-                <a:spcPts val="1200"/>
-              </a:spcBef>
-              <a:spcAft>
-                <a:spcPts val="1200"/>
-              </a:spcAft>
-              <a:buNone/>
-            </a:pPr>
-            <a:r>
-              <a:rPr lang="en"/>
-              <a:t>Day 1: Scaffold</a:t>
-            </a:r>
-            <a:endParaRPr/>
-          </a:p>
-        </p:txBody>
-      </p:sp>
-      <p:sp>
-        <p:nvSpPr>
-          <p:cNvPr id="215" name="Google Shape;215;p39"/>
-          <p:cNvSpPr txBox="1">
-            <a:spLocks noGrp="1"/>
-          </p:cNvSpPr>
-          <p:nvPr>
-            <p:ph type="subTitle" idx="6"/>
-          </p:nvPr>
-        </p:nvSpPr>
-        <p:spPr>
-          <a:xfrm>
-            <a:off x="677638" y="1954665"/>
-            <a:ext cx="2613000" cy="2037451"/>
-          </a:xfrm>
-          <a:prstGeom prst="rect">
-            <a:avLst/>
-          </a:prstGeom>
-        </p:spPr>
-        <p:txBody>
-          <a:bodyPr spcFirstLastPara="1" wrap="square" lIns="91425" tIns="91425" rIns="91425" bIns="91425" anchor="t" anchorCtr="0">
-            <a:spAutoFit/>
-          </a:bodyPr>
-          <a:lstStyle/>
-          <a:p>
-            <a:pPr marL="457200" lvl="0" indent="-317500" algn="l" rtl="0">
-              <a:lnSpc>
-                <a:spcPct val="115000"/>
-              </a:lnSpc>
-              <a:spcBef>
-                <a:spcPts val="1200"/>
-              </a:spcBef>
-              <a:spcAft>
-                <a:spcPts val="0"/>
-              </a:spcAft>
-              <a:buSzPts val="1400"/>
-              <a:buChar char="●"/>
-            </a:pPr>
-            <a:r>
-              <a:rPr lang="en" dirty="0"/>
-              <a:t>R</a:t>
-            </a:r>
-            <a:endParaRPr dirty="0"/>
-          </a:p>
-          <a:p>
-            <a:pPr marL="457200" lvl="0" indent="-317500" algn="l" rtl="0">
-              <a:lnSpc>
-                <a:spcPct val="115000"/>
-              </a:lnSpc>
-              <a:spcBef>
-                <a:spcPts val="0"/>
-              </a:spcBef>
-              <a:spcAft>
-                <a:spcPts val="0"/>
-              </a:spcAft>
-              <a:buSzPts val="1400"/>
-              <a:buChar char="●"/>
-            </a:pPr>
-            <a:r>
-              <a:rPr lang="en" dirty="0"/>
-              <a:t>R</a:t>
-            </a:r>
-            <a:r>
-              <a:rPr lang="en-GB" dirty="0"/>
-              <a:t>s</a:t>
-            </a:r>
-            <a:r>
-              <a:rPr lang="en" dirty="0" err="1"/>
-              <a:t>tudio</a:t>
-            </a:r>
-            <a:endParaRPr lang="en" dirty="0"/>
-          </a:p>
-          <a:p>
-            <a:pPr marL="457200" indent="-317500" algn="l">
-              <a:lnSpc>
-                <a:spcPct val="115000"/>
-              </a:lnSpc>
-              <a:buSzPts val="1400"/>
-              <a:buFont typeface="Arial"/>
-              <a:buChar char="●"/>
-            </a:pPr>
-            <a:r>
-              <a:rPr lang="en-GB" dirty="0"/>
-              <a:t>Git/GitHub basics</a:t>
-            </a:r>
-            <a:endParaRPr dirty="0"/>
-          </a:p>
-          <a:p>
-            <a:pPr marL="457200" lvl="0" indent="-317500" algn="l" rtl="0">
-              <a:lnSpc>
-                <a:spcPct val="115000"/>
-              </a:lnSpc>
-              <a:spcBef>
-                <a:spcPts val="0"/>
-              </a:spcBef>
-              <a:spcAft>
-                <a:spcPts val="0"/>
-              </a:spcAft>
-              <a:buSzPts val="1400"/>
-              <a:buChar char="●"/>
-            </a:pPr>
-            <a:r>
-              <a:rPr lang="en" dirty="0"/>
-              <a:t>Folders</a:t>
-            </a:r>
-            <a:endParaRPr dirty="0"/>
-          </a:p>
-          <a:p>
-            <a:pPr marL="457200" lvl="0" indent="-317500" algn="l" rtl="0">
-              <a:lnSpc>
-                <a:spcPct val="115000"/>
-              </a:lnSpc>
-              <a:spcBef>
-                <a:spcPts val="0"/>
-              </a:spcBef>
-              <a:spcAft>
-                <a:spcPts val="0"/>
-              </a:spcAft>
-              <a:buSzPts val="1400"/>
-              <a:buChar char="●"/>
-            </a:pPr>
-            <a:r>
-              <a:rPr lang="en" dirty="0"/>
-              <a:t>Data protection</a:t>
-            </a:r>
-          </a:p>
-          <a:p>
-            <a:pPr marL="457200" lvl="0" indent="-317500" algn="l" rtl="0">
-              <a:lnSpc>
-                <a:spcPct val="115000"/>
-              </a:lnSpc>
-              <a:spcBef>
-                <a:spcPts val="0"/>
-              </a:spcBef>
-              <a:spcAft>
-                <a:spcPts val="0"/>
-              </a:spcAft>
-              <a:buSzPts val="1400"/>
-              <a:buChar char="●"/>
-            </a:pPr>
-            <a:r>
-              <a:rPr lang="en" dirty="0"/>
-              <a:t>Quarto</a:t>
-            </a:r>
-            <a:endParaRPr dirty="0"/>
-          </a:p>
-        </p:txBody>
-      </p:sp>
-      <p:sp>
-        <p:nvSpPr>
-          <p:cNvPr id="216" name="Google Shape;216;p39"/>
-          <p:cNvSpPr txBox="1">
-            <a:spLocks noGrp="1"/>
-          </p:cNvSpPr>
-          <p:nvPr>
-            <p:ph type="subTitle" idx="3"/>
-          </p:nvPr>
-        </p:nvSpPr>
-        <p:spPr>
-          <a:xfrm>
-            <a:off x="3445880" y="1456315"/>
-            <a:ext cx="2613000" cy="461700"/>
-          </a:xfrm>
-          <a:prstGeom prst="rect">
-            <a:avLst/>
-          </a:prstGeom>
-        </p:spPr>
-        <p:txBody>
-          <a:bodyPr spcFirstLastPara="1" wrap="square" lIns="91425" tIns="91425" rIns="91425" bIns="91425" anchor="t" anchorCtr="0">
-            <a:spAutoFit/>
-          </a:bodyPr>
-          <a:lstStyle/>
-          <a:p>
-            <a:pPr marL="0" lvl="0" indent="0" algn="l" rtl="0">
-              <a:lnSpc>
-                <a:spcPct val="115000"/>
-              </a:lnSpc>
-              <a:spcBef>
-                <a:spcPts val="1200"/>
-              </a:spcBef>
-              <a:spcAft>
-                <a:spcPts val="1200"/>
-              </a:spcAft>
-              <a:buNone/>
-            </a:pPr>
-            <a:r>
-              <a:rPr lang="en"/>
-              <a:t>Day 2: Analyse </a:t>
-            </a:r>
-            <a:endParaRPr/>
-          </a:p>
-        </p:txBody>
-      </p:sp>
-      <p:sp>
-        <p:nvSpPr>
-          <p:cNvPr id="217" name="Google Shape;217;p39"/>
-          <p:cNvSpPr txBox="1">
-            <a:spLocks noGrp="1"/>
-          </p:cNvSpPr>
-          <p:nvPr>
-            <p:ph type="subTitle" idx="6"/>
-          </p:nvPr>
-        </p:nvSpPr>
-        <p:spPr>
-          <a:xfrm>
-            <a:off x="3445880" y="1954665"/>
-            <a:ext cx="2613000" cy="2696700"/>
-          </a:xfrm>
-          <a:prstGeom prst="rect">
-            <a:avLst/>
-          </a:prstGeom>
-        </p:spPr>
-        <p:txBody>
-          <a:bodyPr spcFirstLastPara="1" wrap="square" lIns="91425" tIns="91425" rIns="91425" bIns="91425" anchor="t" anchorCtr="0">
-            <a:spAutoFit/>
-          </a:bodyPr>
-          <a:lstStyle/>
-          <a:p>
-            <a:pPr marL="457200" lvl="0" indent="-317500" algn="l" rtl="0">
-              <a:lnSpc>
-                <a:spcPct val="115000"/>
-              </a:lnSpc>
-              <a:spcBef>
-                <a:spcPts val="1200"/>
-              </a:spcBef>
-              <a:spcAft>
-                <a:spcPts val="0"/>
-              </a:spcAft>
-              <a:buSzPts val="1400"/>
-              <a:buChar char="●"/>
-            </a:pPr>
-            <a:r>
-              <a:rPr lang="en"/>
-              <a:t>Base R</a:t>
-            </a:r>
-            <a:endParaRPr/>
-          </a:p>
-          <a:p>
-            <a:pPr marL="457200" lvl="0" indent="-317500" algn="l" rtl="0">
-              <a:lnSpc>
-                <a:spcPct val="115000"/>
-              </a:lnSpc>
-              <a:spcBef>
-                <a:spcPts val="0"/>
-              </a:spcBef>
-              <a:spcAft>
-                <a:spcPts val="0"/>
-              </a:spcAft>
-              <a:buSzPts val="1400"/>
-              <a:buChar char="●"/>
-            </a:pPr>
-            <a:r>
-              <a:rPr lang="en"/>
-              <a:t> Import</a:t>
-            </a:r>
-            <a:endParaRPr/>
-          </a:p>
-          <a:p>
-            <a:pPr marL="457200" lvl="0" indent="-317500" algn="l" rtl="0">
-              <a:lnSpc>
-                <a:spcPct val="115000"/>
-              </a:lnSpc>
-              <a:spcBef>
-                <a:spcPts val="0"/>
-              </a:spcBef>
-              <a:spcAft>
-                <a:spcPts val="0"/>
-              </a:spcAft>
-              <a:buSzPts val="1400"/>
-              <a:buChar char="●"/>
-            </a:pPr>
-            <a:r>
-              <a:rPr lang="en"/>
-              <a:t> Clean</a:t>
-            </a:r>
-            <a:endParaRPr/>
-          </a:p>
-          <a:p>
-            <a:pPr marL="457200" lvl="0" indent="-317500" algn="l" rtl="0">
-              <a:lnSpc>
-                <a:spcPct val="115000"/>
-              </a:lnSpc>
-              <a:spcBef>
-                <a:spcPts val="0"/>
-              </a:spcBef>
-              <a:spcAft>
-                <a:spcPts val="0"/>
-              </a:spcAft>
-              <a:buSzPts val="1400"/>
-              <a:buChar char="●"/>
-            </a:pPr>
-            <a:r>
-              <a:rPr lang="en"/>
-              <a:t> Transform</a:t>
-            </a:r>
-            <a:endParaRPr/>
-          </a:p>
-          <a:p>
-            <a:pPr marL="457200" lvl="0" indent="-317500" algn="l" rtl="0">
-              <a:lnSpc>
-                <a:spcPct val="115000"/>
-              </a:lnSpc>
-              <a:spcBef>
-                <a:spcPts val="0"/>
-              </a:spcBef>
-              <a:spcAft>
-                <a:spcPts val="0"/>
-              </a:spcAft>
-              <a:buSzPts val="1400"/>
-              <a:buChar char="●"/>
-            </a:pPr>
-            <a:r>
-              <a:rPr lang="en"/>
-              <a:t> Visualise</a:t>
-            </a:r>
-            <a:endParaRPr/>
-          </a:p>
-          <a:p>
-            <a:pPr marL="457200" lvl="0" indent="-317500" algn="l" rtl="0">
-              <a:lnSpc>
-                <a:spcPct val="115000"/>
-              </a:lnSpc>
-              <a:spcBef>
-                <a:spcPts val="0"/>
-              </a:spcBef>
-              <a:spcAft>
-                <a:spcPts val="0"/>
-              </a:spcAft>
-              <a:buSzPts val="1400"/>
-              <a:buChar char="●"/>
-            </a:pPr>
-            <a:r>
-              <a:rPr lang="en"/>
-              <a:t> Describe</a:t>
-            </a:r>
-            <a:endParaRPr/>
-          </a:p>
-          <a:p>
-            <a:pPr marL="457200" lvl="0" indent="-317500" algn="l" rtl="0">
-              <a:lnSpc>
-                <a:spcPct val="115000"/>
-              </a:lnSpc>
-              <a:spcBef>
-                <a:spcPts val="0"/>
-              </a:spcBef>
-              <a:spcAft>
-                <a:spcPts val="0"/>
-              </a:spcAft>
-              <a:buSzPts val="1400"/>
-              <a:buChar char="●"/>
-            </a:pPr>
-            <a:r>
-              <a:rPr lang="en"/>
-              <a:t> Model</a:t>
-            </a:r>
-            <a:endParaRPr/>
-          </a:p>
-          <a:p>
-            <a:pPr marL="457200" lvl="0" indent="-317500" algn="l" rtl="0">
-              <a:lnSpc>
-                <a:spcPct val="115000"/>
-              </a:lnSpc>
-              <a:spcBef>
-                <a:spcPts val="0"/>
-              </a:spcBef>
-              <a:spcAft>
-                <a:spcPts val="0"/>
-              </a:spcAft>
-              <a:buSzPts val="1400"/>
-              <a:buChar char="●"/>
-            </a:pPr>
-            <a:r>
-              <a:rPr lang="en"/>
-              <a:t> Moderate / mediate</a:t>
-            </a:r>
-            <a:endParaRPr/>
-          </a:p>
-          <a:p>
-            <a:pPr marL="457200" lvl="0" indent="-317500" algn="l" rtl="0">
-              <a:lnSpc>
-                <a:spcPct val="115000"/>
-              </a:lnSpc>
-              <a:spcBef>
-                <a:spcPts val="0"/>
-              </a:spcBef>
-              <a:spcAft>
-                <a:spcPts val="0"/>
-              </a:spcAft>
-              <a:buSzPts val="1400"/>
-              <a:buChar char="●"/>
-            </a:pPr>
-            <a:r>
-              <a:rPr lang="en"/>
-              <a:t> Collaborate</a:t>
-            </a:r>
-            <a:endParaRPr/>
-          </a:p>
-        </p:txBody>
-      </p:sp>
-      <p:sp>
-        <p:nvSpPr>
-          <p:cNvPr id="218" name="Google Shape;218;p39"/>
-          <p:cNvSpPr txBox="1">
-            <a:spLocks noGrp="1"/>
-          </p:cNvSpPr>
-          <p:nvPr>
-            <p:ph type="subTitle" idx="3"/>
-          </p:nvPr>
-        </p:nvSpPr>
-        <p:spPr>
-          <a:xfrm>
-            <a:off x="6214123" y="1456315"/>
-            <a:ext cx="2613000" cy="657073"/>
-          </a:xfrm>
-          <a:prstGeom prst="rect">
-            <a:avLst/>
-          </a:prstGeom>
-        </p:spPr>
-        <p:txBody>
-          <a:bodyPr spcFirstLastPara="1" wrap="square" lIns="91425" tIns="91425" rIns="91425" bIns="91425" anchor="t" anchorCtr="0">
-            <a:spAutoFit/>
-          </a:bodyPr>
-          <a:lstStyle/>
-          <a:p>
-            <a:pPr marL="0" lvl="0" indent="0" algn="l" rtl="0">
-              <a:lnSpc>
-                <a:spcPct val="115000"/>
-              </a:lnSpc>
-              <a:spcBef>
-                <a:spcPts val="1200"/>
-              </a:spcBef>
-              <a:spcAft>
-                <a:spcPts val="0"/>
-              </a:spcAft>
-              <a:buNone/>
-            </a:pPr>
-            <a:r>
-              <a:rPr lang="en" dirty="0"/>
-              <a:t>Day 3: Publish</a:t>
-            </a:r>
-            <a:endParaRPr dirty="0"/>
-          </a:p>
-        </p:txBody>
-      </p:sp>
-      <p:sp>
-        <p:nvSpPr>
-          <p:cNvPr id="219" name="Google Shape;219;p39"/>
-          <p:cNvSpPr txBox="1">
-            <a:spLocks noGrp="1"/>
-          </p:cNvSpPr>
-          <p:nvPr>
-            <p:ph type="subTitle" idx="6"/>
-          </p:nvPr>
-        </p:nvSpPr>
-        <p:spPr>
-          <a:xfrm>
-            <a:off x="6214123" y="1954665"/>
-            <a:ext cx="2613000" cy="2130300"/>
-          </a:xfrm>
-          <a:prstGeom prst="rect">
-            <a:avLst/>
-          </a:prstGeom>
-        </p:spPr>
-        <p:txBody>
-          <a:bodyPr spcFirstLastPara="1" wrap="square" lIns="91425" tIns="91425" rIns="91425" bIns="91425" anchor="t" anchorCtr="0">
-            <a:spAutoFit/>
-          </a:bodyPr>
-          <a:lstStyle/>
-          <a:p>
-            <a:pPr marL="457200" lvl="0" indent="-317500" algn="l" rtl="0">
-              <a:lnSpc>
-                <a:spcPct val="115000"/>
-              </a:lnSpc>
-              <a:spcBef>
-                <a:spcPts val="1200"/>
-              </a:spcBef>
-              <a:spcAft>
-                <a:spcPts val="0"/>
-              </a:spcAft>
-              <a:buSzPts val="1400"/>
-              <a:buChar char="●"/>
-            </a:pPr>
-            <a:r>
-              <a:rPr lang="en"/>
-              <a:t>Export tables and figures</a:t>
-            </a:r>
-            <a:endParaRPr/>
-          </a:p>
-          <a:p>
-            <a:pPr marL="457200" lvl="0" indent="-317500" algn="l" rtl="0">
-              <a:lnSpc>
-                <a:spcPct val="115000"/>
-              </a:lnSpc>
-              <a:spcBef>
-                <a:spcPts val="0"/>
-              </a:spcBef>
-              <a:spcAft>
-                <a:spcPts val="0"/>
-              </a:spcAft>
-              <a:buSzPts val="1400"/>
-              <a:buChar char="●"/>
-            </a:pPr>
-            <a:r>
-              <a:rPr lang="en"/>
-              <a:t>Write methods</a:t>
-            </a:r>
-            <a:endParaRPr/>
-          </a:p>
-          <a:p>
-            <a:pPr marL="457200" lvl="0" indent="-317500" algn="l" rtl="0">
-              <a:lnSpc>
-                <a:spcPct val="115000"/>
-              </a:lnSpc>
-              <a:spcBef>
-                <a:spcPts val="0"/>
-              </a:spcBef>
-              <a:spcAft>
-                <a:spcPts val="0"/>
-              </a:spcAft>
-              <a:buSzPts val="1400"/>
-              <a:buChar char="●"/>
-            </a:pPr>
-            <a:r>
-              <a:rPr lang="en"/>
-              <a:t>Write results</a:t>
-            </a:r>
-            <a:endParaRPr/>
-          </a:p>
-          <a:p>
-            <a:pPr marL="457200" lvl="0" indent="-317500" algn="l" rtl="0">
-              <a:lnSpc>
-                <a:spcPct val="115000"/>
-              </a:lnSpc>
-              <a:spcBef>
-                <a:spcPts val="0"/>
-              </a:spcBef>
-              <a:spcAft>
-                <a:spcPts val="0"/>
-              </a:spcAft>
-              <a:buSzPts val="1400"/>
-              <a:buChar char="●"/>
-            </a:pPr>
-            <a:r>
-              <a:rPr lang="en"/>
-              <a:t>Static/ Annotated/ interactive report</a:t>
-            </a:r>
-            <a:endParaRPr/>
-          </a:p>
-          <a:p>
-            <a:pPr marL="457200" lvl="0" indent="-317500" algn="l" rtl="0">
-              <a:lnSpc>
-                <a:spcPct val="115000"/>
-              </a:lnSpc>
-              <a:spcBef>
-                <a:spcPts val="0"/>
-              </a:spcBef>
-              <a:spcAft>
-                <a:spcPts val="0"/>
-              </a:spcAft>
-              <a:buSzPts val="1400"/>
-              <a:buChar char="●"/>
-            </a:pPr>
-            <a:r>
-              <a:rPr lang="en"/>
-              <a:t>AI-use statement</a:t>
-            </a:r>
-            <a:endParaRPr/>
-          </a:p>
-          <a:p>
-            <a:pPr marL="457200" lvl="0" indent="-317500" algn="l" rtl="0">
-              <a:lnSpc>
-                <a:spcPct val="115000"/>
-              </a:lnSpc>
-              <a:spcBef>
-                <a:spcPts val="0"/>
-              </a:spcBef>
-              <a:spcAft>
-                <a:spcPts val="0"/>
-              </a:spcAft>
-              <a:buSzPts val="1400"/>
-              <a:buChar char="●"/>
-            </a:pPr>
-            <a:r>
-              <a:rPr lang="en"/>
-              <a:t>Reproducibility check</a:t>
-            </a:r>
-            <a:endParaRPr/>
-          </a:p>
-        </p:txBody>
-      </p:sp>
-      <p:sp>
-        <p:nvSpPr>
-          <p:cNvPr id="2" name="Rectangle 1">
-            <a:extLst>
-              <a:ext uri="{FF2B5EF4-FFF2-40B4-BE49-F238E27FC236}">
-                <a16:creationId xmlns:a16="http://schemas.microsoft.com/office/drawing/2014/main" id="{5D9E859B-C973-BB82-FAC6-2E562233FFD5}"/>
-              </a:ext>
-            </a:extLst>
-          </p:cNvPr>
-          <p:cNvSpPr/>
-          <p:nvPr/>
-        </p:nvSpPr>
-        <p:spPr>
-          <a:xfrm>
-            <a:off x="677638" y="1640332"/>
-            <a:ext cx="2286279" cy="2341992"/>
-          </a:xfrm>
-          <a:prstGeom prst="rect">
-            <a:avLst/>
-          </a:prstGeom>
-          <a:gradFill flip="none" rotWithShape="1">
-            <a:gsLst>
-              <a:gs pos="0">
-                <a:srgbClr val="F4FBFB">
-                  <a:alpha val="57873"/>
-                </a:srgbClr>
-              </a:gs>
-              <a:gs pos="100000">
-                <a:srgbClr val="ECF5F6">
-                  <a:alpha val="58000"/>
-                </a:srgbClr>
-              </a:gs>
-            </a:gsLst>
-            <a:lin ang="5400000" scaled="1"/>
-            <a:tileRect/>
-          </a:gradFill>
-          <a:ln>
-            <a:noFill/>
-          </a:ln>
-        </p:spPr>
-        <p:style>
-          <a:lnRef idx="2">
-            <a:schemeClr val="accent1">
-              <a:shade val="15000"/>
-            </a:schemeClr>
-          </a:lnRef>
-          <a:fillRef idx="1">
-            <a:schemeClr val="accent1"/>
-          </a:fillRef>
-          <a:effectRef idx="0">
-            <a:schemeClr val="accent1"/>
-          </a:effectRef>
-          <a:fontRef idx="minor">
-            <a:schemeClr val="lt1"/>
-          </a:fontRef>
-        </p:style>
-        <p:txBody>
-          <a:bodyPr rtlCol="0" anchor="ctr"/>
-          <a:lstStyle/>
-          <a:p>
-            <a:pPr algn="ctr"/>
-            <a:endParaRPr lang="en-US"/>
-          </a:p>
-        </p:txBody>
-      </p:sp>
-      <p:sp>
-        <p:nvSpPr>
-          <p:cNvPr id="3" name="Rectangle 2">
-            <a:extLst>
-              <a:ext uri="{FF2B5EF4-FFF2-40B4-BE49-F238E27FC236}">
-                <a16:creationId xmlns:a16="http://schemas.microsoft.com/office/drawing/2014/main" id="{EF38F364-4573-8FD0-953C-A8A381C799AD}"/>
-              </a:ext>
-            </a:extLst>
-          </p:cNvPr>
-          <p:cNvSpPr/>
-          <p:nvPr/>
-        </p:nvSpPr>
-        <p:spPr>
-          <a:xfrm>
-            <a:off x="3290637" y="1559928"/>
-            <a:ext cx="2613000" cy="3152454"/>
-          </a:xfrm>
-          <a:prstGeom prst="rect">
-            <a:avLst/>
-          </a:prstGeom>
-          <a:gradFill flip="none" rotWithShape="1">
-            <a:gsLst>
-              <a:gs pos="0">
-                <a:srgbClr val="F4FBFB">
-                  <a:alpha val="58000"/>
-                </a:srgbClr>
-              </a:gs>
-              <a:gs pos="99000">
-                <a:srgbClr val="EBF4F5">
-                  <a:alpha val="58000"/>
-                </a:srgbClr>
-              </a:gs>
-            </a:gsLst>
-            <a:lin ang="5400000" scaled="1"/>
-            <a:tileRect/>
-          </a:gradFill>
-          <a:ln>
-            <a:noFill/>
-          </a:ln>
-        </p:spPr>
-        <p:style>
-          <a:lnRef idx="2">
-            <a:schemeClr val="accent1">
-              <a:shade val="15000"/>
-            </a:schemeClr>
-          </a:lnRef>
-          <a:fillRef idx="1">
-            <a:schemeClr val="accent1"/>
-          </a:fillRef>
-          <a:effectRef idx="0">
-            <a:schemeClr val="accent1"/>
-          </a:effectRef>
-          <a:fontRef idx="minor">
-            <a:schemeClr val="lt1"/>
-          </a:fontRef>
-        </p:style>
-        <p:txBody>
-          <a:bodyPr rtlCol="0" anchor="ctr"/>
-          <a:lstStyle/>
-          <a:p>
-            <a:pPr algn="ctr"/>
-            <a:endParaRPr lang="en-US"/>
-          </a:p>
-        </p:txBody>
-      </p:sp>
-    </p:spTree>
-  </p:cSld>
-  <p:clrMapOvr>
-    <a:masterClrMapping/>
-  </p:clrMapOvr>
-  <p:transition spd="slow">
-    <p:fade thruBlk="1"/>
-  </p:transition>
-</p:sld>
-</file>
-
-<file path=ppt/slides/slide30.xml><?xml version="1.0" encoding="utf-8"?>
+<file path=ppt/slides/slide31.xml><?xml version="1.0" encoding="utf-8"?>
 <p:sld xmlns:a="http://schemas.openxmlformats.org/drawingml/2006/main" xmlns:r="http://schemas.openxmlformats.org/officeDocument/2006/relationships" xmlns:p="http://schemas.openxmlformats.org/presentationml/2006/main">
   <p:cSld name="Slide 25">
     <p:spTree>
@@ -36518,7 +36363,7 @@
 </p:sld>
 </file>
 
-<file path=ppt/slides/slide31.xml><?xml version="1.0" encoding="utf-8"?>
+<file path=ppt/slides/slide32.xml><?xml version="1.0" encoding="utf-8"?>
 <p:sld xmlns:a="http://schemas.openxmlformats.org/drawingml/2006/main" xmlns:r="http://schemas.openxmlformats.org/officeDocument/2006/relationships" xmlns:p="http://schemas.openxmlformats.org/presentationml/2006/main">
   <p:cSld name="Slide 26">
     <p:spTree>
@@ -36959,7 +36804,7 @@
 </p:sld>
 </file>
 
-<file path=ppt/slides/slide32.xml><?xml version="1.0" encoding="utf-8"?>
+<file path=ppt/slides/slide33.xml><?xml version="1.0" encoding="utf-8"?>
 <p:sld xmlns:a="http://schemas.openxmlformats.org/drawingml/2006/main" xmlns:r="http://schemas.openxmlformats.org/officeDocument/2006/relationships" xmlns:p="http://schemas.openxmlformats.org/presentationml/2006/main">
   <p:cSld name="Slide 27">
     <p:spTree>
@@ -37471,7 +37316,7 @@
 </p:sld>
 </file>
 
-<file path=ppt/slides/slide33.xml><?xml version="1.0" encoding="utf-8"?>
+<file path=ppt/slides/slide34.xml><?xml version="1.0" encoding="utf-8"?>
 <p:sld xmlns:a="http://schemas.openxmlformats.org/drawingml/2006/main" xmlns:r="http://schemas.openxmlformats.org/officeDocument/2006/relationships" xmlns:p="http://schemas.openxmlformats.org/presentationml/2006/main">
   <p:cSld>
     <p:spTree>
@@ -37609,7 +37454,7 @@
 </p:sld>
 </file>
 
-<file path=ppt/slides/slide34.xml><?xml version="1.0" encoding="utf-8"?>
+<file path=ppt/slides/slide35.xml><?xml version="1.0" encoding="utf-8"?>
 <p:sld xmlns:a="http://schemas.openxmlformats.org/drawingml/2006/main" xmlns:r="http://schemas.openxmlformats.org/officeDocument/2006/relationships" xmlns:p="http://schemas.openxmlformats.org/presentationml/2006/main">
   <p:cSld>
     <p:spTree>
@@ -37750,7 +37595,7 @@
 </p:sld>
 </file>
 
-<file path=ppt/slides/slide35.xml><?xml version="1.0" encoding="utf-8"?>
+<file path=ppt/slides/slide36.xml><?xml version="1.0" encoding="utf-8"?>
 <p:sld xmlns:a="http://schemas.openxmlformats.org/drawingml/2006/main" xmlns:r="http://schemas.openxmlformats.org/officeDocument/2006/relationships" xmlns:p="http://schemas.openxmlformats.org/presentationml/2006/main">
   <p:cSld>
     <p:spTree>
@@ -37866,7 +37711,7 @@
 </p:sld>
 </file>
 
-<file path=ppt/slides/slide36.xml><?xml version="1.0" encoding="utf-8"?>
+<file path=ppt/slides/slide37.xml><?xml version="1.0" encoding="utf-8"?>
 <p:sld xmlns:a="http://schemas.openxmlformats.org/drawingml/2006/main" xmlns:r="http://schemas.openxmlformats.org/officeDocument/2006/relationships" xmlns:p="http://schemas.openxmlformats.org/presentationml/2006/main">
   <p:cSld>
     <p:spTree>
@@ -39083,6 +38928,844 @@
   <p:cSld>
     <p:spTree>
       <p:nvGrpSpPr>
+        <p:cNvPr id="1" name="Shape 212"/>
+        <p:cNvGrpSpPr/>
+        <p:nvPr/>
+      </p:nvGrpSpPr>
+      <p:grpSpPr>
+        <a:xfrm>
+          <a:off x="0" y="0"/>
+          <a:ext cx="0" cy="0"/>
+          <a:chOff x="0" y="0"/>
+          <a:chExt cx="0" cy="0"/>
+        </a:xfrm>
+      </p:grpSpPr>
+      <p:sp>
+        <p:nvSpPr>
+          <p:cNvPr id="213" name="Google Shape;213;p39"/>
+          <p:cNvSpPr txBox="1">
+            <a:spLocks noGrp="1"/>
+          </p:cNvSpPr>
+          <p:nvPr>
+            <p:ph type="title"/>
+          </p:nvPr>
+        </p:nvSpPr>
+        <p:spPr>
+          <a:xfrm>
+            <a:off x="1718550" y="431118"/>
+            <a:ext cx="5706900" cy="744000"/>
+          </a:xfrm>
+          <a:prstGeom prst="rect">
+            <a:avLst/>
+          </a:prstGeom>
+        </p:spPr>
+        <p:txBody>
+          <a:bodyPr spcFirstLastPara="1" wrap="square" lIns="91425" tIns="91425" rIns="91425" bIns="91425" anchor="t" anchorCtr="0">
+            <a:noAutofit/>
+          </a:bodyPr>
+          <a:lstStyle/>
+          <a:p>
+            <a:pPr marL="0" lvl="0" indent="0" algn="ctr" rtl="0">
+              <a:lnSpc>
+                <a:spcPct val="115000"/>
+              </a:lnSpc>
+              <a:spcBef>
+                <a:spcPts val="1200"/>
+              </a:spcBef>
+              <a:spcAft>
+                <a:spcPts val="1200"/>
+              </a:spcAft>
+              <a:buNone/>
+            </a:pPr>
+            <a:r>
+              <a:rPr lang="en" dirty="0"/>
+              <a:t>The three-day roadmap</a:t>
+            </a:r>
+            <a:endParaRPr dirty="0"/>
+          </a:p>
+        </p:txBody>
+      </p:sp>
+      <p:sp>
+        <p:nvSpPr>
+          <p:cNvPr id="214" name="Google Shape;214;p39"/>
+          <p:cNvSpPr txBox="1">
+            <a:spLocks noGrp="1"/>
+          </p:cNvSpPr>
+          <p:nvPr>
+            <p:ph type="subTitle" idx="3"/>
+          </p:nvPr>
+        </p:nvSpPr>
+        <p:spPr>
+          <a:xfrm>
+            <a:off x="677638" y="1456315"/>
+            <a:ext cx="2613000" cy="461700"/>
+          </a:xfrm>
+          <a:prstGeom prst="rect">
+            <a:avLst/>
+          </a:prstGeom>
+        </p:spPr>
+        <p:txBody>
+          <a:bodyPr spcFirstLastPara="1" wrap="square" lIns="91425" tIns="91425" rIns="91425" bIns="91425" anchor="t" anchorCtr="0">
+            <a:spAutoFit/>
+          </a:bodyPr>
+          <a:lstStyle/>
+          <a:p>
+            <a:pPr marL="0" lvl="0" indent="0" algn="l" rtl="0">
+              <a:lnSpc>
+                <a:spcPct val="115000"/>
+              </a:lnSpc>
+              <a:spcBef>
+                <a:spcPts val="1200"/>
+              </a:spcBef>
+              <a:spcAft>
+                <a:spcPts val="1200"/>
+              </a:spcAft>
+              <a:buNone/>
+            </a:pPr>
+            <a:r>
+              <a:rPr lang="en"/>
+              <a:t>Day 1: Scaffold</a:t>
+            </a:r>
+            <a:endParaRPr/>
+          </a:p>
+        </p:txBody>
+      </p:sp>
+      <p:sp>
+        <p:nvSpPr>
+          <p:cNvPr id="215" name="Google Shape;215;p39"/>
+          <p:cNvSpPr txBox="1">
+            <a:spLocks noGrp="1"/>
+          </p:cNvSpPr>
+          <p:nvPr>
+            <p:ph type="subTitle" idx="6"/>
+          </p:nvPr>
+        </p:nvSpPr>
+        <p:spPr>
+          <a:xfrm>
+            <a:off x="677638" y="1954665"/>
+            <a:ext cx="2613000" cy="2037451"/>
+          </a:xfrm>
+          <a:prstGeom prst="rect">
+            <a:avLst/>
+          </a:prstGeom>
+        </p:spPr>
+        <p:txBody>
+          <a:bodyPr spcFirstLastPara="1" wrap="square" lIns="91425" tIns="91425" rIns="91425" bIns="91425" anchor="t" anchorCtr="0">
+            <a:spAutoFit/>
+          </a:bodyPr>
+          <a:lstStyle/>
+          <a:p>
+            <a:pPr marL="457200" lvl="0" indent="-317500" algn="l" rtl="0">
+              <a:lnSpc>
+                <a:spcPct val="115000"/>
+              </a:lnSpc>
+              <a:spcBef>
+                <a:spcPts val="1200"/>
+              </a:spcBef>
+              <a:spcAft>
+                <a:spcPts val="0"/>
+              </a:spcAft>
+              <a:buSzPts val="1400"/>
+              <a:buChar char="●"/>
+            </a:pPr>
+            <a:r>
+              <a:rPr lang="en" dirty="0"/>
+              <a:t>R</a:t>
+            </a:r>
+            <a:endParaRPr dirty="0"/>
+          </a:p>
+          <a:p>
+            <a:pPr marL="457200" lvl="0" indent="-317500" algn="l" rtl="0">
+              <a:lnSpc>
+                <a:spcPct val="115000"/>
+              </a:lnSpc>
+              <a:spcBef>
+                <a:spcPts val="0"/>
+              </a:spcBef>
+              <a:spcAft>
+                <a:spcPts val="0"/>
+              </a:spcAft>
+              <a:buSzPts val="1400"/>
+              <a:buChar char="●"/>
+            </a:pPr>
+            <a:r>
+              <a:rPr lang="en" dirty="0"/>
+              <a:t>R</a:t>
+            </a:r>
+            <a:r>
+              <a:rPr lang="en-GB" dirty="0"/>
+              <a:t>s</a:t>
+            </a:r>
+            <a:r>
+              <a:rPr lang="en" dirty="0" err="1"/>
+              <a:t>tudio</a:t>
+            </a:r>
+            <a:endParaRPr lang="en" dirty="0"/>
+          </a:p>
+          <a:p>
+            <a:pPr marL="457200" indent="-317500" algn="l">
+              <a:lnSpc>
+                <a:spcPct val="115000"/>
+              </a:lnSpc>
+              <a:buSzPts val="1400"/>
+              <a:buFont typeface="Arial"/>
+              <a:buChar char="●"/>
+            </a:pPr>
+            <a:r>
+              <a:rPr lang="en-GB" dirty="0"/>
+              <a:t>Git/GitHub basics</a:t>
+            </a:r>
+            <a:endParaRPr dirty="0"/>
+          </a:p>
+          <a:p>
+            <a:pPr marL="457200" lvl="0" indent="-317500" algn="l" rtl="0">
+              <a:lnSpc>
+                <a:spcPct val="115000"/>
+              </a:lnSpc>
+              <a:spcBef>
+                <a:spcPts val="0"/>
+              </a:spcBef>
+              <a:spcAft>
+                <a:spcPts val="0"/>
+              </a:spcAft>
+              <a:buSzPts val="1400"/>
+              <a:buChar char="●"/>
+            </a:pPr>
+            <a:r>
+              <a:rPr lang="en" dirty="0"/>
+              <a:t>Folders</a:t>
+            </a:r>
+            <a:endParaRPr dirty="0"/>
+          </a:p>
+          <a:p>
+            <a:pPr marL="457200" lvl="0" indent="-317500" algn="l" rtl="0">
+              <a:lnSpc>
+                <a:spcPct val="115000"/>
+              </a:lnSpc>
+              <a:spcBef>
+                <a:spcPts val="0"/>
+              </a:spcBef>
+              <a:spcAft>
+                <a:spcPts val="0"/>
+              </a:spcAft>
+              <a:buSzPts val="1400"/>
+              <a:buChar char="●"/>
+            </a:pPr>
+            <a:r>
+              <a:rPr lang="en" dirty="0"/>
+              <a:t>Data protection</a:t>
+            </a:r>
+          </a:p>
+          <a:p>
+            <a:pPr marL="457200" lvl="0" indent="-317500" algn="l" rtl="0">
+              <a:lnSpc>
+                <a:spcPct val="115000"/>
+              </a:lnSpc>
+              <a:spcBef>
+                <a:spcPts val="0"/>
+              </a:spcBef>
+              <a:spcAft>
+                <a:spcPts val="0"/>
+              </a:spcAft>
+              <a:buSzPts val="1400"/>
+              <a:buChar char="●"/>
+            </a:pPr>
+            <a:r>
+              <a:rPr lang="en" dirty="0"/>
+              <a:t>Quarto</a:t>
+            </a:r>
+            <a:endParaRPr dirty="0"/>
+          </a:p>
+        </p:txBody>
+      </p:sp>
+      <p:sp>
+        <p:nvSpPr>
+          <p:cNvPr id="216" name="Google Shape;216;p39"/>
+          <p:cNvSpPr txBox="1">
+            <a:spLocks noGrp="1"/>
+          </p:cNvSpPr>
+          <p:nvPr>
+            <p:ph type="subTitle" idx="3"/>
+          </p:nvPr>
+        </p:nvSpPr>
+        <p:spPr>
+          <a:xfrm>
+            <a:off x="3445880" y="1456315"/>
+            <a:ext cx="2613000" cy="461700"/>
+          </a:xfrm>
+          <a:prstGeom prst="rect">
+            <a:avLst/>
+          </a:prstGeom>
+        </p:spPr>
+        <p:txBody>
+          <a:bodyPr spcFirstLastPara="1" wrap="square" lIns="91425" tIns="91425" rIns="91425" bIns="91425" anchor="t" anchorCtr="0">
+            <a:spAutoFit/>
+          </a:bodyPr>
+          <a:lstStyle/>
+          <a:p>
+            <a:pPr marL="0" lvl="0" indent="0" algn="l" rtl="0">
+              <a:lnSpc>
+                <a:spcPct val="115000"/>
+              </a:lnSpc>
+              <a:spcBef>
+                <a:spcPts val="1200"/>
+              </a:spcBef>
+              <a:spcAft>
+                <a:spcPts val="1200"/>
+              </a:spcAft>
+              <a:buNone/>
+            </a:pPr>
+            <a:r>
+              <a:rPr lang="en"/>
+              <a:t>Day 2: Analyse </a:t>
+            </a:r>
+            <a:endParaRPr/>
+          </a:p>
+        </p:txBody>
+      </p:sp>
+      <p:sp>
+        <p:nvSpPr>
+          <p:cNvPr id="217" name="Google Shape;217;p39"/>
+          <p:cNvSpPr txBox="1">
+            <a:spLocks noGrp="1"/>
+          </p:cNvSpPr>
+          <p:nvPr>
+            <p:ph type="subTitle" idx="6"/>
+          </p:nvPr>
+        </p:nvSpPr>
+        <p:spPr>
+          <a:xfrm>
+            <a:off x="3445880" y="1954665"/>
+            <a:ext cx="2613000" cy="2696700"/>
+          </a:xfrm>
+          <a:prstGeom prst="rect">
+            <a:avLst/>
+          </a:prstGeom>
+        </p:spPr>
+        <p:txBody>
+          <a:bodyPr spcFirstLastPara="1" wrap="square" lIns="91425" tIns="91425" rIns="91425" bIns="91425" anchor="t" anchorCtr="0">
+            <a:spAutoFit/>
+          </a:bodyPr>
+          <a:lstStyle/>
+          <a:p>
+            <a:pPr marL="457200" lvl="0" indent="-317500" algn="l" rtl="0">
+              <a:lnSpc>
+                <a:spcPct val="115000"/>
+              </a:lnSpc>
+              <a:spcBef>
+                <a:spcPts val="1200"/>
+              </a:spcBef>
+              <a:spcAft>
+                <a:spcPts val="0"/>
+              </a:spcAft>
+              <a:buSzPts val="1400"/>
+              <a:buChar char="●"/>
+            </a:pPr>
+            <a:r>
+              <a:rPr lang="en"/>
+              <a:t>Base R</a:t>
+            </a:r>
+            <a:endParaRPr/>
+          </a:p>
+          <a:p>
+            <a:pPr marL="457200" lvl="0" indent="-317500" algn="l" rtl="0">
+              <a:lnSpc>
+                <a:spcPct val="115000"/>
+              </a:lnSpc>
+              <a:spcBef>
+                <a:spcPts val="0"/>
+              </a:spcBef>
+              <a:spcAft>
+                <a:spcPts val="0"/>
+              </a:spcAft>
+              <a:buSzPts val="1400"/>
+              <a:buChar char="●"/>
+            </a:pPr>
+            <a:r>
+              <a:rPr lang="en"/>
+              <a:t> Import</a:t>
+            </a:r>
+            <a:endParaRPr/>
+          </a:p>
+          <a:p>
+            <a:pPr marL="457200" lvl="0" indent="-317500" algn="l" rtl="0">
+              <a:lnSpc>
+                <a:spcPct val="115000"/>
+              </a:lnSpc>
+              <a:spcBef>
+                <a:spcPts val="0"/>
+              </a:spcBef>
+              <a:spcAft>
+                <a:spcPts val="0"/>
+              </a:spcAft>
+              <a:buSzPts val="1400"/>
+              <a:buChar char="●"/>
+            </a:pPr>
+            <a:r>
+              <a:rPr lang="en"/>
+              <a:t> Clean</a:t>
+            </a:r>
+            <a:endParaRPr/>
+          </a:p>
+          <a:p>
+            <a:pPr marL="457200" lvl="0" indent="-317500" algn="l" rtl="0">
+              <a:lnSpc>
+                <a:spcPct val="115000"/>
+              </a:lnSpc>
+              <a:spcBef>
+                <a:spcPts val="0"/>
+              </a:spcBef>
+              <a:spcAft>
+                <a:spcPts val="0"/>
+              </a:spcAft>
+              <a:buSzPts val="1400"/>
+              <a:buChar char="●"/>
+            </a:pPr>
+            <a:r>
+              <a:rPr lang="en"/>
+              <a:t> Transform</a:t>
+            </a:r>
+            <a:endParaRPr/>
+          </a:p>
+          <a:p>
+            <a:pPr marL="457200" lvl="0" indent="-317500" algn="l" rtl="0">
+              <a:lnSpc>
+                <a:spcPct val="115000"/>
+              </a:lnSpc>
+              <a:spcBef>
+                <a:spcPts val="0"/>
+              </a:spcBef>
+              <a:spcAft>
+                <a:spcPts val="0"/>
+              </a:spcAft>
+              <a:buSzPts val="1400"/>
+              <a:buChar char="●"/>
+            </a:pPr>
+            <a:r>
+              <a:rPr lang="en"/>
+              <a:t> Visualise</a:t>
+            </a:r>
+            <a:endParaRPr/>
+          </a:p>
+          <a:p>
+            <a:pPr marL="457200" lvl="0" indent="-317500" algn="l" rtl="0">
+              <a:lnSpc>
+                <a:spcPct val="115000"/>
+              </a:lnSpc>
+              <a:spcBef>
+                <a:spcPts val="0"/>
+              </a:spcBef>
+              <a:spcAft>
+                <a:spcPts val="0"/>
+              </a:spcAft>
+              <a:buSzPts val="1400"/>
+              <a:buChar char="●"/>
+            </a:pPr>
+            <a:r>
+              <a:rPr lang="en"/>
+              <a:t> Describe</a:t>
+            </a:r>
+            <a:endParaRPr/>
+          </a:p>
+          <a:p>
+            <a:pPr marL="457200" lvl="0" indent="-317500" algn="l" rtl="0">
+              <a:lnSpc>
+                <a:spcPct val="115000"/>
+              </a:lnSpc>
+              <a:spcBef>
+                <a:spcPts val="0"/>
+              </a:spcBef>
+              <a:spcAft>
+                <a:spcPts val="0"/>
+              </a:spcAft>
+              <a:buSzPts val="1400"/>
+              <a:buChar char="●"/>
+            </a:pPr>
+            <a:r>
+              <a:rPr lang="en"/>
+              <a:t> Model</a:t>
+            </a:r>
+            <a:endParaRPr/>
+          </a:p>
+          <a:p>
+            <a:pPr marL="457200" lvl="0" indent="-317500" algn="l" rtl="0">
+              <a:lnSpc>
+                <a:spcPct val="115000"/>
+              </a:lnSpc>
+              <a:spcBef>
+                <a:spcPts val="0"/>
+              </a:spcBef>
+              <a:spcAft>
+                <a:spcPts val="0"/>
+              </a:spcAft>
+              <a:buSzPts val="1400"/>
+              <a:buChar char="●"/>
+            </a:pPr>
+            <a:r>
+              <a:rPr lang="en"/>
+              <a:t> Moderate / mediate</a:t>
+            </a:r>
+            <a:endParaRPr/>
+          </a:p>
+          <a:p>
+            <a:pPr marL="457200" lvl="0" indent="-317500" algn="l" rtl="0">
+              <a:lnSpc>
+                <a:spcPct val="115000"/>
+              </a:lnSpc>
+              <a:spcBef>
+                <a:spcPts val="0"/>
+              </a:spcBef>
+              <a:spcAft>
+                <a:spcPts val="0"/>
+              </a:spcAft>
+              <a:buSzPts val="1400"/>
+              <a:buChar char="●"/>
+            </a:pPr>
+            <a:r>
+              <a:rPr lang="en"/>
+              <a:t> Collaborate</a:t>
+            </a:r>
+            <a:endParaRPr/>
+          </a:p>
+        </p:txBody>
+      </p:sp>
+      <p:sp>
+        <p:nvSpPr>
+          <p:cNvPr id="218" name="Google Shape;218;p39"/>
+          <p:cNvSpPr txBox="1">
+            <a:spLocks noGrp="1"/>
+          </p:cNvSpPr>
+          <p:nvPr>
+            <p:ph type="subTitle" idx="3"/>
+          </p:nvPr>
+        </p:nvSpPr>
+        <p:spPr>
+          <a:xfrm>
+            <a:off x="6214123" y="1456315"/>
+            <a:ext cx="2613000" cy="657073"/>
+          </a:xfrm>
+          <a:prstGeom prst="rect">
+            <a:avLst/>
+          </a:prstGeom>
+        </p:spPr>
+        <p:txBody>
+          <a:bodyPr spcFirstLastPara="1" wrap="square" lIns="91425" tIns="91425" rIns="91425" bIns="91425" anchor="t" anchorCtr="0">
+            <a:spAutoFit/>
+          </a:bodyPr>
+          <a:lstStyle/>
+          <a:p>
+            <a:pPr marL="0" lvl="0" indent="0" algn="l" rtl="0">
+              <a:lnSpc>
+                <a:spcPct val="115000"/>
+              </a:lnSpc>
+              <a:spcBef>
+                <a:spcPts val="1200"/>
+              </a:spcBef>
+              <a:spcAft>
+                <a:spcPts val="0"/>
+              </a:spcAft>
+              <a:buNone/>
+            </a:pPr>
+            <a:r>
+              <a:rPr lang="en" dirty="0"/>
+              <a:t>Day 3: Publish</a:t>
+            </a:r>
+            <a:endParaRPr dirty="0"/>
+          </a:p>
+        </p:txBody>
+      </p:sp>
+      <p:sp>
+        <p:nvSpPr>
+          <p:cNvPr id="219" name="Google Shape;219;p39"/>
+          <p:cNvSpPr txBox="1">
+            <a:spLocks noGrp="1"/>
+          </p:cNvSpPr>
+          <p:nvPr>
+            <p:ph type="subTitle" idx="6"/>
+          </p:nvPr>
+        </p:nvSpPr>
+        <p:spPr>
+          <a:xfrm>
+            <a:off x="6214123" y="1954665"/>
+            <a:ext cx="2613000" cy="2130300"/>
+          </a:xfrm>
+          <a:prstGeom prst="rect">
+            <a:avLst/>
+          </a:prstGeom>
+        </p:spPr>
+        <p:txBody>
+          <a:bodyPr spcFirstLastPara="1" wrap="square" lIns="91425" tIns="91425" rIns="91425" bIns="91425" anchor="t" anchorCtr="0">
+            <a:spAutoFit/>
+          </a:bodyPr>
+          <a:lstStyle/>
+          <a:p>
+            <a:pPr marL="457200" lvl="0" indent="-317500" algn="l" rtl="0">
+              <a:lnSpc>
+                <a:spcPct val="115000"/>
+              </a:lnSpc>
+              <a:spcBef>
+                <a:spcPts val="1200"/>
+              </a:spcBef>
+              <a:spcAft>
+                <a:spcPts val="0"/>
+              </a:spcAft>
+              <a:buSzPts val="1400"/>
+              <a:buChar char="●"/>
+            </a:pPr>
+            <a:r>
+              <a:rPr lang="en"/>
+              <a:t>Export tables and figures</a:t>
+            </a:r>
+            <a:endParaRPr/>
+          </a:p>
+          <a:p>
+            <a:pPr marL="457200" lvl="0" indent="-317500" algn="l" rtl="0">
+              <a:lnSpc>
+                <a:spcPct val="115000"/>
+              </a:lnSpc>
+              <a:spcBef>
+                <a:spcPts val="0"/>
+              </a:spcBef>
+              <a:spcAft>
+                <a:spcPts val="0"/>
+              </a:spcAft>
+              <a:buSzPts val="1400"/>
+              <a:buChar char="●"/>
+            </a:pPr>
+            <a:r>
+              <a:rPr lang="en"/>
+              <a:t>Write methods</a:t>
+            </a:r>
+            <a:endParaRPr/>
+          </a:p>
+          <a:p>
+            <a:pPr marL="457200" lvl="0" indent="-317500" algn="l" rtl="0">
+              <a:lnSpc>
+                <a:spcPct val="115000"/>
+              </a:lnSpc>
+              <a:spcBef>
+                <a:spcPts val="0"/>
+              </a:spcBef>
+              <a:spcAft>
+                <a:spcPts val="0"/>
+              </a:spcAft>
+              <a:buSzPts val="1400"/>
+              <a:buChar char="●"/>
+            </a:pPr>
+            <a:r>
+              <a:rPr lang="en"/>
+              <a:t>Write results</a:t>
+            </a:r>
+            <a:endParaRPr/>
+          </a:p>
+          <a:p>
+            <a:pPr marL="457200" lvl="0" indent="-317500" algn="l" rtl="0">
+              <a:lnSpc>
+                <a:spcPct val="115000"/>
+              </a:lnSpc>
+              <a:spcBef>
+                <a:spcPts val="0"/>
+              </a:spcBef>
+              <a:spcAft>
+                <a:spcPts val="0"/>
+              </a:spcAft>
+              <a:buSzPts val="1400"/>
+              <a:buChar char="●"/>
+            </a:pPr>
+            <a:r>
+              <a:rPr lang="en"/>
+              <a:t>Static/ Annotated/ interactive report</a:t>
+            </a:r>
+            <a:endParaRPr/>
+          </a:p>
+          <a:p>
+            <a:pPr marL="457200" lvl="0" indent="-317500" algn="l" rtl="0">
+              <a:lnSpc>
+                <a:spcPct val="115000"/>
+              </a:lnSpc>
+              <a:spcBef>
+                <a:spcPts val="0"/>
+              </a:spcBef>
+              <a:spcAft>
+                <a:spcPts val="0"/>
+              </a:spcAft>
+              <a:buSzPts val="1400"/>
+              <a:buChar char="●"/>
+            </a:pPr>
+            <a:r>
+              <a:rPr lang="en"/>
+              <a:t>AI-use statement</a:t>
+            </a:r>
+            <a:endParaRPr/>
+          </a:p>
+          <a:p>
+            <a:pPr marL="457200" lvl="0" indent="-317500" algn="l" rtl="0">
+              <a:lnSpc>
+                <a:spcPct val="115000"/>
+              </a:lnSpc>
+              <a:spcBef>
+                <a:spcPts val="0"/>
+              </a:spcBef>
+              <a:spcAft>
+                <a:spcPts val="0"/>
+              </a:spcAft>
+              <a:buSzPts val="1400"/>
+              <a:buChar char="●"/>
+            </a:pPr>
+            <a:r>
+              <a:rPr lang="en"/>
+              <a:t>Reproducibility check</a:t>
+            </a:r>
+            <a:endParaRPr/>
+          </a:p>
+        </p:txBody>
+      </p:sp>
+      <p:sp>
+        <p:nvSpPr>
+          <p:cNvPr id="2" name="Rectangle 1">
+            <a:extLst>
+              <a:ext uri="{FF2B5EF4-FFF2-40B4-BE49-F238E27FC236}">
+                <a16:creationId xmlns:a16="http://schemas.microsoft.com/office/drawing/2014/main" id="{5D9E859B-C973-BB82-FAC6-2E562233FFD5}"/>
+              </a:ext>
+            </a:extLst>
+          </p:cNvPr>
+          <p:cNvSpPr/>
+          <p:nvPr/>
+        </p:nvSpPr>
+        <p:spPr>
+          <a:xfrm>
+            <a:off x="677638" y="1640332"/>
+            <a:ext cx="2286279" cy="2341992"/>
+          </a:xfrm>
+          <a:prstGeom prst="rect">
+            <a:avLst/>
+          </a:prstGeom>
+          <a:gradFill flip="none" rotWithShape="1">
+            <a:gsLst>
+              <a:gs pos="0">
+                <a:srgbClr val="F4FBFB">
+                  <a:alpha val="57873"/>
+                </a:srgbClr>
+              </a:gs>
+              <a:gs pos="100000">
+                <a:srgbClr val="ECF5F6">
+                  <a:alpha val="58000"/>
+                </a:srgbClr>
+              </a:gs>
+            </a:gsLst>
+            <a:lin ang="5400000" scaled="1"/>
+            <a:tileRect/>
+          </a:gradFill>
+          <a:ln>
+            <a:noFill/>
+          </a:ln>
+        </p:spPr>
+        <p:style>
+          <a:lnRef idx="2">
+            <a:schemeClr val="accent1">
+              <a:shade val="15000"/>
+            </a:schemeClr>
+          </a:lnRef>
+          <a:fillRef idx="1">
+            <a:schemeClr val="accent1"/>
+          </a:fillRef>
+          <a:effectRef idx="0">
+            <a:schemeClr val="accent1"/>
+          </a:effectRef>
+          <a:fontRef idx="minor">
+            <a:schemeClr val="lt1"/>
+          </a:fontRef>
+        </p:style>
+        <p:txBody>
+          <a:bodyPr rtlCol="0" anchor="ctr"/>
+          <a:lstStyle/>
+          <a:p>
+            <a:pPr algn="ctr"/>
+            <a:endParaRPr lang="en-US"/>
+          </a:p>
+        </p:txBody>
+      </p:sp>
+      <p:sp>
+        <p:nvSpPr>
+          <p:cNvPr id="3" name="Rectangle 2">
+            <a:extLst>
+              <a:ext uri="{FF2B5EF4-FFF2-40B4-BE49-F238E27FC236}">
+                <a16:creationId xmlns:a16="http://schemas.microsoft.com/office/drawing/2014/main" id="{EF38F364-4573-8FD0-953C-A8A381C799AD}"/>
+              </a:ext>
+            </a:extLst>
+          </p:cNvPr>
+          <p:cNvSpPr/>
+          <p:nvPr/>
+        </p:nvSpPr>
+        <p:spPr>
+          <a:xfrm>
+            <a:off x="3290637" y="1559928"/>
+            <a:ext cx="2613000" cy="3152454"/>
+          </a:xfrm>
+          <a:prstGeom prst="rect">
+            <a:avLst/>
+          </a:prstGeom>
+          <a:gradFill flip="none" rotWithShape="1">
+            <a:gsLst>
+              <a:gs pos="0">
+                <a:srgbClr val="F4FBFB">
+                  <a:alpha val="58000"/>
+                </a:srgbClr>
+              </a:gs>
+              <a:gs pos="99000">
+                <a:srgbClr val="EBF4F5">
+                  <a:alpha val="58000"/>
+                </a:srgbClr>
+              </a:gs>
+            </a:gsLst>
+            <a:lin ang="5400000" scaled="1"/>
+            <a:tileRect/>
+          </a:gradFill>
+          <a:ln>
+            <a:noFill/>
+          </a:ln>
+        </p:spPr>
+        <p:style>
+          <a:lnRef idx="2">
+            <a:schemeClr val="accent1">
+              <a:shade val="15000"/>
+            </a:schemeClr>
+          </a:lnRef>
+          <a:fillRef idx="1">
+            <a:schemeClr val="accent1"/>
+          </a:fillRef>
+          <a:effectRef idx="0">
+            <a:schemeClr val="accent1"/>
+          </a:effectRef>
+          <a:fontRef idx="minor">
+            <a:schemeClr val="lt1"/>
+          </a:fontRef>
+        </p:style>
+        <p:txBody>
+          <a:bodyPr rtlCol="0" anchor="ctr"/>
+          <a:lstStyle/>
+          <a:p>
+            <a:pPr algn="ctr"/>
+            <a:endParaRPr lang="en-US"/>
+          </a:p>
+        </p:txBody>
+      </p:sp>
+    </p:spTree>
+  </p:cSld>
+  <p:clrMapOvr>
+    <a:masterClrMapping/>
+  </p:clrMapOvr>
+  <p:transition spd="slow">
+    <p:fade thruBlk="1"/>
+  </p:transition>
+</p:sld>
+</file>
+
+<file path=ppt/slides/slide5.xml><?xml version="1.0" encoding="utf-8"?>
+<p:sld xmlns:a="http://schemas.openxmlformats.org/drawingml/2006/main" xmlns:r="http://schemas.openxmlformats.org/officeDocument/2006/relationships" xmlns:p="http://schemas.openxmlformats.org/presentationml/2006/main">
+  <p:cSld>
+    <p:spTree>
+      <p:nvGrpSpPr>
         <p:cNvPr id="1" name="">
           <a:extLst>
             <a:ext uri="{FF2B5EF4-FFF2-40B4-BE49-F238E27FC236}">
@@ -39129,7 +39812,7 @@
           <a:p>
             <a:r>
               <a:rPr lang="en-US" dirty="0"/>
-              <a:t>The Report</a:t>
+              <a:t>The Hypercharge</a:t>
             </a:r>
           </a:p>
         </p:txBody>
@@ -39216,7 +39899,7 @@
 </p:sld>
 </file>
 
-<file path=ppt/slides/slide5.xml><?xml version="1.0" encoding="utf-8"?>
+<file path=ppt/slides/slide6.xml><?xml version="1.0" encoding="utf-8"?>
 <p:sld xmlns:a="http://schemas.openxmlformats.org/drawingml/2006/main" xmlns:r="http://schemas.openxmlformats.org/officeDocument/2006/relationships" xmlns:p="http://schemas.openxmlformats.org/presentationml/2006/main">
   <p:cSld>
     <p:spTree>
@@ -39235,10 +39918,38 @@
       </p:grpSpPr>
       <p:sp>
         <p:nvSpPr>
-          <p:cNvPr id="2" name="Subtitle 1">
+          <p:cNvPr id="2" name="Title 1">
             <a:extLst>
               <a:ext uri="{FF2B5EF4-FFF2-40B4-BE49-F238E27FC236}">
-                <a16:creationId xmlns:a16="http://schemas.microsoft.com/office/drawing/2014/main" id="{6B2FF288-F7D4-CA51-8950-77085B323A4E}"/>
+                <a16:creationId xmlns:a16="http://schemas.microsoft.com/office/drawing/2014/main" id="{90BDADD5-066C-B2BA-6634-DC29ECED2527}"/>
+              </a:ext>
+            </a:extLst>
+          </p:cNvPr>
+          <p:cNvSpPr>
+            <a:spLocks noGrp="1"/>
+          </p:cNvSpPr>
+          <p:nvPr>
+            <p:ph type="ctrTitle"/>
+          </p:nvPr>
+        </p:nvSpPr>
+        <p:spPr/>
+        <p:txBody>
+          <a:bodyPr/>
+          <a:lstStyle/>
+          <a:p>
+            <a:r>
+              <a:rPr lang="en-NL" dirty="0"/>
+              <a:t>Add Overleaf integration?</a:t>
+            </a:r>
+          </a:p>
+        </p:txBody>
+      </p:sp>
+      <p:sp>
+        <p:nvSpPr>
+          <p:cNvPr id="3" name="Subtitle 2">
+            <a:extLst>
+              <a:ext uri="{FF2B5EF4-FFF2-40B4-BE49-F238E27FC236}">
+                <a16:creationId xmlns:a16="http://schemas.microsoft.com/office/drawing/2014/main" id="{6E72109C-6EAC-949F-32B0-9719F484186D}"/>
               </a:ext>
             </a:extLst>
           </p:cNvPr>
@@ -39256,65 +39967,15 @@
           <a:p>
             <a:r>
               <a:rPr lang="en-NL" dirty="0"/>
-              <a:t>Day Three Slides follow here</a:t>
+              <a:t>Show how to make a pdf</a:t>
             </a:r>
-          </a:p>
-        </p:txBody>
-      </p:sp>
-      <p:sp>
-        <p:nvSpPr>
-          <p:cNvPr id="3" name="Title 2">
-            <a:extLst>
-              <a:ext uri="{FF2B5EF4-FFF2-40B4-BE49-F238E27FC236}">
-                <a16:creationId xmlns:a16="http://schemas.microsoft.com/office/drawing/2014/main" id="{E32528B3-306F-5178-3CE2-E67F94E49BA6}"/>
-              </a:ext>
-            </a:extLst>
-          </p:cNvPr>
-          <p:cNvSpPr>
-            <a:spLocks noGrp="1"/>
-          </p:cNvSpPr>
-          <p:nvPr>
-            <p:ph type="title"/>
-          </p:nvPr>
-        </p:nvSpPr>
-        <p:spPr/>
-        <p:txBody>
-          <a:bodyPr/>
-          <a:lstStyle/>
-          <a:p>
-            <a:endParaRPr lang="en-NL" dirty="0"/>
-          </a:p>
-        </p:txBody>
-      </p:sp>
-      <p:sp>
-        <p:nvSpPr>
-          <p:cNvPr id="4" name="Subtitle 3">
-            <a:extLst>
-              <a:ext uri="{FF2B5EF4-FFF2-40B4-BE49-F238E27FC236}">
-                <a16:creationId xmlns:a16="http://schemas.microsoft.com/office/drawing/2014/main" id="{37F0F13F-E8D0-3189-15C5-39CC37544571}"/>
-              </a:ext>
-            </a:extLst>
-          </p:cNvPr>
-          <p:cNvSpPr>
-            <a:spLocks noGrp="1"/>
-          </p:cNvSpPr>
-          <p:nvPr>
-            <p:ph type="subTitle" idx="2"/>
-          </p:nvPr>
-        </p:nvSpPr>
-        <p:spPr/>
-        <p:txBody>
-          <a:bodyPr/>
-          <a:lstStyle/>
-          <a:p>
-            <a:endParaRPr lang="en-NL"/>
           </a:p>
         </p:txBody>
       </p:sp>
     </p:spTree>
     <p:extLst>
       <p:ext uri="{BB962C8B-B14F-4D97-AF65-F5344CB8AC3E}">
-        <p14:creationId xmlns:p14="http://schemas.microsoft.com/office/powerpoint/2010/main" val="599254622"/>
+        <p14:creationId xmlns:p14="http://schemas.microsoft.com/office/powerpoint/2010/main" val="2192189812"/>
       </p:ext>
     </p:extLst>
   </p:cSld>
@@ -39324,7 +39985,7 @@
 </p:sld>
 </file>
 
-<file path=ppt/slides/slide6.xml><?xml version="1.0" encoding="utf-8"?>
+<file path=ppt/slides/slide7.xml><?xml version="1.0" encoding="utf-8"?>
 <p:sld xmlns:a="http://schemas.openxmlformats.org/drawingml/2006/main" xmlns:r="http://schemas.openxmlformats.org/officeDocument/2006/relationships" xmlns:p="http://schemas.openxmlformats.org/presentationml/2006/main">
   <p:cSld name="Slide 1">
     <p:spTree>
@@ -39374,7 +40035,23 @@
                 <a:ea typeface="Montserrat" pitchFamily="34" charset="-122"/>
                 <a:cs typeface="Montserrat" pitchFamily="34" charset="-120"/>
               </a:rPr>
-              <a:t>In three years, "AI" went from autocomplete to colleague</a:t>
+              <a:t>In three years, "AI" went from autocomplete to </a:t>
+            </a:r>
+          </a:p>
+          <a:p>
+            <a:pPr marL="0" indent="0">
+              <a:buNone/>
+            </a:pPr>
+            <a:r>
+              <a:rPr lang="en-US" sz="2000" b="1" dirty="0">
+                <a:solidFill>
+                  <a:srgbClr val="103C46"/>
+                </a:solidFill>
+                <a:latin typeface="Montserrat" pitchFamily="34" charset="0"/>
+                <a:ea typeface="Montserrat" pitchFamily="34" charset="-122"/>
+                <a:cs typeface="Montserrat" pitchFamily="34" charset="-120"/>
+              </a:rPr>
+              <a:t>colleague</a:t>
             </a:r>
             <a:endParaRPr lang="en-US" sz="2000" dirty="0"/>
           </a:p>
@@ -39692,7 +40369,7 @@
 </p:sld>
 </file>
 
-<file path=ppt/slides/slide7.xml><?xml version="1.0" encoding="utf-8"?>
+<file path=ppt/slides/slide8.xml><?xml version="1.0" encoding="utf-8"?>
 <p:sld xmlns:a="http://schemas.openxmlformats.org/drawingml/2006/main" xmlns:r="http://schemas.openxmlformats.org/officeDocument/2006/relationships" xmlns:p="http://schemas.openxmlformats.org/presentationml/2006/main">
   <p:cSld name="Slide 2">
     <p:spTree>
@@ -39946,7 +40623,7 @@
                 <a:ea typeface="Consolas" pitchFamily="34" charset="-122"/>
                 <a:cs typeface="Consolas" pitchFamily="34" charset="-120"/>
               </a:rPr>
-              <a:t>  read some text, then guess the next "token" (≈ the next word or word-piece).</a:t>
+              <a:t>  read some text, then predict the next "token" (≈ the next word or word-piece).</a:t>
             </a:r>
             <a:endParaRPr lang="en-US" sz="1200" dirty="0"/>
           </a:p>
@@ -39975,7 +40652,7 @@
                 <a:ea typeface="Consolas" pitchFamily="34" charset="-122"/>
                 <a:cs typeface="Consolas" pitchFamily="34" charset="-120"/>
               </a:rPr>
-              <a:t>Guess wrong → adjust. Repeat billions of times.</a:t>
+              <a:t>Guess wrong → adjust/learn. Repeat billions of times.</a:t>
             </a:r>
             <a:endParaRPr lang="en-US" sz="1200" dirty="0"/>
           </a:p>
@@ -40106,7 +40783,7 @@
 </p:sld>
 </file>
 
-<file path=ppt/slides/slide8.xml><?xml version="1.0" encoding="utf-8"?>
+<file path=ppt/slides/slide9.xml><?xml version="1.0" encoding="utf-8"?>
 <p:sld xmlns:a="http://schemas.openxmlformats.org/drawingml/2006/main" xmlns:r="http://schemas.openxmlformats.org/officeDocument/2006/relationships" xmlns:p="http://schemas.openxmlformats.org/presentationml/2006/main">
   <p:cSld name="Slide 3">
     <p:spTree>
@@ -40156,7 +40833,7 @@
                 <a:ea typeface="Montserrat" pitchFamily="34" charset="-122"/>
                 <a:cs typeface="Montserrat" pitchFamily="34" charset="-120"/>
               </a:rPr>
-              <a:t>Watch it think one token at a time</a:t>
+              <a:t>Exercise – Are you a LLM</a:t>
             </a:r>
             <a:endParaRPr lang="en-US" sz="2300" dirty="0"/>
           </a:p>
@@ -40506,314 +41183,6 @@
                 <a:cs typeface="Consolas" pitchFamily="34" charset="-120"/>
               </a:rPr>
               <a:t>Each answer is just: "given everything so far, what token is most likely next?"</a:t>
-            </a:r>
-            <a:endParaRPr lang="en-US" sz="1200" dirty="0"/>
-          </a:p>
-        </p:txBody>
-      </p:sp>
-    </p:spTree>
-  </p:cSld>
-  <p:clrMapOvr>
-    <a:masterClrMapping/>
-  </p:clrMapOvr>
-</p:sld>
-</file>
-
-<file path=ppt/slides/slide9.xml><?xml version="1.0" encoding="utf-8"?>
-<p:sld xmlns:a="http://schemas.openxmlformats.org/drawingml/2006/main" xmlns:r="http://schemas.openxmlformats.org/officeDocument/2006/relationships" xmlns:p="http://schemas.openxmlformats.org/presentationml/2006/main">
-  <p:cSld name="Slide 4">
-    <p:spTree>
-      <p:nvGrpSpPr>
-        <p:cNvPr id="1" name=""/>
-        <p:cNvGrpSpPr/>
-        <p:nvPr/>
-      </p:nvGrpSpPr>
-      <p:grpSpPr>
-        <a:xfrm>
-          <a:off x="0" y="0"/>
-          <a:ext cx="0" cy="0"/>
-          <a:chOff x="0" y="0"/>
-          <a:chExt cx="0" cy="0"/>
-        </a:xfrm>
-      </p:grpSpPr>
-      <p:sp>
-        <p:nvSpPr>
-          <p:cNvPr id="2" name="Text 0"/>
-          <p:cNvSpPr/>
-          <p:nvPr/>
-        </p:nvSpPr>
-        <p:spPr>
-          <a:xfrm>
-            <a:off x="502920" y="347472"/>
-            <a:ext cx="8138160" cy="749808"/>
-          </a:xfrm>
-          <a:prstGeom prst="rect">
-            <a:avLst/>
-          </a:prstGeom>
-          <a:noFill/>
-          <a:ln/>
-        </p:spPr>
-        <p:txBody>
-          <a:bodyPr wrap="square" rtlCol="0" anchor="t"/>
-          <a:lstStyle/>
-          <a:p>
-            <a:pPr marL="0" indent="0">
-              <a:buNone/>
-            </a:pPr>
-            <a:r>
-              <a:rPr lang="en-US" sz="2300" b="1" dirty="0">
-                <a:solidFill>
-                  <a:srgbClr val="103C46"/>
-                </a:solidFill>
-                <a:latin typeface="Montserrat" pitchFamily="34" charset="0"/>
-                <a:ea typeface="Montserrat" pitchFamily="34" charset="-122"/>
-                <a:cs typeface="Montserrat" pitchFamily="34" charset="-120"/>
-              </a:rPr>
-              <a:t>Strengths and traps, on one slide</a:t>
-            </a:r>
-            <a:endParaRPr lang="en-US" sz="2300" dirty="0"/>
-          </a:p>
-        </p:txBody>
-      </p:sp>
-      <p:sp>
-        <p:nvSpPr>
-          <p:cNvPr id="3" name="Text 1"/>
-          <p:cNvSpPr/>
-          <p:nvPr/>
-        </p:nvSpPr>
-        <p:spPr>
-          <a:xfrm>
-            <a:off x="521208" y="1152144"/>
-            <a:ext cx="8138160" cy="274320"/>
-          </a:xfrm>
-          <a:prstGeom prst="rect">
-            <a:avLst/>
-          </a:prstGeom>
-          <a:noFill/>
-          <a:ln/>
-        </p:spPr>
-        <p:txBody>
-          <a:bodyPr wrap="square" rtlCol="0" anchor="ctr"/>
-          <a:lstStyle/>
-          <a:p>
-            <a:pPr marL="0" indent="0">
-              <a:buNone/>
-            </a:pPr>
-            <a:r>
-              <a:rPr lang="en-US" sz="1250" dirty="0">
-                <a:solidFill>
-                  <a:srgbClr val="258497"/>
-                </a:solidFill>
-                <a:latin typeface="Montserrat" pitchFamily="34" charset="0"/>
-                <a:ea typeface="Montserrat" pitchFamily="34" charset="-122"/>
-                <a:cs typeface="Montserrat" pitchFamily="34" charset="-120"/>
-              </a:rPr>
-              <a:t>Day 3 · The rise of LLMs</a:t>
-            </a:r>
-            <a:endParaRPr lang="en-US" sz="1250" dirty="0"/>
-          </a:p>
-        </p:txBody>
-      </p:sp>
-      <p:sp>
-        <p:nvSpPr>
-          <p:cNvPr id="4" name="Shape 2"/>
-          <p:cNvSpPr/>
-          <p:nvPr/>
-        </p:nvSpPr>
-        <p:spPr>
-          <a:xfrm>
-            <a:off x="502920" y="1481328"/>
-            <a:ext cx="8229600" cy="1606296"/>
-          </a:xfrm>
-          <a:prstGeom prst="rect">
-            <a:avLst/>
-          </a:prstGeom>
-          <a:solidFill>
-            <a:srgbClr val="EAF3F5"/>
-          </a:solidFill>
-          <a:ln/>
-        </p:spPr>
-        <p:txBody>
-          <a:bodyPr/>
-          <a:lstStyle/>
-          <a:p>
-            <a:endParaRPr lang="en-NL"/>
-          </a:p>
-        </p:txBody>
-      </p:sp>
-      <p:sp>
-        <p:nvSpPr>
-          <p:cNvPr id="5" name="Shape 3"/>
-          <p:cNvSpPr/>
-          <p:nvPr/>
-        </p:nvSpPr>
-        <p:spPr>
-          <a:xfrm>
-            <a:off x="502920" y="1481328"/>
-            <a:ext cx="50292" cy="1606296"/>
-          </a:xfrm>
-          <a:prstGeom prst="rect">
-            <a:avLst/>
-          </a:prstGeom>
-          <a:solidFill>
-            <a:srgbClr val="258497"/>
-          </a:solidFill>
-          <a:ln/>
-        </p:spPr>
-        <p:txBody>
-          <a:bodyPr/>
-          <a:lstStyle/>
-          <a:p>
-            <a:endParaRPr lang="en-NL"/>
-          </a:p>
-        </p:txBody>
-      </p:sp>
-      <p:sp>
-        <p:nvSpPr>
-          <p:cNvPr id="6" name="Text 4"/>
-          <p:cNvSpPr/>
-          <p:nvPr/>
-        </p:nvSpPr>
-        <p:spPr>
-          <a:xfrm>
-            <a:off x="685800" y="1591056"/>
-            <a:ext cx="7936992" cy="1386840"/>
-          </a:xfrm>
-          <a:prstGeom prst="rect">
-            <a:avLst/>
-          </a:prstGeom>
-          <a:noFill/>
-          <a:ln/>
-        </p:spPr>
-        <p:txBody>
-          <a:bodyPr wrap="square" rtlCol="0" anchor="t"/>
-          <a:lstStyle/>
-          <a:p>
-            <a:pPr marL="0" indent="0" algn="l">
-              <a:lnSpc>
-                <a:spcPct val="110000"/>
-              </a:lnSpc>
-              <a:buNone/>
-            </a:pPr>
-            <a:r>
-              <a:rPr lang="en-US" sz="1200" dirty="0">
-                <a:solidFill>
-                  <a:srgbClr val="163C44"/>
-                </a:solidFill>
-                <a:latin typeface="Consolas" pitchFamily="34" charset="0"/>
-                <a:ea typeface="Consolas" pitchFamily="34" charset="-122"/>
-                <a:cs typeface="Consolas" pitchFamily="34" charset="-120"/>
-              </a:rPr>
-              <a:t>Genuinely good at:               Will confidently get wrong:</a:t>
-            </a:r>
-            <a:endParaRPr lang="en-US" sz="1200" dirty="0"/>
-          </a:p>
-          <a:p>
-            <a:pPr marL="0" indent="0" algn="l">
-              <a:lnSpc>
-                <a:spcPct val="110000"/>
-              </a:lnSpc>
-              <a:buNone/>
-            </a:pPr>
-            <a:r>
-              <a:rPr lang="en-US" sz="1200" dirty="0">
-                <a:solidFill>
-                  <a:srgbClr val="163C44"/>
-                </a:solidFill>
-                <a:latin typeface="Consolas" pitchFamily="34" charset="0"/>
-                <a:ea typeface="Consolas" pitchFamily="34" charset="-122"/>
-                <a:cs typeface="Consolas" pitchFamily="34" charset="-120"/>
-              </a:rPr>
-              <a:t>  - boilerplate &amp; syntax           - your specific data &amp; column names</a:t>
-            </a:r>
-            <a:endParaRPr lang="en-US" sz="1200" dirty="0"/>
-          </a:p>
-          <a:p>
-            <a:pPr marL="0" indent="0" algn="l">
-              <a:lnSpc>
-                <a:spcPct val="110000"/>
-              </a:lnSpc>
-              <a:buNone/>
-            </a:pPr>
-            <a:r>
-              <a:rPr lang="en-US" sz="1200" dirty="0">
-                <a:solidFill>
-                  <a:srgbClr val="163C44"/>
-                </a:solidFill>
-                <a:latin typeface="Consolas" pitchFamily="34" charset="0"/>
-                <a:ea typeface="Consolas" pitchFamily="34" charset="-122"/>
-                <a:cs typeface="Consolas" pitchFamily="34" charset="-120"/>
-              </a:rPr>
-              <a:t>  - explaining code/errors         - exact statistics it didn't compute</a:t>
-            </a:r>
-            <a:endParaRPr lang="en-US" sz="1200" dirty="0"/>
-          </a:p>
-          <a:p>
-            <a:pPr marL="0" indent="0" algn="l">
-              <a:lnSpc>
-                <a:spcPct val="110000"/>
-              </a:lnSpc>
-              <a:buNone/>
-            </a:pPr>
-            <a:r>
-              <a:rPr lang="en-US" sz="1200" dirty="0">
-                <a:solidFill>
-                  <a:srgbClr val="163C44"/>
-                </a:solidFill>
-                <a:latin typeface="Consolas" pitchFamily="34" charset="0"/>
-                <a:ea typeface="Consolas" pitchFamily="34" charset="-122"/>
-                <a:cs typeface="Consolas" pitchFamily="34" charset="-120"/>
-              </a:rPr>
-              <a:t>  - common R / tidyverse patterns  - citations and package details</a:t>
-            </a:r>
-            <a:endParaRPr lang="en-US" sz="1200" dirty="0"/>
-          </a:p>
-          <a:p>
-            <a:pPr marL="0" indent="0" algn="l">
-              <a:lnSpc>
-                <a:spcPct val="110000"/>
-              </a:lnSpc>
-              <a:buNone/>
-            </a:pPr>
-            <a:r>
-              <a:rPr lang="en-US" sz="1200" dirty="0">
-                <a:solidFill>
-                  <a:srgbClr val="163C44"/>
-                </a:solidFill>
-                <a:latin typeface="Consolas" pitchFamily="34" charset="0"/>
-                <a:ea typeface="Consolas" pitchFamily="34" charset="-122"/>
-                <a:cs typeface="Consolas" pitchFamily="34" charset="-120"/>
-              </a:rPr>
-              <a:t>  - translating ideas → first draft- anything it never saw in training</a:t>
-            </a:r>
-            <a:endParaRPr lang="en-US" sz="1200" dirty="0"/>
-          </a:p>
-          <a:p>
-            <a:pPr marL="0" indent="0" algn="l">
-              <a:lnSpc>
-                <a:spcPct val="110000"/>
-              </a:lnSpc>
-              <a:buNone/>
-            </a:pPr>
-            <a:endParaRPr lang="en-US" sz="1200" dirty="0"/>
-          </a:p>
-          <a:p>
-            <a:pPr marL="0" indent="0" algn="l">
-              <a:lnSpc>
-                <a:spcPct val="110000"/>
-              </a:lnSpc>
-              <a:buNone/>
-            </a:pPr>
-            <a:r>
-              <a:rPr lang="en-US" sz="1200" dirty="0">
-                <a:solidFill>
-                  <a:srgbClr val="163C44"/>
-                </a:solidFill>
-                <a:latin typeface="Consolas" pitchFamily="34" charset="0"/>
-                <a:ea typeface="Consolas" pitchFamily="34" charset="-122"/>
-                <a:cs typeface="Consolas" pitchFamily="34" charset="-120"/>
-              </a:rPr>
-              <a:t>The fix for almost every trap: give it CONTEXT, and VERIFY the output.</a:t>
             </a:r>
             <a:endParaRPr lang="en-US" sz="1200" dirty="0"/>
           </a:p>
